--- a/decks/Day 2/Day2-Section1-CSharp-SDK-Fundamentals.pptx
+++ b/decks/Day 2/Day2-Section1-CSharp-SDK-Fundamentals.pptx
@@ -19,10 +19,7 @@
     <p:sldId id="267" r:id="rId13"/>
     <p:sldId id="268" r:id="rId14"/>
   </p:sldIdLst>
-  <p:notesMasterIdLst>
-    <p:notesMasterId r:id="rId15"/>
-  </p:notesMasterIdLst>
-  <p:sldSz cx="9144000" cy="5143500"/>
+  <p:sldSz cx="9144000" cy="5143500" type="screen16x9"/>
   <p:notesSz cx="5143500" cy="9144000"/>
   <p:defaultTextStyle>
     <a:lvl1pPr marL="0" algn="l" defTabSz="914400" rtl="0" eaLnBrk="1" latinLnBrk="0" hangingPunct="1">
@@ -116,356 +113,12 @@
       </a:defRPr>
     </a:lvl9pPr>
   </p:defaultTextStyle>
+  <p:extLst>
+    <p:ext uri="{EFAFB233-063F-42B5-8137-9DF3F51BA10A}">
+      <p15:sldGuideLst xmlns:p15="http://schemas.microsoft.com/office/powerpoint/2012/main"/>
+    </p:ext>
+  </p:extLst>
 </p:presentation>
-</file>
-
-<file path=ppt/notesMasters/notesMaster1.xml><?xml version="1.0" encoding="utf-8"?>
-<p:notesMaster xmlns:a="http://schemas.openxmlformats.org/drawingml/2006/main" xmlns:r="http://schemas.openxmlformats.org/officeDocument/2006/relationships" xmlns:p="http://schemas.openxmlformats.org/presentationml/2006/main">
-  <p:cSld>
-    <p:bg>
-      <p:bgRef idx="1001">
-        <a:schemeClr val="bg1"/>
-      </p:bgRef>
-    </p:bg>
-    <p:spTree>
-      <p:nvGrpSpPr>
-        <p:cNvPr id="1" name=""/>
-        <p:cNvGrpSpPr/>
-        <p:nvPr/>
-      </p:nvGrpSpPr>
-      <p:grpSpPr>
-        <a:xfrm>
-          <a:off x="0" y="0"/>
-          <a:ext cx="0" cy="0"/>
-          <a:chOff x="0" y="0"/>
-          <a:chExt cx="0" cy="0"/>
-        </a:xfrm>
-      </p:grpSpPr>
-      <p:sp>
-        <p:nvSpPr>
-          <p:cNvPr id="2" name="Header Placeholder 1"/>
-          <p:cNvSpPr>
-            <a:spLocks noGrp="1"/>
-          </p:cNvSpPr>
-          <p:nvPr>
-            <p:ph type="hdr" sz="quarter"/>
-          </p:nvPr>
-        </p:nvSpPr>
-        <p:spPr>
-          <a:xfrm>
-            <a:off x="0" y="0"/>
-            <a:ext cx="2971800" cy="458788"/>
-          </a:xfrm>
-          <a:prstGeom prst="rect">
-            <a:avLst/>
-          </a:prstGeom>
-        </p:spPr>
-        <p:txBody>
-          <a:bodyPr vert="horz" lIns="91440" tIns="45720" rIns="91440" bIns="45720" rtlCol="0"/>
-          <a:lstStyle>
-            <a:lvl1pPr algn="l">
-              <a:defRPr sz="1200"/>
-            </a:lvl1pPr>
-          </a:lstStyle>
-          <a:p>
-            <a:endParaRPr lang="en-US"/>
-          </a:p>
-        </p:txBody>
-      </p:sp>
-      <p:sp>
-        <p:nvSpPr>
-          <p:cNvPr id="3" name="Date Placeholder 2"/>
-          <p:cNvSpPr>
-            <a:spLocks noGrp="1"/>
-          </p:cNvSpPr>
-          <p:nvPr>
-            <p:ph type="dt" idx="1"/>
-          </p:nvPr>
-        </p:nvSpPr>
-        <p:spPr>
-          <a:xfrm>
-            <a:off x="3884613" y="0"/>
-            <a:ext cx="2971800" cy="458788"/>
-          </a:xfrm>
-          <a:prstGeom prst="rect">
-            <a:avLst/>
-          </a:prstGeom>
-        </p:spPr>
-        <p:txBody>
-          <a:bodyPr vert="horz" lIns="91440" tIns="45720" rIns="91440" bIns="45720" rtlCol="0"/>
-          <a:lstStyle>
-            <a:lvl1pPr algn="r">
-              <a:defRPr sz="1200"/>
-            </a:lvl1pPr>
-          </a:lstStyle>
-          <a:p>
-            <a:fld id="{5282F153-3F37-0F45-9E97-73ACFA13230C}" type="datetimeFigureOut">
-              <a:rPr lang="en-US"/>
-              <a:t>7/23/19</a:t>
-            </a:fld>
-            <a:endParaRPr lang="en-US"/>
-          </a:p>
-        </p:txBody>
-      </p:sp>
-      <p:sp>
-        <p:nvSpPr>
-          <p:cNvPr id="4" name="Slide Image Placeholder 3"/>
-          <p:cNvSpPr>
-            <a:spLocks noGrp="1" noRot="1" noChangeAspect="1"/>
-          </p:cNvSpPr>
-          <p:nvPr>
-            <p:ph type="sldImg" idx="2"/>
-          </p:nvPr>
-        </p:nvSpPr>
-        <p:spPr>
-          <a:xfrm>
-            <a:off x="685800" y="1143000"/>
-            <a:ext cx="5486400" cy="3086100"/>
-          </a:xfrm>
-          <a:prstGeom prst="rect">
-            <a:avLst/>
-          </a:prstGeom>
-          <a:noFill/>
-          <a:ln w="12700">
-            <a:solidFill>
-              <a:prstClr val="black"/>
-            </a:solidFill>
-          </a:ln>
-        </p:spPr>
-        <p:txBody>
-          <a:bodyPr vert="horz" lIns="91440" tIns="45720" rIns="91440" bIns="45720" rtlCol="0" anchor="ctr"/>
-          <a:lstStyle/>
-          <a:p>
-            <a:endParaRPr lang="en-US"/>
-          </a:p>
-        </p:txBody>
-      </p:sp>
-      <p:sp>
-        <p:nvSpPr>
-          <p:cNvPr id="5" name="Notes Placeholder 4"/>
-          <p:cNvSpPr>
-            <a:spLocks noGrp="1"/>
-          </p:cNvSpPr>
-          <p:nvPr>
-            <p:ph type="body" sz="quarter" idx="3"/>
-          </p:nvPr>
-        </p:nvSpPr>
-        <p:spPr>
-          <a:xfrm>
-            <a:off x="685800" y="4400550"/>
-            <a:ext cx="5486400" cy="3600450"/>
-          </a:xfrm>
-          <a:prstGeom prst="rect">
-            <a:avLst/>
-          </a:prstGeom>
-        </p:spPr>
-        <p:txBody>
-          <a:bodyPr vert="horz" lIns="91440" tIns="45720" rIns="91440" bIns="45720" rtlCol="0"/>
-          <a:lstStyle/>
-          <a:p>
-            <a:pPr lvl="0"/>
-            <a:r>
-              <a:rPr lang="en-US"/>
-              <a:t>Click to edit Master text styles</a:t>
-            </a:r>
-          </a:p>
-          <a:p>
-            <a:pPr lvl="1"/>
-            <a:r>
-              <a:rPr lang="en-US"/>
-              <a:t>Second level</a:t>
-            </a:r>
-          </a:p>
-          <a:p>
-            <a:pPr lvl="2"/>
-            <a:r>
-              <a:rPr lang="en-US"/>
-              <a:t>Third level</a:t>
-            </a:r>
-          </a:p>
-          <a:p>
-            <a:pPr lvl="3"/>
-            <a:r>
-              <a:rPr lang="en-US"/>
-              <a:t>Fourth level</a:t>
-            </a:r>
-          </a:p>
-          <a:p>
-            <a:pPr lvl="4"/>
-            <a:r>
-              <a:rPr lang="en-US"/>
-              <a:t>Fifth level</a:t>
-            </a:r>
-          </a:p>
-        </p:txBody>
-      </p:sp>
-      <p:sp>
-        <p:nvSpPr>
-          <p:cNvPr id="6" name="Footer Placeholder 5"/>
-          <p:cNvSpPr>
-            <a:spLocks noGrp="1"/>
-          </p:cNvSpPr>
-          <p:nvPr>
-            <p:ph type="ftr" sz="quarter" idx="4"/>
-          </p:nvPr>
-        </p:nvSpPr>
-        <p:spPr>
-          <a:xfrm>
-            <a:off x="0" y="8685213"/>
-            <a:ext cx="2971800" cy="458787"/>
-          </a:xfrm>
-          <a:prstGeom prst="rect">
-            <a:avLst/>
-          </a:prstGeom>
-        </p:spPr>
-        <p:txBody>
-          <a:bodyPr vert="horz" lIns="91440" tIns="45720" rIns="91440" bIns="45720" rtlCol="0" anchor="b"/>
-          <a:lstStyle>
-            <a:lvl1pPr algn="l">
-              <a:defRPr sz="1200"/>
-            </a:lvl1pPr>
-          </a:lstStyle>
-          <a:p>
-            <a:endParaRPr lang="en-US"/>
-          </a:p>
-        </p:txBody>
-      </p:sp>
-      <p:sp>
-        <p:nvSpPr>
-          <p:cNvPr id="7" name="Slide Number Placeholder 6"/>
-          <p:cNvSpPr>
-            <a:spLocks noGrp="1"/>
-          </p:cNvSpPr>
-          <p:nvPr>
-            <p:ph type="sldNum" sz="quarter" idx="5"/>
-          </p:nvPr>
-        </p:nvSpPr>
-        <p:spPr>
-          <a:xfrm>
-            <a:off x="3884613" y="8685213"/>
-            <a:ext cx="2971800" cy="458787"/>
-          </a:xfrm>
-          <a:prstGeom prst="rect">
-            <a:avLst/>
-          </a:prstGeom>
-        </p:spPr>
-        <p:txBody>
-          <a:bodyPr vert="horz" lIns="91440" tIns="45720" rIns="91440" bIns="45720" rtlCol="0" anchor="b"/>
-          <a:lstStyle>
-            <a:lvl1pPr algn="r">
-              <a:defRPr sz="1200"/>
-            </a:lvl1pPr>
-          </a:lstStyle>
-          <a:p>
-            <a:fld id="{CE5E9CC1-C706-0F49-92D6-E571CC5EEA8F}" type="slidenum">
-              <a:rPr lang="en-US"/>
-              <a:t>‹#›</a:t>
-            </a:fld>
-            <a:endParaRPr lang="en-US"/>
-          </a:p>
-        </p:txBody>
-      </p:sp>
-    </p:spTree>
-    <p:extLst>
-      <p:ext uri="{BB962C8B-B14F-4D97-AF65-F5344CB8AC3E}">
-        <p14:creationId xmlns:p14="http://schemas.microsoft.com/office/powerpoint/2010/main" val="1024086991"/>
-      </p:ext>
-    </p:extLst>
-  </p:cSld>
-  <p:clrMap bg1="lt1" tx1="dk1" bg2="lt2" tx2="dk2" accent1="accent1" accent2="accent2" accent3="accent3" accent4="accent4" accent5="accent5" accent6="accent6" hlink="hlink" folHlink="folHlink"/>
-  <p:notesStyle>
-    <a:lvl1pPr marL="0" algn="l" defTabSz="914400" rtl="0" eaLnBrk="1" latinLnBrk="0" hangingPunct="1">
-      <a:defRPr sz="1200" kern="1200">
-        <a:solidFill>
-          <a:schemeClr val="tx1"/>
-        </a:solidFill>
-        <a:latin typeface="+mn-lt"/>
-        <a:ea typeface="+mn-ea"/>
-        <a:cs typeface="+mn-cs"/>
-      </a:defRPr>
-    </a:lvl1pPr>
-    <a:lvl2pPr marL="457200" algn="l" defTabSz="914400" rtl="0" eaLnBrk="1" latinLnBrk="0" hangingPunct="1">
-      <a:defRPr sz="1200" kern="1200">
-        <a:solidFill>
-          <a:schemeClr val="tx1"/>
-        </a:solidFill>
-        <a:latin typeface="+mn-lt"/>
-        <a:ea typeface="+mn-ea"/>
-        <a:cs typeface="+mn-cs"/>
-      </a:defRPr>
-    </a:lvl2pPr>
-    <a:lvl3pPr marL="914400" algn="l" defTabSz="914400" rtl="0" eaLnBrk="1" latinLnBrk="0" hangingPunct="1">
-      <a:defRPr sz="1200" kern="1200">
-        <a:solidFill>
-          <a:schemeClr val="tx1"/>
-        </a:solidFill>
-        <a:latin typeface="+mn-lt"/>
-        <a:ea typeface="+mn-ea"/>
-        <a:cs typeface="+mn-cs"/>
-      </a:defRPr>
-    </a:lvl3pPr>
-    <a:lvl4pPr marL="1371600" algn="l" defTabSz="914400" rtl="0" eaLnBrk="1" latinLnBrk="0" hangingPunct="1">
-      <a:defRPr sz="1200" kern="1200">
-        <a:solidFill>
-          <a:schemeClr val="tx1"/>
-        </a:solidFill>
-        <a:latin typeface="+mn-lt"/>
-        <a:ea typeface="+mn-ea"/>
-        <a:cs typeface="+mn-cs"/>
-      </a:defRPr>
-    </a:lvl4pPr>
-    <a:lvl5pPr marL="1828800" algn="l" defTabSz="914400" rtl="0" eaLnBrk="1" latinLnBrk="0" hangingPunct="1">
-      <a:defRPr sz="1200" kern="1200">
-        <a:solidFill>
-          <a:schemeClr val="tx1"/>
-        </a:solidFill>
-        <a:latin typeface="+mn-lt"/>
-        <a:ea typeface="+mn-ea"/>
-        <a:cs typeface="+mn-cs"/>
-      </a:defRPr>
-    </a:lvl5pPr>
-    <a:lvl6pPr marL="2286000" algn="l" defTabSz="914400" rtl="0" eaLnBrk="1" latinLnBrk="0" hangingPunct="1">
-      <a:defRPr sz="1200" kern="1200">
-        <a:solidFill>
-          <a:schemeClr val="tx1"/>
-        </a:solidFill>
-        <a:latin typeface="+mn-lt"/>
-        <a:ea typeface="+mn-ea"/>
-        <a:cs typeface="+mn-cs"/>
-      </a:defRPr>
-    </a:lvl6pPr>
-    <a:lvl7pPr marL="2743200" algn="l" defTabSz="914400" rtl="0" eaLnBrk="1" latinLnBrk="0" hangingPunct="1">
-      <a:defRPr sz="1200" kern="1200">
-        <a:solidFill>
-          <a:schemeClr val="tx1"/>
-        </a:solidFill>
-        <a:latin typeface="+mn-lt"/>
-        <a:ea typeface="+mn-ea"/>
-        <a:cs typeface="+mn-cs"/>
-      </a:defRPr>
-    </a:lvl7pPr>
-    <a:lvl8pPr marL="3200400" algn="l" defTabSz="914400" rtl="0" eaLnBrk="1" latinLnBrk="0" hangingPunct="1">
-      <a:defRPr sz="1200" kern="1200">
-        <a:solidFill>
-          <a:schemeClr val="tx1"/>
-        </a:solidFill>
-        <a:latin typeface="+mn-lt"/>
-        <a:ea typeface="+mn-ea"/>
-        <a:cs typeface="+mn-cs"/>
-      </a:defRPr>
-    </a:lvl8pPr>
-    <a:lvl9pPr marL="3657600" algn="l" defTabSz="914400" rtl="0" eaLnBrk="1" latinLnBrk="0" hangingPunct="1">
-      <a:defRPr sz="1200" kern="1200">
-        <a:solidFill>
-          <a:schemeClr val="tx1"/>
-        </a:solidFill>
-        <a:latin typeface="+mn-lt"/>
-        <a:ea typeface="+mn-ea"/>
-        <a:cs typeface="+mn-cs"/>
-      </a:defRPr>
-    </a:lvl9pPr>
-  </p:notesStyle>
-</p:notesMaster>
 </file>
 
 <file path=ppt/slideLayouts/slideLayout1.xml><?xml version="1.0" encoding="utf-8"?>
@@ -501,6 +154,11 @@
 <file path=ppt/slideMasters/slideMaster1.xml><?xml version="1.0" encoding="utf-8"?>
 <p:sldMaster xmlns:a="http://schemas.openxmlformats.org/drawingml/2006/main" xmlns:r="http://schemas.openxmlformats.org/officeDocument/2006/relationships" xmlns:p="http://schemas.openxmlformats.org/presentationml/2006/main">
   <p:cSld>
+    <p:bg>
+      <p:bgRef idx="1001">
+        <a:schemeClr val="bg1"/>
+      </p:bgRef>
+    </p:bg>
     <p:spTree>
       <p:nvGrpSpPr>
         <p:cNvPr id="1" name=""/>
@@ -783,6 +441,7 @@
         <a:solidFill>
           <a:srgbClr val="F0EEE6"/>
         </a:solidFill>
+        <a:effectLst/>
       </p:bgPr>
     </p:bg>
     <p:spTree>
@@ -818,6 +477,13 @@
           </a:solidFill>
           <a:ln/>
         </p:spPr>
+        <p:txBody>
+          <a:bodyPr/>
+          <a:lstStyle/>
+          <a:p>
+            <a:endParaRPr lang="en-US"/>
+          </a:p>
+        </p:txBody>
       </p:sp>
       <p:sp>
         <p:nvSpPr>
@@ -838,17 +504,24 @@
           </a:solidFill>
           <a:ln/>
         </p:spPr>
+        <p:txBody>
+          <a:bodyPr/>
+          <a:lstStyle/>
+          <a:p>
+            <a:endParaRPr lang="en-US"/>
+          </a:p>
+        </p:txBody>
       </p:sp>
       <p:pic>
         <p:nvPicPr>
-          <p:cNvPr id="4" name="Image 0" descr="preencoded.png">    </p:cNvPr>
+          <p:cNvPr id="4" name="Image 0" descr="preencoded.png"/>
           <p:cNvPicPr>
             <a:picLocks noChangeAspect="1"/>
           </p:cNvPicPr>
           <p:nvPr/>
         </p:nvPicPr>
         <p:blipFill>
-          <a:blip r:embed="rId1"/>
+          <a:blip r:embed="rId2"/>
           <a:stretch>
             <a:fillRect/>
           </a:stretch>
@@ -884,11 +557,11 @@
           <a:bodyPr wrap="square" lIns="0" tIns="0" rIns="0" bIns="0" rtlCol="0" anchor="ctr"/>
           <a:lstStyle/>
           <a:p>
-            <a:pPr indent="0" marL="0">
-              <a:buNone/>
-            </a:pPr>
-            <a:r>
-              <a:rPr lang="en-US" sz="1400" b="1" spc="300" kern="0" dirty="0">
+            <a:pPr marL="0" indent="0">
+              <a:buNone/>
+            </a:pPr>
+            <a:r>
+              <a:rPr lang="en-US" sz="1400" b="1" kern="0" spc="300" dirty="0">
                 <a:solidFill>
                   <a:srgbClr val="C25E40"/>
                 </a:solidFill>
@@ -923,7 +596,7 @@
           <a:bodyPr wrap="square" lIns="0" tIns="0" rIns="0" bIns="0" rtlCol="0" anchor="ctr"/>
           <a:lstStyle/>
           <a:p>
-            <a:pPr indent="0" marL="0">
+            <a:pPr marL="0" indent="0">
               <a:lnSpc>
                 <a:spcPct val="100000"/>
               </a:lnSpc>
@@ -943,7 +616,7 @@
             <a:endParaRPr lang="en-US" sz="4300" dirty="0"/>
           </a:p>
           <a:p>
-            <a:pPr indent="0" marL="0">
+            <a:pPr marL="0" indent="0">
               <a:lnSpc>
                 <a:spcPct val="100000"/>
               </a:lnSpc>
@@ -986,6 +659,13 @@
             <a:prstDash val="solid"/>
           </a:ln>
         </p:spPr>
+        <p:txBody>
+          <a:bodyPr/>
+          <a:lstStyle/>
+          <a:p>
+            <a:endParaRPr lang="en-US"/>
+          </a:p>
+        </p:txBody>
       </p:sp>
       <p:sp>
         <p:nvSpPr>
@@ -1008,7 +688,7 @@
           <a:bodyPr wrap="square" lIns="0" tIns="0" rIns="0" bIns="0" rtlCol="0" anchor="ctr"/>
           <a:lstStyle/>
           <a:p>
-            <a:pPr indent="0" marL="0">
+            <a:pPr marL="0" indent="0">
               <a:buNone/>
             </a:pPr>
             <a:r>
@@ -1023,45 +703,6 @@
               <a:t>90 min  ·  45 lecture / demo  +  45 lab</a:t>
             </a:r>
             <a:endParaRPr lang="en-US" sz="1600" dirty="0"/>
-          </a:p>
-        </p:txBody>
-      </p:sp>
-      <p:sp>
-        <p:nvSpPr>
-          <p:cNvPr id="9" name="Text 6"/>
-          <p:cNvSpPr/>
-          <p:nvPr/>
-        </p:nvSpPr>
-        <p:spPr>
-          <a:xfrm>
-            <a:off x="640080" y="4462272"/>
-            <a:ext cx="8046720" cy="292608"/>
-          </a:xfrm>
-          <a:prstGeom prst="rect">
-            <a:avLst/>
-          </a:prstGeom>
-          <a:noFill/>
-          <a:ln/>
-        </p:spPr>
-        <p:txBody>
-          <a:bodyPr wrap="square" lIns="0" tIns="0" rIns="0" bIns="0" rtlCol="0" anchor="ctr"/>
-          <a:lstStyle/>
-          <a:p>
-            <a:pPr indent="0" marL="0">
-              <a:buNone/>
-            </a:pPr>
-            <a:r>
-              <a:rPr lang="en-US" sz="1000" i="1" dirty="0">
-                <a:solidFill>
-                  <a:srgbClr val="615C52"/>
-                </a:solidFill>
-                <a:latin typeface="Inter" pitchFamily="34" charset="0"/>
-                <a:ea typeface="Inter" pitchFamily="34" charset="-122"/>
-                <a:cs typeface="Inter" pitchFamily="34" charset="-120"/>
-              </a:rPr>
-              <a:t>dotnetclaude.com  ·  .NET AI with Claude Workshop</a:t>
-            </a:r>
-            <a:endParaRPr lang="en-US" sz="1000" dirty="0"/>
           </a:p>
         </p:txBody>
       </p:sp>
@@ -1081,6 +722,7 @@
         <a:solidFill>
           <a:srgbClr val="F0EEE6"/>
         </a:solidFill>
+        <a:effectLst/>
       </p:bgPr>
     </p:bg>
     <p:spTree>
@@ -1118,11 +760,11 @@
           <a:bodyPr wrap="square" lIns="0" tIns="0" rIns="0" bIns="0" rtlCol="0" anchor="ctr"/>
           <a:lstStyle/>
           <a:p>
-            <a:pPr indent="0" marL="0">
-              <a:buNone/>
-            </a:pPr>
-            <a:r>
-              <a:rPr lang="en-US" sz="1100" b="1" spc="200" kern="0" dirty="0">
+            <a:pPr marL="0" indent="0">
+              <a:buNone/>
+            </a:pPr>
+            <a:r>
+              <a:rPr lang="en-US" sz="1100" b="1" kern="0" spc="200" dirty="0">
                 <a:solidFill>
                   <a:srgbClr val="C25E40"/>
                 </a:solidFill>
@@ -1157,7 +799,7 @@
           <a:bodyPr wrap="square" lIns="0" tIns="0" rIns="0" bIns="0" rtlCol="0" anchor="ctr"/>
           <a:lstStyle/>
           <a:p>
-            <a:pPr indent="0" marL="0">
+            <a:pPr marL="0" indent="0">
               <a:buNone/>
             </a:pPr>
             <a:r>
@@ -1177,14 +819,14 @@
       </p:sp>
       <p:pic>
         <p:nvPicPr>
-          <p:cNvPr id="4" name="Image 0" descr="preencoded.png">    </p:cNvPr>
+          <p:cNvPr id="4" name="Image 0" descr="preencoded.png"/>
           <p:cNvPicPr>
             <a:picLocks noChangeAspect="1"/>
           </p:cNvPicPr>
           <p:nvPr/>
         </p:nvPicPr>
         <p:blipFill>
-          <a:blip r:embed="rId1"/>
+          <a:blip r:embed="rId2"/>
           <a:stretch>
             <a:fillRect/>
           </a:stretch>
@@ -1220,13 +862,20 @@
           </a:solidFill>
           <a:ln/>
           <a:effectLst>
-            <a:outerShdw sx="100000" sy="100000" kx="0" ky="0" algn="bl" rotWithShape="0" blurRad="88900" dist="38100" dir="5400000">
+            <a:outerShdw blurRad="88900" dist="38100" dir="5400000" algn="bl" rotWithShape="0">
               <a:srgbClr val="000000">
                 <a:alpha val="10000"/>
               </a:srgbClr>
             </a:outerShdw>
           </a:effectLst>
         </p:spPr>
+        <p:txBody>
+          <a:bodyPr/>
+          <a:lstStyle/>
+          <a:p>
+            <a:endParaRPr lang="en-US"/>
+          </a:p>
+        </p:txBody>
       </p:sp>
       <p:sp>
         <p:nvSpPr>
@@ -1249,11 +898,11 @@
           <a:bodyPr wrap="square" lIns="0" tIns="0" rIns="0" bIns="0" rtlCol="0" anchor="ctr"/>
           <a:lstStyle/>
           <a:p>
-            <a:pPr indent="0" marL="0">
-              <a:buNone/>
-            </a:pPr>
-            <a:r>
-              <a:rPr lang="en-US" sz="1050" b="1" spc="50" kern="0" dirty="0">
+            <a:pPr marL="0" indent="0">
+              <a:buNone/>
+            </a:pPr>
+            <a:r>
+              <a:rPr lang="en-US" sz="1050" b="1" kern="0" spc="50" dirty="0">
                 <a:solidFill>
                   <a:srgbClr val="D97757"/>
                 </a:solidFill>
@@ -1288,7 +937,7 @@
           <a:bodyPr wrap="square" lIns="0" tIns="0" rIns="0" bIns="0" rtlCol="0" anchor="t"/>
           <a:lstStyle/>
           <a:p>
-            <a:pPr indent="0" marL="0">
+            <a:pPr marL="0" indent="0">
               <a:lnSpc>
                 <a:spcPct val="128000"/>
               </a:lnSpc>
@@ -1305,7 +954,43 @@
               </a:rPr>
               <a:t>Policy</a:t>
             </a:r>
-            <a:pPr indent="0" marL="0">
+            <a:r>
+              <a:rPr lang="en-US" sz="1250" dirty="0">
+                <a:solidFill>
+                  <a:srgbClr val="E9E5DD"/>
+                </a:solidFill>
+                <a:latin typeface="Courier New" pitchFamily="34" charset="0"/>
+                <a:ea typeface="Courier New" pitchFamily="34" charset="-122"/>
+                <a:cs typeface="Courier New" pitchFamily="34" charset="-120"/>
+              </a:rPr>
+              <a:t>  .Handle&lt;</a:t>
+            </a:r>
+            <a:r>
+              <a:rPr lang="en-US" sz="1250" dirty="0">
+                <a:solidFill>
+                  <a:srgbClr val="9FC3E0"/>
+                </a:solidFill>
+                <a:latin typeface="Courier New" pitchFamily="34" charset="0"/>
+                <a:ea typeface="Courier New" pitchFamily="34" charset="-122"/>
+                <a:cs typeface="Courier New" pitchFamily="34" charset="-120"/>
+              </a:rPr>
+              <a:t>ApiException</a:t>
+            </a:r>
+            <a:r>
+              <a:rPr lang="en-US" sz="1250" dirty="0">
+                <a:solidFill>
+                  <a:srgbClr val="E9E5DD"/>
+                </a:solidFill>
+                <a:latin typeface="Courier New" pitchFamily="34" charset="0"/>
+                <a:ea typeface="Courier New" pitchFamily="34" charset="-122"/>
+                <a:cs typeface="Courier New" pitchFamily="34" charset="-120"/>
+              </a:rPr>
+              <a:t>&gt;(e =&gt;</a:t>
+            </a:r>
+            <a:endParaRPr lang="en-US" sz="1250" dirty="0"/>
+          </a:p>
+          <a:p>
+            <a:pPr marL="0" indent="0">
               <a:lnSpc>
                 <a:spcPct val="128000"/>
               </a:lnSpc>
@@ -1320,9 +1005,56 @@
                 <a:ea typeface="Courier New" pitchFamily="34" charset="-122"/>
                 <a:cs typeface="Courier New" pitchFamily="34" charset="-120"/>
               </a:rPr>
-              <a:t>  .Handle&lt;</a:t>
-            </a:r>
-            <a:pPr indent="0" marL="0">
+              <a:t>     e.Status is </a:t>
+            </a:r>
+            <a:r>
+              <a:rPr lang="en-US" sz="1250" dirty="0">
+                <a:solidFill>
+                  <a:srgbClr val="E0A04A"/>
+                </a:solidFill>
+                <a:latin typeface="Courier New" pitchFamily="34" charset="0"/>
+                <a:ea typeface="Courier New" pitchFamily="34" charset="-122"/>
+                <a:cs typeface="Courier New" pitchFamily="34" charset="-120"/>
+              </a:rPr>
+              <a:t>429</a:t>
+            </a:r>
+            <a:r>
+              <a:rPr lang="en-US" sz="1250" dirty="0">
+                <a:solidFill>
+                  <a:srgbClr val="E9E5DD"/>
+                </a:solidFill>
+                <a:latin typeface="Courier New" pitchFamily="34" charset="0"/>
+                <a:ea typeface="Courier New" pitchFamily="34" charset="-122"/>
+                <a:cs typeface="Courier New" pitchFamily="34" charset="-120"/>
+              </a:rPr>
+              <a:t> or </a:t>
+            </a:r>
+            <a:r>
+              <a:rPr lang="en-US" sz="1250" dirty="0">
+                <a:solidFill>
+                  <a:srgbClr val="E0A04A"/>
+                </a:solidFill>
+                <a:latin typeface="Courier New" pitchFamily="34" charset="0"/>
+                <a:ea typeface="Courier New" pitchFamily="34" charset="-122"/>
+                <a:cs typeface="Courier New" pitchFamily="34" charset="-120"/>
+              </a:rPr>
+              <a:t>529</a:t>
+            </a:r>
+            <a:r>
+              <a:rPr lang="en-US" sz="1250" dirty="0">
+                <a:solidFill>
+                  <a:srgbClr val="E9E5DD"/>
+                </a:solidFill>
+                <a:latin typeface="Courier New" pitchFamily="34" charset="0"/>
+                <a:ea typeface="Courier New" pitchFamily="34" charset="-122"/>
+                <a:cs typeface="Courier New" pitchFamily="34" charset="-120"/>
+              </a:rPr>
+              <a:t>)</a:t>
+            </a:r>
+            <a:endParaRPr lang="en-US" sz="1250" dirty="0"/>
+          </a:p>
+          <a:p>
+            <a:pPr marL="0" indent="0">
               <a:lnSpc>
                 <a:spcPct val="128000"/>
               </a:lnSpc>
@@ -1331,15 +1063,18 @@
             <a:r>
               <a:rPr lang="en-US" sz="1250" dirty="0">
                 <a:solidFill>
-                  <a:srgbClr val="9FC3E0"/>
+                  <a:srgbClr val="E9E5DD"/>
                 </a:solidFill>
                 <a:latin typeface="Courier New" pitchFamily="34" charset="0"/>
                 <a:ea typeface="Courier New" pitchFamily="34" charset="-122"/>
                 <a:cs typeface="Courier New" pitchFamily="34" charset="-120"/>
               </a:rPr>
-              <a:t>ApiException</a:t>
-            </a:r>
-            <a:pPr indent="0" marL="0">
+              <a:t>  .WaitAndRetryAsync(</a:t>
+            </a:r>
+            <a:endParaRPr lang="en-US" sz="1250" dirty="0"/>
+          </a:p>
+          <a:p>
+            <a:pPr marL="0" indent="0">
               <a:lnSpc>
                 <a:spcPct val="128000"/>
               </a:lnSpc>
@@ -1354,12 +1089,34 @@
                 <a:ea typeface="Courier New" pitchFamily="34" charset="-122"/>
                 <a:cs typeface="Courier New" pitchFamily="34" charset="-120"/>
               </a:rPr>
-              <a:t>&gt;(e =&gt;</a:t>
+              <a:t>     retryCount: </a:t>
+            </a:r>
+            <a:r>
+              <a:rPr lang="en-US" sz="1250" dirty="0">
+                <a:solidFill>
+                  <a:srgbClr val="E0A04A"/>
+                </a:solidFill>
+                <a:latin typeface="Courier New" pitchFamily="34" charset="0"/>
+                <a:ea typeface="Courier New" pitchFamily="34" charset="-122"/>
+                <a:cs typeface="Courier New" pitchFamily="34" charset="-120"/>
+              </a:rPr>
+              <a:t>3</a:t>
+            </a:r>
+            <a:r>
+              <a:rPr lang="en-US" sz="1250" dirty="0">
+                <a:solidFill>
+                  <a:srgbClr val="E9E5DD"/>
+                </a:solidFill>
+                <a:latin typeface="Courier New" pitchFamily="34" charset="0"/>
+                <a:ea typeface="Courier New" pitchFamily="34" charset="-122"/>
+                <a:cs typeface="Courier New" pitchFamily="34" charset="-120"/>
+              </a:rPr>
+              <a:t>,</a:t>
             </a:r>
             <a:endParaRPr lang="en-US" sz="1250" dirty="0"/>
           </a:p>
           <a:p>
-            <a:pPr indent="0" marL="0">
+            <a:pPr marL="0" indent="0">
               <a:lnSpc>
                 <a:spcPct val="128000"/>
               </a:lnSpc>
@@ -1374,193 +1131,19 @@
                 <a:ea typeface="Courier New" pitchFamily="34" charset="-122"/>
                 <a:cs typeface="Courier New" pitchFamily="34" charset="-120"/>
               </a:rPr>
-              <a:t>     e.Status is </a:t>
-            </a:r>
-            <a:pPr indent="0" marL="0">
-              <a:lnSpc>
-                <a:spcPct val="128000"/>
-              </a:lnSpc>
-              <a:buNone/>
-            </a:pPr>
+              <a:t>     </a:t>
+            </a:r>
             <a:r>
               <a:rPr lang="en-US" sz="1250" dirty="0">
                 <a:solidFill>
-                  <a:srgbClr val="E0A04A"/>
+                  <a:srgbClr val="9A958B"/>
                 </a:solidFill>
                 <a:latin typeface="Courier New" pitchFamily="34" charset="0"/>
                 <a:ea typeface="Courier New" pitchFamily="34" charset="-122"/>
                 <a:cs typeface="Courier New" pitchFamily="34" charset="-120"/>
               </a:rPr>
-              <a:t>429</a:t>
-            </a:r>
-            <a:pPr indent="0" marL="0">
-              <a:lnSpc>
-                <a:spcPct val="128000"/>
-              </a:lnSpc>
-              <a:buNone/>
-            </a:pPr>
-            <a:r>
-              <a:rPr lang="en-US" sz="1250" dirty="0">
-                <a:solidFill>
-                  <a:srgbClr val="E9E5DD"/>
-                </a:solidFill>
-                <a:latin typeface="Courier New" pitchFamily="34" charset="0"/>
-                <a:ea typeface="Courier New" pitchFamily="34" charset="-122"/>
-                <a:cs typeface="Courier New" pitchFamily="34" charset="-120"/>
-              </a:rPr>
-              <a:t> or </a:t>
-            </a:r>
-            <a:pPr indent="0" marL="0">
-              <a:lnSpc>
-                <a:spcPct val="128000"/>
-              </a:lnSpc>
-              <a:buNone/>
-            </a:pPr>
-            <a:r>
-              <a:rPr lang="en-US" sz="1250" dirty="0">
-                <a:solidFill>
-                  <a:srgbClr val="E0A04A"/>
-                </a:solidFill>
-                <a:latin typeface="Courier New" pitchFamily="34" charset="0"/>
-                <a:ea typeface="Courier New" pitchFamily="34" charset="-122"/>
-                <a:cs typeface="Courier New" pitchFamily="34" charset="-120"/>
-              </a:rPr>
-              <a:t>529</a:t>
-            </a:r>
-            <a:pPr indent="0" marL="0">
-              <a:lnSpc>
-                <a:spcPct val="128000"/>
-              </a:lnSpc>
-              <a:buNone/>
-            </a:pPr>
-            <a:r>
-              <a:rPr lang="en-US" sz="1250" dirty="0">
-                <a:solidFill>
-                  <a:srgbClr val="E9E5DD"/>
-                </a:solidFill>
-                <a:latin typeface="Courier New" pitchFamily="34" charset="0"/>
-                <a:ea typeface="Courier New" pitchFamily="34" charset="-122"/>
-                <a:cs typeface="Courier New" pitchFamily="34" charset="-120"/>
-              </a:rPr>
-              <a:t>)</a:t>
-            </a:r>
-            <a:endParaRPr lang="en-US" sz="1250" dirty="0"/>
-          </a:p>
-          <a:p>
-            <a:pPr indent="0" marL="0">
-              <a:lnSpc>
-                <a:spcPct val="128000"/>
-              </a:lnSpc>
-              <a:buNone/>
-            </a:pPr>
-            <a:r>
-              <a:rPr lang="en-US" sz="1250" dirty="0">
-                <a:solidFill>
-                  <a:srgbClr val="E9E5DD"/>
-                </a:solidFill>
-                <a:latin typeface="Courier New" pitchFamily="34" charset="0"/>
-                <a:ea typeface="Courier New" pitchFamily="34" charset="-122"/>
-                <a:cs typeface="Courier New" pitchFamily="34" charset="-120"/>
-              </a:rPr>
-              <a:t>  .WaitAndRetryAsync(</a:t>
-            </a:r>
-            <a:endParaRPr lang="en-US" sz="1250" dirty="0"/>
-          </a:p>
-          <a:p>
-            <a:pPr indent="0" marL="0">
-              <a:lnSpc>
-                <a:spcPct val="128000"/>
-              </a:lnSpc>
-              <a:buNone/>
-            </a:pPr>
-            <a:r>
-              <a:rPr lang="en-US" sz="1250" dirty="0">
-                <a:solidFill>
-                  <a:srgbClr val="E9E5DD"/>
-                </a:solidFill>
-                <a:latin typeface="Courier New" pitchFamily="34" charset="0"/>
-                <a:ea typeface="Courier New" pitchFamily="34" charset="-122"/>
-                <a:cs typeface="Courier New" pitchFamily="34" charset="-120"/>
-              </a:rPr>
-              <a:t>     retryCount: </a:t>
-            </a:r>
-            <a:pPr indent="0" marL="0">
-              <a:lnSpc>
-                <a:spcPct val="128000"/>
-              </a:lnSpc>
-              <a:buNone/>
-            </a:pPr>
-            <a:r>
-              <a:rPr lang="en-US" sz="1250" dirty="0">
-                <a:solidFill>
-                  <a:srgbClr val="E0A04A"/>
-                </a:solidFill>
-                <a:latin typeface="Courier New" pitchFamily="34" charset="0"/>
-                <a:ea typeface="Courier New" pitchFamily="34" charset="-122"/>
-                <a:cs typeface="Courier New" pitchFamily="34" charset="-120"/>
-              </a:rPr>
-              <a:t>3</a:t>
-            </a:r>
-            <a:pPr indent="0" marL="0">
-              <a:lnSpc>
-                <a:spcPct val="128000"/>
-              </a:lnSpc>
-              <a:buNone/>
-            </a:pPr>
-            <a:r>
-              <a:rPr lang="en-US" sz="1250" dirty="0">
-                <a:solidFill>
-                  <a:srgbClr val="E9E5DD"/>
-                </a:solidFill>
-                <a:latin typeface="Courier New" pitchFamily="34" charset="0"/>
-                <a:ea typeface="Courier New" pitchFamily="34" charset="-122"/>
-                <a:cs typeface="Courier New" pitchFamily="34" charset="-120"/>
-              </a:rPr>
-              <a:t>,</a:t>
-            </a:r>
-            <a:endParaRPr lang="en-US" sz="1250" dirty="0"/>
-          </a:p>
-          <a:p>
-            <a:pPr indent="0" marL="0">
-              <a:lnSpc>
-                <a:spcPct val="128000"/>
-              </a:lnSpc>
-              <a:buNone/>
-            </a:pPr>
-            <a:r>
-              <a:rPr lang="en-US" sz="1250" dirty="0">
-                <a:solidFill>
-                  <a:srgbClr val="E9E5DD"/>
-                </a:solidFill>
-                <a:latin typeface="Courier New" pitchFamily="34" charset="0"/>
-                <a:ea typeface="Courier New" pitchFamily="34" charset="-122"/>
-                <a:cs typeface="Courier New" pitchFamily="34" charset="-120"/>
-              </a:rPr>
-              <a:t>     </a:t>
-            </a:r>
-            <a:pPr indent="0" marL="0">
-              <a:lnSpc>
-                <a:spcPct val="128000"/>
-              </a:lnSpc>
-              <a:buNone/>
-            </a:pPr>
-            <a:r>
-              <a:rPr lang="en-US" sz="1250" dirty="0">
-                <a:solidFill>
-                  <a:srgbClr val="9A958B"/>
-                </a:solidFill>
-                <a:latin typeface="Courier New" pitchFamily="34" charset="0"/>
-                <a:ea typeface="Courier New" pitchFamily="34" charset="-122"/>
-                <a:cs typeface="Courier New" pitchFamily="34" charset="-120"/>
-              </a:rPr>
               <a:t>exponential backoff</a:t>
             </a:r>
-            <a:pPr indent="0" marL="0">
-              <a:lnSpc>
-                <a:spcPct val="128000"/>
-              </a:lnSpc>
-              <a:buNone/>
-            </a:pPr>
             <a:r>
               <a:rPr lang="en-US" sz="1250" dirty="0">
                 <a:solidFill>
@@ -1602,6 +1185,13 @@
             <a:prstDash val="solid"/>
           </a:ln>
         </p:spPr>
+        <p:txBody>
+          <a:bodyPr/>
+          <a:lstStyle/>
+          <a:p>
+            <a:endParaRPr lang="en-US"/>
+          </a:p>
+        </p:txBody>
       </p:sp>
       <p:sp>
         <p:nvSpPr>
@@ -1624,7 +1214,7 @@
           <a:bodyPr wrap="square" lIns="0" tIns="0" rIns="0" bIns="0" rtlCol="0" anchor="ctr"/>
           <a:lstStyle/>
           <a:p>
-            <a:pPr indent="0" marL="0">
+            <a:pPr marL="0" indent="0">
               <a:buNone/>
             </a:pPr>
             <a:r>
@@ -1638,13 +1228,10 @@
               </a:rPr>
               <a:t>429</a:t>
             </a:r>
-            <a:pPr indent="0" marL="0">
-              <a:buNone/>
-            </a:pPr>
             <a:endParaRPr lang="en-US" sz="2000" dirty="0"/>
           </a:p>
           <a:p>
-            <a:pPr indent="0" marL="0">
+            <a:pPr marL="0" indent="0">
               <a:buNone/>
             </a:pPr>
             <a:r>
@@ -1661,13 +1248,13 @@
             <a:endParaRPr lang="en-US" sz="2000" dirty="0"/>
           </a:p>
           <a:p>
-            <a:pPr indent="0" marL="0">
+            <a:pPr marL="0" indent="0">
               <a:buNone/>
             </a:pPr>
             <a:endParaRPr lang="en-US" sz="2000" dirty="0"/>
           </a:p>
           <a:p>
-            <a:pPr indent="0" marL="0">
+            <a:pPr marL="0" indent="0">
               <a:buNone/>
             </a:pPr>
             <a:r>
@@ -1711,6 +1298,13 @@
             <a:prstDash val="solid"/>
           </a:ln>
         </p:spPr>
+        <p:txBody>
+          <a:bodyPr/>
+          <a:lstStyle/>
+          <a:p>
+            <a:endParaRPr lang="en-US"/>
+          </a:p>
+        </p:txBody>
       </p:sp>
       <p:sp>
         <p:nvSpPr>
@@ -1733,7 +1327,7 @@
           <a:bodyPr wrap="square" lIns="0" tIns="0" rIns="0" bIns="0" rtlCol="0" anchor="ctr"/>
           <a:lstStyle/>
           <a:p>
-            <a:pPr indent="0" marL="0">
+            <a:pPr marL="0" indent="0">
               <a:buNone/>
             </a:pPr>
             <a:r>
@@ -1747,13 +1341,10 @@
               </a:rPr>
               <a:t>529</a:t>
             </a:r>
-            <a:pPr indent="0" marL="0">
-              <a:buNone/>
-            </a:pPr>
             <a:endParaRPr lang="en-US" sz="2000" dirty="0"/>
           </a:p>
           <a:p>
-            <a:pPr indent="0" marL="0">
+            <a:pPr marL="0" indent="0">
               <a:buNone/>
             </a:pPr>
             <a:r>
@@ -1770,13 +1361,13 @@
             <a:endParaRPr lang="en-US" sz="2000" dirty="0"/>
           </a:p>
           <a:p>
-            <a:pPr indent="0" marL="0">
+            <a:pPr marL="0" indent="0">
               <a:buNone/>
             </a:pPr>
             <a:endParaRPr lang="en-US" sz="2000" dirty="0"/>
           </a:p>
           <a:p>
-            <a:pPr indent="0" marL="0">
+            <a:pPr marL="0" indent="0">
               <a:buNone/>
             </a:pPr>
             <a:r>
@@ -1815,7 +1406,7 @@
           <a:bodyPr wrap="square" rtlCol="0" anchor="ctr"/>
           <a:lstStyle/>
           <a:p>
-            <a:pPr indent="0" marL="0">
+            <a:pPr marL="0" indent="0">
               <a:buNone/>
             </a:pPr>
             <a:r>
@@ -1854,7 +1445,7 @@
           <a:bodyPr wrap="square" rtlCol="0" anchor="ctr"/>
           <a:lstStyle/>
           <a:p>
-            <a:pPr algn="r" indent="0" marL="0">
+            <a:pPr marL="0" indent="0" algn="r">
               <a:buNone/>
             </a:pPr>
             <a:r>
@@ -1869,45 +1460,6 @@
               <a:t>Day 2 · Section 1  ·  10/13</a:t>
             </a:r>
             <a:endParaRPr lang="en-US" sz="900" dirty="0"/>
-          </a:p>
-        </p:txBody>
-      </p:sp>
-      <p:sp>
-        <p:nvSpPr>
-          <p:cNvPr id="14" name="Text 11"/>
-          <p:cNvSpPr/>
-          <p:nvPr/>
-        </p:nvSpPr>
-        <p:spPr>
-          <a:xfrm>
-            <a:off x="548640" y="4462272"/>
-            <a:ext cx="8046720" cy="274320"/>
-          </a:xfrm>
-          <a:prstGeom prst="rect">
-            <a:avLst/>
-          </a:prstGeom>
-          <a:noFill/>
-          <a:ln/>
-        </p:spPr>
-        <p:txBody>
-          <a:bodyPr wrap="square" lIns="0" tIns="0" rIns="0" bIns="0" rtlCol="0" anchor="ctr"/>
-          <a:lstStyle/>
-          <a:p>
-            <a:pPr indent="0" marL="0">
-              <a:buNone/>
-            </a:pPr>
-            <a:r>
-              <a:rPr lang="en-US" sz="1000" i="1" dirty="0">
-                <a:solidFill>
-                  <a:srgbClr val="615C52"/>
-                </a:solidFill>
-                <a:latin typeface="Inter" pitchFamily="34" charset="0"/>
-                <a:ea typeface="Inter" pitchFamily="34" charset="-122"/>
-                <a:cs typeface="Inter" pitchFamily="34" charset="-120"/>
-              </a:rPr>
-              <a:t>▸ Retry 429 and 529 with exponential backoff — both are transient by nature.</a:t>
-            </a:r>
-            <a:endParaRPr lang="en-US" sz="1000" dirty="0"/>
           </a:p>
         </p:txBody>
       </p:sp>
@@ -1927,6 +1479,7 @@
         <a:solidFill>
           <a:srgbClr val="F0EEE6"/>
         </a:solidFill>
+        <a:effectLst/>
       </p:bgPr>
     </p:bg>
     <p:spTree>
@@ -1964,11 +1517,11 @@
           <a:bodyPr wrap="square" lIns="0" tIns="0" rIns="0" bIns="0" rtlCol="0" anchor="ctr"/>
           <a:lstStyle/>
           <a:p>
-            <a:pPr indent="0" marL="0">
-              <a:buNone/>
-            </a:pPr>
-            <a:r>
-              <a:rPr lang="en-US" sz="1100" b="1" spc="200" kern="0" dirty="0">
+            <a:pPr marL="0" indent="0">
+              <a:buNone/>
+            </a:pPr>
+            <a:r>
+              <a:rPr lang="en-US" sz="1100" b="1" kern="0" spc="200" dirty="0">
                 <a:solidFill>
                   <a:srgbClr val="C25E40"/>
                 </a:solidFill>
@@ -2003,7 +1556,7 @@
           <a:bodyPr wrap="square" lIns="0" tIns="0" rIns="0" bIns="0" rtlCol="0" anchor="ctr"/>
           <a:lstStyle/>
           <a:p>
-            <a:pPr indent="0" marL="0">
+            <a:pPr marL="0" indent="0">
               <a:buNone/>
             </a:pPr>
             <a:r>
@@ -2023,343 +1576,7 @@
       </p:sp>
       <p:pic>
         <p:nvPicPr>
-          <p:cNvPr id="4" name="Image 0" descr="preencoded.png">    </p:cNvPr>
-          <p:cNvPicPr>
-            <a:picLocks noChangeAspect="1"/>
-          </p:cNvPicPr>
-          <p:nvPr/>
-        </p:nvPicPr>
-        <p:blipFill>
-          <a:blip r:embed="rId1"/>
-          <a:stretch>
-            <a:fillRect/>
-          </a:stretch>
-        </p:blipFill>
-        <p:spPr>
-          <a:xfrm>
-            <a:off x="8302752" y="402336"/>
-            <a:ext cx="365760" cy="310896"/>
-          </a:xfrm>
-          <a:prstGeom prst="rect">
-            <a:avLst/>
-          </a:prstGeom>
-        </p:spPr>
-      </p:pic>
-      <p:sp>
-        <p:nvSpPr>
-          <p:cNvPr id="5" name="Shape 2"/>
-          <p:cNvSpPr/>
-          <p:nvPr/>
-        </p:nvSpPr>
-        <p:spPr>
-          <a:xfrm>
-            <a:off x="548640" y="1371600"/>
-            <a:ext cx="5120640" cy="2468880"/>
-          </a:xfrm>
-          <a:prstGeom prst="roundRect">
-            <a:avLst>
-              <a:gd name="adj" fmla="val 2963"/>
-            </a:avLst>
-          </a:prstGeom>
-          <a:solidFill>
-            <a:srgbClr val="1F1E1D"/>
-          </a:solidFill>
-          <a:ln/>
-          <a:effectLst>
-            <a:outerShdw sx="100000" sy="100000" kx="0" ky="0" algn="bl" rotWithShape="0" blurRad="88900" dist="38100" dir="5400000">
-              <a:srgbClr val="000000">
-                <a:alpha val="10000"/>
-              </a:srgbClr>
-            </a:outerShdw>
-          </a:effectLst>
-        </p:spPr>
-      </p:sp>
-      <p:sp>
-        <p:nvSpPr>
-          <p:cNvPr id="6" name="Text 3"/>
-          <p:cNvSpPr/>
-          <p:nvPr/>
-        </p:nvSpPr>
-        <p:spPr>
-          <a:xfrm>
-            <a:off x="822960" y="1517904"/>
-            <a:ext cx="4572000" cy="256032"/>
-          </a:xfrm>
-          <a:prstGeom prst="rect">
-            <a:avLst/>
-          </a:prstGeom>
-          <a:noFill/>
-          <a:ln/>
-        </p:spPr>
-        <p:txBody>
-          <a:bodyPr wrap="square" lIns="0" tIns="0" rIns="0" bIns="0" rtlCol="0" anchor="ctr"/>
-          <a:lstStyle/>
-          <a:p>
-            <a:pPr indent="0" marL="0">
-              <a:buNone/>
-            </a:pPr>
-            <a:r>
-              <a:rPr lang="en-US" sz="1050" b="1" spc="50" kern="0" dirty="0">
-                <a:solidFill>
-                  <a:srgbClr val="D97757"/>
-                </a:solidFill>
-                <a:latin typeface="Courier New" pitchFamily="34" charset="0"/>
-                <a:ea typeface="Courier New" pitchFamily="34" charset="-122"/>
-                <a:cs typeface="Courier New" pitchFamily="34" charset="-120"/>
-              </a:rPr>
-              <a:t>// Program.cs</a:t>
-            </a:r>
-            <a:endParaRPr lang="en-US" sz="1050" dirty="0"/>
-          </a:p>
-        </p:txBody>
-      </p:sp>
-      <p:sp>
-        <p:nvSpPr>
-          <p:cNvPr id="7" name="Text 4"/>
-          <p:cNvSpPr/>
-          <p:nvPr/>
-        </p:nvSpPr>
-        <p:spPr>
-          <a:xfrm>
-            <a:off x="841248" y="1828800"/>
-            <a:ext cx="4572000" cy="1828800"/>
-          </a:xfrm>
-          <a:prstGeom prst="rect">
-            <a:avLst/>
-          </a:prstGeom>
-          <a:noFill/>
-          <a:ln/>
-        </p:spPr>
-        <p:txBody>
-          <a:bodyPr wrap="square" lIns="0" tIns="0" rIns="0" bIns="0" rtlCol="0" anchor="t"/>
-          <a:lstStyle/>
-          <a:p>
-            <a:pPr indent="0" marL="0">
-              <a:lnSpc>
-                <a:spcPct val="128000"/>
-              </a:lnSpc>
-              <a:buNone/>
-            </a:pPr>
-            <a:r>
-              <a:rPr lang="en-US" sz="1300" dirty="0">
-                <a:solidFill>
-                  <a:srgbClr val="E9E5DD"/>
-                </a:solidFill>
-                <a:latin typeface="Courier New" pitchFamily="34" charset="0"/>
-                <a:ea typeface="Courier New" pitchFamily="34" charset="-122"/>
-                <a:cs typeface="Courier New" pitchFamily="34" charset="-120"/>
-              </a:rPr>
-              <a:t>app.MapPost(</a:t>
-            </a:r>
-            <a:pPr indent="0" marL="0">
-              <a:lnSpc>
-                <a:spcPct val="128000"/>
-              </a:lnSpc>
-              <a:buNone/>
-            </a:pPr>
-            <a:r>
-              <a:rPr lang="en-US" sz="1300" dirty="0">
-                <a:solidFill>
-                  <a:srgbClr val="E0A04A"/>
-                </a:solidFill>
-                <a:latin typeface="Courier New" pitchFamily="34" charset="0"/>
-                <a:ea typeface="Courier New" pitchFamily="34" charset="-122"/>
-                <a:cs typeface="Courier New" pitchFamily="34" charset="-120"/>
-              </a:rPr>
-              <a:t>"/api/chat"</a:t>
-            </a:r>
-            <a:pPr indent="0" marL="0">
-              <a:lnSpc>
-                <a:spcPct val="128000"/>
-              </a:lnSpc>
-              <a:buNone/>
-            </a:pPr>
-            <a:r>
-              <a:rPr lang="en-US" sz="1300" dirty="0">
-                <a:solidFill>
-                  <a:srgbClr val="E9E5DD"/>
-                </a:solidFill>
-                <a:latin typeface="Courier New" pitchFamily="34" charset="0"/>
-                <a:ea typeface="Courier New" pitchFamily="34" charset="-122"/>
-                <a:cs typeface="Courier New" pitchFamily="34" charset="-120"/>
-              </a:rPr>
-              <a:t>,</a:t>
-            </a:r>
-            <a:endParaRPr lang="en-US" sz="1300" dirty="0"/>
-          </a:p>
-          <a:p>
-            <a:pPr indent="0" marL="0">
-              <a:lnSpc>
-                <a:spcPct val="128000"/>
-              </a:lnSpc>
-              <a:buNone/>
-            </a:pPr>
-            <a:r>
-              <a:rPr lang="en-US" sz="1300" dirty="0">
-                <a:solidFill>
-                  <a:srgbClr val="E9E5DD"/>
-                </a:solidFill>
-                <a:latin typeface="Courier New" pitchFamily="34" charset="0"/>
-                <a:ea typeface="Courier New" pitchFamily="34" charset="-122"/>
-                <a:cs typeface="Courier New" pitchFamily="34" charset="-120"/>
-              </a:rPr>
-              <a:t>  async (</a:t>
-            </a:r>
-            <a:pPr indent="0" marL="0">
-              <a:lnSpc>
-                <a:spcPct val="128000"/>
-              </a:lnSpc>
-              <a:buNone/>
-            </a:pPr>
-            <a:r>
-              <a:rPr lang="en-US" sz="1300" dirty="0">
-                <a:solidFill>
-                  <a:srgbClr val="9FC3E0"/>
-                </a:solidFill>
-                <a:latin typeface="Courier New" pitchFamily="34" charset="0"/>
-                <a:ea typeface="Courier New" pitchFamily="34" charset="-122"/>
-                <a:cs typeface="Courier New" pitchFamily="34" charset="-120"/>
-              </a:rPr>
-              <a:t>ChatRequest</a:t>
-            </a:r>
-            <a:pPr indent="0" marL="0">
-              <a:lnSpc>
-                <a:spcPct val="128000"/>
-              </a:lnSpc>
-              <a:buNone/>
-            </a:pPr>
-            <a:r>
-              <a:rPr lang="en-US" sz="1300" dirty="0">
-                <a:solidFill>
-                  <a:srgbClr val="E9E5DD"/>
-                </a:solidFill>
-                <a:latin typeface="Courier New" pitchFamily="34" charset="0"/>
-                <a:ea typeface="Courier New" pitchFamily="34" charset="-122"/>
-                <a:cs typeface="Courier New" pitchFamily="34" charset="-120"/>
-              </a:rPr>
-              <a:t> req,</a:t>
-            </a:r>
-            <a:endParaRPr lang="en-US" sz="1300" dirty="0"/>
-          </a:p>
-          <a:p>
-            <a:pPr indent="0" marL="0">
-              <a:lnSpc>
-                <a:spcPct val="128000"/>
-              </a:lnSpc>
-              <a:buNone/>
-            </a:pPr>
-            <a:r>
-              <a:rPr lang="en-US" sz="1300" dirty="0">
-                <a:solidFill>
-                  <a:srgbClr val="E9E5DD"/>
-                </a:solidFill>
-                <a:latin typeface="Courier New" pitchFamily="34" charset="0"/>
-                <a:ea typeface="Courier New" pitchFamily="34" charset="-122"/>
-                <a:cs typeface="Courier New" pitchFamily="34" charset="-120"/>
-              </a:rPr>
-              <a:t>         </a:t>
-            </a:r>
-            <a:pPr indent="0" marL="0">
-              <a:lnSpc>
-                <a:spcPct val="128000"/>
-              </a:lnSpc>
-              <a:buNone/>
-            </a:pPr>
-            <a:r>
-              <a:rPr lang="en-US" sz="1300" dirty="0">
-                <a:solidFill>
-                  <a:srgbClr val="9FC3E0"/>
-                </a:solidFill>
-                <a:latin typeface="Courier New" pitchFamily="34" charset="0"/>
-                <a:ea typeface="Courier New" pitchFamily="34" charset="-122"/>
-                <a:cs typeface="Courier New" pitchFamily="34" charset="-120"/>
-              </a:rPr>
-              <a:t>IClaudeService</a:t>
-            </a:r>
-            <a:pPr indent="0" marL="0">
-              <a:lnSpc>
-                <a:spcPct val="128000"/>
-              </a:lnSpc>
-              <a:buNone/>
-            </a:pPr>
-            <a:r>
-              <a:rPr lang="en-US" sz="1300" dirty="0">
-                <a:solidFill>
-                  <a:srgbClr val="E9E5DD"/>
-                </a:solidFill>
-                <a:latin typeface="Courier New" pitchFamily="34" charset="0"/>
-                <a:ea typeface="Courier New" pitchFamily="34" charset="-122"/>
-                <a:cs typeface="Courier New" pitchFamily="34" charset="-120"/>
-              </a:rPr>
-              <a:t> svc) =&gt;</a:t>
-            </a:r>
-            <a:endParaRPr lang="en-US" sz="1300" dirty="0"/>
-          </a:p>
-          <a:p>
-            <a:pPr indent="0" marL="0">
-              <a:lnSpc>
-                <a:spcPct val="128000"/>
-              </a:lnSpc>
-              <a:buNone/>
-            </a:pPr>
-            <a:r>
-              <a:rPr lang="en-US" sz="1300" dirty="0">
-                <a:solidFill>
-                  <a:srgbClr val="E9E5DD"/>
-                </a:solidFill>
-                <a:latin typeface="Courier New" pitchFamily="34" charset="0"/>
-                <a:ea typeface="Courier New" pitchFamily="34" charset="-122"/>
-                <a:cs typeface="Courier New" pitchFamily="34" charset="-120"/>
-              </a:rPr>
-              <a:t>  await svc.ReplyAsync(</a:t>
-            </a:r>
-            <a:endParaRPr lang="en-US" sz="1300" dirty="0"/>
-          </a:p>
-          <a:p>
-            <a:pPr indent="0" marL="0">
-              <a:lnSpc>
-                <a:spcPct val="128000"/>
-              </a:lnSpc>
-              <a:buNone/>
-            </a:pPr>
-            <a:r>
-              <a:rPr lang="en-US" sz="1300" dirty="0">
-                <a:solidFill>
-                  <a:srgbClr val="E9E5DD"/>
-                </a:solidFill>
-                <a:latin typeface="Courier New" pitchFamily="34" charset="0"/>
-                <a:ea typeface="Courier New" pitchFamily="34" charset="-122"/>
-                <a:cs typeface="Courier New" pitchFamily="34" charset="-120"/>
-              </a:rPr>
-              <a:t>     req.SessionId, req.Text));</a:t>
-            </a:r>
-            <a:endParaRPr lang="en-US" sz="1300" dirty="0"/>
-          </a:p>
-        </p:txBody>
-      </p:sp>
-      <p:sp>
-        <p:nvSpPr>
-          <p:cNvPr id="8" name="Shape 5"/>
-          <p:cNvSpPr/>
-          <p:nvPr/>
-        </p:nvSpPr>
-        <p:spPr>
-          <a:xfrm>
-            <a:off x="5852160" y="1463040"/>
-            <a:ext cx="420624" cy="420624"/>
-          </a:xfrm>
-          <a:prstGeom prst="ellipse">
-            <a:avLst/>
-          </a:prstGeom>
-          <a:solidFill>
-            <a:srgbClr val="D97757"/>
-          </a:solidFill>
-          <a:ln/>
-        </p:spPr>
-      </p:sp>
-      <p:pic>
-        <p:nvPicPr>
-          <p:cNvPr id="9" name="Image 1" descr="preencoded.png">    </p:cNvPr>
+          <p:cNvPr id="4" name="Image 0" descr="preencoded.png"/>
           <p:cNvPicPr>
             <a:picLocks noChangeAspect="1"/>
           </p:cNvPicPr>
@@ -2373,8 +1590,8 @@
         </p:blipFill>
         <p:spPr>
           <a:xfrm>
-            <a:off x="5961522" y="1572402"/>
-            <a:ext cx="201900" cy="201900"/>
+            <a:off x="8302752" y="402336"/>
+            <a:ext cx="365760" cy="310896"/>
           </a:xfrm>
           <a:prstGeom prst="rect">
             <a:avLst/>
@@ -2383,14 +1600,50 @@
       </p:pic>
       <p:sp>
         <p:nvSpPr>
-          <p:cNvPr id="10" name="Text 6"/>
-          <p:cNvSpPr/>
-          <p:nvPr/>
-        </p:nvSpPr>
-        <p:spPr>
-          <a:xfrm>
-            <a:off x="6419088" y="1426464"/>
-            <a:ext cx="2743200" cy="292608"/>
+          <p:cNvPr id="5" name="Shape 2"/>
+          <p:cNvSpPr/>
+          <p:nvPr/>
+        </p:nvSpPr>
+        <p:spPr>
+          <a:xfrm>
+            <a:off x="548640" y="1371600"/>
+            <a:ext cx="5120640" cy="2468880"/>
+          </a:xfrm>
+          <a:prstGeom prst="roundRect">
+            <a:avLst>
+              <a:gd name="adj" fmla="val 2963"/>
+            </a:avLst>
+          </a:prstGeom>
+          <a:solidFill>
+            <a:srgbClr val="1F1E1D"/>
+          </a:solidFill>
+          <a:ln/>
+          <a:effectLst>
+            <a:outerShdw blurRad="88900" dist="38100" dir="5400000" algn="bl" rotWithShape="0">
+              <a:srgbClr val="000000">
+                <a:alpha val="10000"/>
+              </a:srgbClr>
+            </a:outerShdw>
+          </a:effectLst>
+        </p:spPr>
+        <p:txBody>
+          <a:bodyPr/>
+          <a:lstStyle/>
+          <a:p>
+            <a:endParaRPr lang="en-US"/>
+          </a:p>
+        </p:txBody>
+      </p:sp>
+      <p:sp>
+        <p:nvSpPr>
+          <p:cNvPr id="6" name="Text 3"/>
+          <p:cNvSpPr/>
+          <p:nvPr/>
+        </p:nvSpPr>
+        <p:spPr>
+          <a:xfrm>
+            <a:off x="822960" y="1517904"/>
+            <a:ext cx="4572000" cy="256032"/>
           </a:xfrm>
           <a:prstGeom prst="rect">
             <a:avLst/>
@@ -2402,72 +1655,221 @@
           <a:bodyPr wrap="square" lIns="0" tIns="0" rIns="0" bIns="0" rtlCol="0" anchor="ctr"/>
           <a:lstStyle/>
           <a:p>
-            <a:pPr indent="0" marL="0">
-              <a:buNone/>
-            </a:pPr>
-            <a:r>
-              <a:rPr lang="en-US" sz="1350" b="1" dirty="0">
-                <a:solidFill>
-                  <a:srgbClr val="141413"/>
-                </a:solidFill>
-                <a:latin typeface="Inter" pitchFamily="34" charset="0"/>
-                <a:ea typeface="Inter" pitchFamily="34" charset="-122"/>
-                <a:cs typeface="Inter" pitchFamily="34" charset="-120"/>
-              </a:rPr>
-              <a:t>POST /api/chat</a:t>
-            </a:r>
-            <a:endParaRPr lang="en-US" sz="1350" dirty="0"/>
-          </a:p>
-        </p:txBody>
-      </p:sp>
-      <p:sp>
-        <p:nvSpPr>
-          <p:cNvPr id="11" name="Text 7"/>
-          <p:cNvSpPr/>
-          <p:nvPr/>
-        </p:nvSpPr>
-        <p:spPr>
-          <a:xfrm>
-            <a:off x="6419088" y="1709928"/>
-            <a:ext cx="2743200" cy="411480"/>
-          </a:xfrm>
-          <a:prstGeom prst="rect">
-            <a:avLst/>
-          </a:prstGeom>
-          <a:noFill/>
-          <a:ln/>
-        </p:spPr>
-        <p:txBody>
-          <a:bodyPr wrap="square" lIns="0" tIns="0" rIns="0" bIns="0" rtlCol="0" anchor="ctr"/>
-          <a:lstStyle/>
-          <a:p>
-            <a:pPr indent="0" marL="0">
-              <a:buNone/>
-            </a:pPr>
-            <a:r>
-              <a:rPr lang="en-US" sz="1150" dirty="0">
-                <a:solidFill>
-                  <a:srgbClr val="615C52"/>
-                </a:solidFill>
-                <a:latin typeface="Inter" pitchFamily="34" charset="0"/>
-                <a:ea typeface="Inter" pitchFamily="34" charset="-122"/>
-                <a:cs typeface="Inter" pitchFamily="34" charset="-120"/>
-              </a:rPr>
-              <a:t>One minimal-API endpoint</a:t>
-            </a:r>
-            <a:endParaRPr lang="en-US" sz="1150" dirty="0"/>
-          </a:p>
-        </p:txBody>
-      </p:sp>
-      <p:sp>
-        <p:nvSpPr>
-          <p:cNvPr id="12" name="Shape 8"/>
-          <p:cNvSpPr/>
-          <p:nvPr/>
-        </p:nvSpPr>
-        <p:spPr>
-          <a:xfrm>
-            <a:off x="5852160" y="2240280"/>
+            <a:pPr marL="0" indent="0">
+              <a:buNone/>
+            </a:pPr>
+            <a:r>
+              <a:rPr lang="en-US" sz="1050" b="1" kern="0" spc="50" dirty="0">
+                <a:solidFill>
+                  <a:srgbClr val="D97757"/>
+                </a:solidFill>
+                <a:latin typeface="Courier New" pitchFamily="34" charset="0"/>
+                <a:ea typeface="Courier New" pitchFamily="34" charset="-122"/>
+                <a:cs typeface="Courier New" pitchFamily="34" charset="-120"/>
+              </a:rPr>
+              <a:t>// Program.cs</a:t>
+            </a:r>
+            <a:endParaRPr lang="en-US" sz="1050" dirty="0"/>
+          </a:p>
+        </p:txBody>
+      </p:sp>
+      <p:sp>
+        <p:nvSpPr>
+          <p:cNvPr id="7" name="Text 4"/>
+          <p:cNvSpPr/>
+          <p:nvPr/>
+        </p:nvSpPr>
+        <p:spPr>
+          <a:xfrm>
+            <a:off x="841248" y="1828800"/>
+            <a:ext cx="4572000" cy="1828800"/>
+          </a:xfrm>
+          <a:prstGeom prst="rect">
+            <a:avLst/>
+          </a:prstGeom>
+          <a:noFill/>
+          <a:ln/>
+        </p:spPr>
+        <p:txBody>
+          <a:bodyPr wrap="square" lIns="0" tIns="0" rIns="0" bIns="0" rtlCol="0" anchor="t"/>
+          <a:lstStyle/>
+          <a:p>
+            <a:pPr marL="0" indent="0">
+              <a:lnSpc>
+                <a:spcPct val="128000"/>
+              </a:lnSpc>
+              <a:buNone/>
+            </a:pPr>
+            <a:r>
+              <a:rPr lang="en-US" sz="1300" dirty="0">
+                <a:solidFill>
+                  <a:srgbClr val="E9E5DD"/>
+                </a:solidFill>
+                <a:latin typeface="Courier New" pitchFamily="34" charset="0"/>
+                <a:ea typeface="Courier New" pitchFamily="34" charset="-122"/>
+                <a:cs typeface="Courier New" pitchFamily="34" charset="-120"/>
+              </a:rPr>
+              <a:t>app.MapPost(</a:t>
+            </a:r>
+            <a:r>
+              <a:rPr lang="en-US" sz="1300" dirty="0">
+                <a:solidFill>
+                  <a:srgbClr val="E0A04A"/>
+                </a:solidFill>
+                <a:latin typeface="Courier New" pitchFamily="34" charset="0"/>
+                <a:ea typeface="Courier New" pitchFamily="34" charset="-122"/>
+                <a:cs typeface="Courier New" pitchFamily="34" charset="-120"/>
+              </a:rPr>
+              <a:t>"/api/chat"</a:t>
+            </a:r>
+            <a:r>
+              <a:rPr lang="en-US" sz="1300" dirty="0">
+                <a:solidFill>
+                  <a:srgbClr val="E9E5DD"/>
+                </a:solidFill>
+                <a:latin typeface="Courier New" pitchFamily="34" charset="0"/>
+                <a:ea typeface="Courier New" pitchFamily="34" charset="-122"/>
+                <a:cs typeface="Courier New" pitchFamily="34" charset="-120"/>
+              </a:rPr>
+              <a:t>,</a:t>
+            </a:r>
+            <a:endParaRPr lang="en-US" sz="1300" dirty="0"/>
+          </a:p>
+          <a:p>
+            <a:pPr marL="0" indent="0">
+              <a:lnSpc>
+                <a:spcPct val="128000"/>
+              </a:lnSpc>
+              <a:buNone/>
+            </a:pPr>
+            <a:r>
+              <a:rPr lang="en-US" sz="1300" dirty="0">
+                <a:solidFill>
+                  <a:srgbClr val="E9E5DD"/>
+                </a:solidFill>
+                <a:latin typeface="Courier New" pitchFamily="34" charset="0"/>
+                <a:ea typeface="Courier New" pitchFamily="34" charset="-122"/>
+                <a:cs typeface="Courier New" pitchFamily="34" charset="-120"/>
+              </a:rPr>
+              <a:t>  async (</a:t>
+            </a:r>
+            <a:r>
+              <a:rPr lang="en-US" sz="1300" dirty="0">
+                <a:solidFill>
+                  <a:srgbClr val="9FC3E0"/>
+                </a:solidFill>
+                <a:latin typeface="Courier New" pitchFamily="34" charset="0"/>
+                <a:ea typeface="Courier New" pitchFamily="34" charset="-122"/>
+                <a:cs typeface="Courier New" pitchFamily="34" charset="-120"/>
+              </a:rPr>
+              <a:t>ChatRequest</a:t>
+            </a:r>
+            <a:r>
+              <a:rPr lang="en-US" sz="1300" dirty="0">
+                <a:solidFill>
+                  <a:srgbClr val="E9E5DD"/>
+                </a:solidFill>
+                <a:latin typeface="Courier New" pitchFamily="34" charset="0"/>
+                <a:ea typeface="Courier New" pitchFamily="34" charset="-122"/>
+                <a:cs typeface="Courier New" pitchFamily="34" charset="-120"/>
+              </a:rPr>
+              <a:t> req,</a:t>
+            </a:r>
+            <a:endParaRPr lang="en-US" sz="1300" dirty="0"/>
+          </a:p>
+          <a:p>
+            <a:pPr marL="0" indent="0">
+              <a:lnSpc>
+                <a:spcPct val="128000"/>
+              </a:lnSpc>
+              <a:buNone/>
+            </a:pPr>
+            <a:r>
+              <a:rPr lang="en-US" sz="1300" dirty="0">
+                <a:solidFill>
+                  <a:srgbClr val="E9E5DD"/>
+                </a:solidFill>
+                <a:latin typeface="Courier New" pitchFamily="34" charset="0"/>
+                <a:ea typeface="Courier New" pitchFamily="34" charset="-122"/>
+                <a:cs typeface="Courier New" pitchFamily="34" charset="-120"/>
+              </a:rPr>
+              <a:t>         </a:t>
+            </a:r>
+            <a:r>
+              <a:rPr lang="en-US" sz="1300" dirty="0">
+                <a:solidFill>
+                  <a:srgbClr val="9FC3E0"/>
+                </a:solidFill>
+                <a:latin typeface="Courier New" pitchFamily="34" charset="0"/>
+                <a:ea typeface="Courier New" pitchFamily="34" charset="-122"/>
+                <a:cs typeface="Courier New" pitchFamily="34" charset="-120"/>
+              </a:rPr>
+              <a:t>IClaudeService</a:t>
+            </a:r>
+            <a:r>
+              <a:rPr lang="en-US" sz="1300" dirty="0">
+                <a:solidFill>
+                  <a:srgbClr val="E9E5DD"/>
+                </a:solidFill>
+                <a:latin typeface="Courier New" pitchFamily="34" charset="0"/>
+                <a:ea typeface="Courier New" pitchFamily="34" charset="-122"/>
+                <a:cs typeface="Courier New" pitchFamily="34" charset="-120"/>
+              </a:rPr>
+              <a:t> svc) =&gt;</a:t>
+            </a:r>
+            <a:endParaRPr lang="en-US" sz="1300" dirty="0"/>
+          </a:p>
+          <a:p>
+            <a:pPr marL="0" indent="0">
+              <a:lnSpc>
+                <a:spcPct val="128000"/>
+              </a:lnSpc>
+              <a:buNone/>
+            </a:pPr>
+            <a:r>
+              <a:rPr lang="en-US" sz="1300" dirty="0">
+                <a:solidFill>
+                  <a:srgbClr val="E9E5DD"/>
+                </a:solidFill>
+                <a:latin typeface="Courier New" pitchFamily="34" charset="0"/>
+                <a:ea typeface="Courier New" pitchFamily="34" charset="-122"/>
+                <a:cs typeface="Courier New" pitchFamily="34" charset="-120"/>
+              </a:rPr>
+              <a:t>  await svc.ReplyAsync(</a:t>
+            </a:r>
+            <a:endParaRPr lang="en-US" sz="1300" dirty="0"/>
+          </a:p>
+          <a:p>
+            <a:pPr marL="0" indent="0">
+              <a:lnSpc>
+                <a:spcPct val="128000"/>
+              </a:lnSpc>
+              <a:buNone/>
+            </a:pPr>
+            <a:r>
+              <a:rPr lang="en-US" sz="1300" dirty="0">
+                <a:solidFill>
+                  <a:srgbClr val="E9E5DD"/>
+                </a:solidFill>
+                <a:latin typeface="Courier New" pitchFamily="34" charset="0"/>
+                <a:ea typeface="Courier New" pitchFamily="34" charset="-122"/>
+                <a:cs typeface="Courier New" pitchFamily="34" charset="-120"/>
+              </a:rPr>
+              <a:t>     req.SessionId, req.Text));</a:t>
+            </a:r>
+            <a:endParaRPr lang="en-US" sz="1300" dirty="0"/>
+          </a:p>
+        </p:txBody>
+      </p:sp>
+      <p:sp>
+        <p:nvSpPr>
+          <p:cNvPr id="8" name="Shape 5"/>
+          <p:cNvSpPr/>
+          <p:nvPr/>
+        </p:nvSpPr>
+        <p:spPr>
+          <a:xfrm>
+            <a:off x="5852160" y="1463040"/>
             <a:ext cx="420624" cy="420624"/>
           </a:xfrm>
           <a:prstGeom prst="ellipse">
@@ -2478,10 +1880,17 @@
           </a:solidFill>
           <a:ln/>
         </p:spPr>
+        <p:txBody>
+          <a:bodyPr/>
+          <a:lstStyle/>
+          <a:p>
+            <a:endParaRPr lang="en-US"/>
+          </a:p>
+        </p:txBody>
       </p:sp>
       <p:pic>
         <p:nvPicPr>
-          <p:cNvPr id="13" name="Image 2" descr="preencoded.png">    </p:cNvPr>
+          <p:cNvPr id="9" name="Image 1" descr="preencoded.png"/>
           <p:cNvPicPr>
             <a:picLocks noChangeAspect="1"/>
           </p:cNvPicPr>
@@ -2495,7 +1904,7 @@
         </p:blipFill>
         <p:spPr>
           <a:xfrm>
-            <a:off x="5961522" y="2349642"/>
+            <a:off x="5961522" y="1572402"/>
             <a:ext cx="201900" cy="201900"/>
           </a:xfrm>
           <a:prstGeom prst="rect">
@@ -2505,13 +1914,13 @@
       </p:pic>
       <p:sp>
         <p:nvSpPr>
-          <p:cNvPr id="14" name="Text 9"/>
-          <p:cNvSpPr/>
-          <p:nvPr/>
-        </p:nvSpPr>
-        <p:spPr>
-          <a:xfrm>
-            <a:off x="6419088" y="2203704"/>
+          <p:cNvPr id="10" name="Text 6"/>
+          <p:cNvSpPr/>
+          <p:nvPr/>
+        </p:nvSpPr>
+        <p:spPr>
+          <a:xfrm>
+            <a:off x="6419088" y="1426464"/>
             <a:ext cx="2743200" cy="292608"/>
           </a:xfrm>
           <a:prstGeom prst="rect">
@@ -2524,7 +1933,7 @@
           <a:bodyPr wrap="square" lIns="0" tIns="0" rIns="0" bIns="0" rtlCol="0" anchor="ctr"/>
           <a:lstStyle/>
           <a:p>
-            <a:pPr indent="0" marL="0">
+            <a:pPr marL="0" indent="0">
               <a:buNone/>
             </a:pPr>
             <a:r>
@@ -2536,7 +1945,7 @@
                 <a:ea typeface="Inter" pitchFamily="34" charset="-122"/>
                 <a:cs typeface="Inter" pitchFamily="34" charset="-120"/>
               </a:rPr>
-              <a:t>Inject IClaudeService</a:t>
+              <a:t>POST /api/chat</a:t>
             </a:r>
             <a:endParaRPr lang="en-US" sz="1350" dirty="0"/>
           </a:p>
@@ -2544,13 +1953,13 @@
       </p:sp>
       <p:sp>
         <p:nvSpPr>
-          <p:cNvPr id="15" name="Text 10"/>
-          <p:cNvSpPr/>
-          <p:nvPr/>
-        </p:nvSpPr>
-        <p:spPr>
-          <a:xfrm>
-            <a:off x="6419088" y="2487168"/>
+          <p:cNvPr id="11" name="Text 7"/>
+          <p:cNvSpPr/>
+          <p:nvPr/>
+        </p:nvSpPr>
+        <p:spPr>
+          <a:xfrm>
+            <a:off x="6419088" y="1709928"/>
             <a:ext cx="2743200" cy="411480"/>
           </a:xfrm>
           <a:prstGeom prst="rect">
@@ -2563,7 +1972,7 @@
           <a:bodyPr wrap="square" lIns="0" tIns="0" rIns="0" bIns="0" rtlCol="0" anchor="ctr"/>
           <a:lstStyle/>
           <a:p>
-            <a:pPr indent="0" marL="0">
+            <a:pPr marL="0" indent="0">
               <a:buNone/>
             </a:pPr>
             <a:r>
@@ -2575,7 +1984,7 @@
                 <a:ea typeface="Inter" pitchFamily="34" charset="-122"/>
                 <a:cs typeface="Inter" pitchFamily="34" charset="-120"/>
               </a:rPr>
-              <a:t>Endpoint stays thin</a:t>
+              <a:t>One minimal-API endpoint</a:t>
             </a:r>
             <a:endParaRPr lang="en-US" sz="1150" dirty="0"/>
           </a:p>
@@ -2583,13 +1992,13 @@
       </p:sp>
       <p:sp>
         <p:nvSpPr>
-          <p:cNvPr id="16" name="Shape 11"/>
-          <p:cNvSpPr/>
-          <p:nvPr/>
-        </p:nvSpPr>
-        <p:spPr>
-          <a:xfrm>
-            <a:off x="5852160" y="3017520"/>
+          <p:cNvPr id="12" name="Shape 8"/>
+          <p:cNvSpPr/>
+          <p:nvPr/>
+        </p:nvSpPr>
+        <p:spPr>
+          <a:xfrm>
+            <a:off x="5852160" y="2240280"/>
             <a:ext cx="420624" cy="420624"/>
           </a:xfrm>
           <a:prstGeom prst="ellipse">
@@ -2600,10 +2009,17 @@
           </a:solidFill>
           <a:ln/>
         </p:spPr>
+        <p:txBody>
+          <a:bodyPr/>
+          <a:lstStyle/>
+          <a:p>
+            <a:endParaRPr lang="en-US"/>
+          </a:p>
+        </p:txBody>
       </p:sp>
       <p:pic>
         <p:nvPicPr>
-          <p:cNvPr id="17" name="Image 3" descr="preencoded.png">    </p:cNvPr>
+          <p:cNvPr id="13" name="Image 2" descr="preencoded.png"/>
           <p:cNvPicPr>
             <a:picLocks noChangeAspect="1"/>
           </p:cNvPicPr>
@@ -2617,6 +2033,135 @@
         </p:blipFill>
         <p:spPr>
           <a:xfrm>
+            <a:off x="5961522" y="2349642"/>
+            <a:ext cx="201900" cy="201900"/>
+          </a:xfrm>
+          <a:prstGeom prst="rect">
+            <a:avLst/>
+          </a:prstGeom>
+        </p:spPr>
+      </p:pic>
+      <p:sp>
+        <p:nvSpPr>
+          <p:cNvPr id="14" name="Text 9"/>
+          <p:cNvSpPr/>
+          <p:nvPr/>
+        </p:nvSpPr>
+        <p:spPr>
+          <a:xfrm>
+            <a:off x="6419088" y="2203704"/>
+            <a:ext cx="2743200" cy="292608"/>
+          </a:xfrm>
+          <a:prstGeom prst="rect">
+            <a:avLst/>
+          </a:prstGeom>
+          <a:noFill/>
+          <a:ln/>
+        </p:spPr>
+        <p:txBody>
+          <a:bodyPr wrap="square" lIns="0" tIns="0" rIns="0" bIns="0" rtlCol="0" anchor="ctr"/>
+          <a:lstStyle/>
+          <a:p>
+            <a:pPr marL="0" indent="0">
+              <a:buNone/>
+            </a:pPr>
+            <a:r>
+              <a:rPr lang="en-US" sz="1350" b="1" dirty="0">
+                <a:solidFill>
+                  <a:srgbClr val="141413"/>
+                </a:solidFill>
+                <a:latin typeface="Inter" pitchFamily="34" charset="0"/>
+                <a:ea typeface="Inter" pitchFamily="34" charset="-122"/>
+                <a:cs typeface="Inter" pitchFamily="34" charset="-120"/>
+              </a:rPr>
+              <a:t>Inject IClaudeService</a:t>
+            </a:r>
+            <a:endParaRPr lang="en-US" sz="1350" dirty="0"/>
+          </a:p>
+        </p:txBody>
+      </p:sp>
+      <p:sp>
+        <p:nvSpPr>
+          <p:cNvPr id="15" name="Text 10"/>
+          <p:cNvSpPr/>
+          <p:nvPr/>
+        </p:nvSpPr>
+        <p:spPr>
+          <a:xfrm>
+            <a:off x="6419088" y="2487168"/>
+            <a:ext cx="2743200" cy="411480"/>
+          </a:xfrm>
+          <a:prstGeom prst="rect">
+            <a:avLst/>
+          </a:prstGeom>
+          <a:noFill/>
+          <a:ln/>
+        </p:spPr>
+        <p:txBody>
+          <a:bodyPr wrap="square" lIns="0" tIns="0" rIns="0" bIns="0" rtlCol="0" anchor="ctr"/>
+          <a:lstStyle/>
+          <a:p>
+            <a:pPr marL="0" indent="0">
+              <a:buNone/>
+            </a:pPr>
+            <a:r>
+              <a:rPr lang="en-US" sz="1150" dirty="0">
+                <a:solidFill>
+                  <a:srgbClr val="615C52"/>
+                </a:solidFill>
+                <a:latin typeface="Inter" pitchFamily="34" charset="0"/>
+                <a:ea typeface="Inter" pitchFamily="34" charset="-122"/>
+                <a:cs typeface="Inter" pitchFamily="34" charset="-120"/>
+              </a:rPr>
+              <a:t>Endpoint stays thin</a:t>
+            </a:r>
+            <a:endParaRPr lang="en-US" sz="1150" dirty="0"/>
+          </a:p>
+        </p:txBody>
+      </p:sp>
+      <p:sp>
+        <p:nvSpPr>
+          <p:cNvPr id="16" name="Shape 11"/>
+          <p:cNvSpPr/>
+          <p:nvPr/>
+        </p:nvSpPr>
+        <p:spPr>
+          <a:xfrm>
+            <a:off x="5852160" y="3017520"/>
+            <a:ext cx="420624" cy="420624"/>
+          </a:xfrm>
+          <a:prstGeom prst="ellipse">
+            <a:avLst/>
+          </a:prstGeom>
+          <a:solidFill>
+            <a:srgbClr val="D97757"/>
+          </a:solidFill>
+          <a:ln/>
+        </p:spPr>
+        <p:txBody>
+          <a:bodyPr/>
+          <a:lstStyle/>
+          <a:p>
+            <a:endParaRPr lang="en-US"/>
+          </a:p>
+        </p:txBody>
+      </p:sp>
+      <p:pic>
+        <p:nvPicPr>
+          <p:cNvPr id="17" name="Image 3" descr="preencoded.png"/>
+          <p:cNvPicPr>
+            <a:picLocks noChangeAspect="1"/>
+          </p:cNvPicPr>
+          <p:nvPr/>
+        </p:nvPicPr>
+        <p:blipFill>
+          <a:blip r:embed="rId5"/>
+          <a:stretch>
+            <a:fillRect/>
+          </a:stretch>
+        </p:blipFill>
+        <p:spPr>
+          <a:xfrm>
             <a:off x="5961522" y="3126882"/>
             <a:ext cx="201900" cy="201900"/>
           </a:xfrm>
@@ -2646,7 +2191,7 @@
           <a:bodyPr wrap="square" lIns="0" tIns="0" rIns="0" bIns="0" rtlCol="0" anchor="ctr"/>
           <a:lstStyle/>
           <a:p>
-            <a:pPr indent="0" marL="0">
+            <a:pPr marL="0" indent="0">
               <a:buNone/>
             </a:pPr>
             <a:r>
@@ -2685,7 +2230,7 @@
           <a:bodyPr wrap="square" lIns="0" tIns="0" rIns="0" bIns="0" rtlCol="0" anchor="ctr"/>
           <a:lstStyle/>
           <a:p>
-            <a:pPr indent="0" marL="0">
+            <a:pPr marL="0" indent="0">
               <a:buNone/>
             </a:pPr>
             <a:r>
@@ -2724,7 +2269,7 @@
           <a:bodyPr wrap="square" rtlCol="0" anchor="ctr"/>
           <a:lstStyle/>
           <a:p>
-            <a:pPr indent="0" marL="0">
+            <a:pPr marL="0" indent="0">
               <a:buNone/>
             </a:pPr>
             <a:r>
@@ -2763,7 +2308,7 @@
           <a:bodyPr wrap="square" rtlCol="0" anchor="ctr"/>
           <a:lstStyle/>
           <a:p>
-            <a:pPr algn="r" indent="0" marL="0">
+            <a:pPr marL="0" indent="0" algn="r">
               <a:buNone/>
             </a:pPr>
             <a:r>
@@ -2778,45 +2323,6 @@
               <a:t>Day 2 · Section 1  ·  11/13</a:t>
             </a:r>
             <a:endParaRPr lang="en-US" sz="900" dirty="0"/>
-          </a:p>
-        </p:txBody>
-      </p:sp>
-      <p:sp>
-        <p:nvSpPr>
-          <p:cNvPr id="22" name="Text 16"/>
-          <p:cNvSpPr/>
-          <p:nvPr/>
-        </p:nvSpPr>
-        <p:spPr>
-          <a:xfrm>
-            <a:off x="548640" y="4462272"/>
-            <a:ext cx="8046720" cy="274320"/>
-          </a:xfrm>
-          <a:prstGeom prst="rect">
-            <a:avLst/>
-          </a:prstGeom>
-          <a:noFill/>
-          <a:ln/>
-        </p:spPr>
-        <p:txBody>
-          <a:bodyPr wrap="square" lIns="0" tIns="0" rIns="0" bIns="0" rtlCol="0" anchor="ctr"/>
-          <a:lstStyle/>
-          <a:p>
-            <a:pPr indent="0" marL="0">
-              <a:buNone/>
-            </a:pPr>
-            <a:r>
-              <a:rPr lang="en-US" sz="1000" i="1" dirty="0">
-                <a:solidFill>
-                  <a:srgbClr val="615C52"/>
-                </a:solidFill>
-                <a:latin typeface="Inter" pitchFamily="34" charset="0"/>
-                <a:ea typeface="Inter" pitchFamily="34" charset="-122"/>
-                <a:cs typeface="Inter" pitchFamily="34" charset="-120"/>
-              </a:rPr>
-              <a:t>▸ Keep the endpoint thin — all the logic lives in IClaudeService.</a:t>
-            </a:r>
-            <a:endParaRPr lang="en-US" sz="1000" dirty="0"/>
           </a:p>
         </p:txBody>
       </p:sp>
@@ -2836,6 +2342,7 @@
         <a:solidFill>
           <a:srgbClr val="F0EEE6"/>
         </a:solidFill>
+        <a:effectLst/>
       </p:bgPr>
     </p:bg>
     <p:spTree>
@@ -2873,11 +2380,11 @@
           <a:bodyPr wrap="square" lIns="0" tIns="0" rIns="0" bIns="0" rtlCol="0" anchor="ctr"/>
           <a:lstStyle/>
           <a:p>
-            <a:pPr indent="0" marL="0">
-              <a:buNone/>
-            </a:pPr>
-            <a:r>
-              <a:rPr lang="en-US" sz="1100" b="1" spc="200" kern="0" dirty="0">
+            <a:pPr marL="0" indent="0">
+              <a:buNone/>
+            </a:pPr>
+            <a:r>
+              <a:rPr lang="en-US" sz="1100" b="1" kern="0" spc="200" dirty="0">
                 <a:solidFill>
                   <a:srgbClr val="C25E40"/>
                 </a:solidFill>
@@ -2912,7 +2419,7 @@
           <a:bodyPr wrap="square" lIns="0" tIns="0" rIns="0" bIns="0" rtlCol="0" anchor="ctr"/>
           <a:lstStyle/>
           <a:p>
-            <a:pPr indent="0" marL="0">
+            <a:pPr marL="0" indent="0">
               <a:buNone/>
             </a:pPr>
             <a:r>
@@ -2932,80 +2439,7 @@
       </p:sp>
       <p:pic>
         <p:nvPicPr>
-          <p:cNvPr id="4" name="Image 0" descr="preencoded.png">    </p:cNvPr>
-          <p:cNvPicPr>
-            <a:picLocks noChangeAspect="1"/>
-          </p:cNvPicPr>
-          <p:nvPr/>
-        </p:nvPicPr>
-        <p:blipFill>
-          <a:blip r:embed="rId1"/>
-          <a:stretch>
-            <a:fillRect/>
-          </a:stretch>
-        </p:blipFill>
-        <p:spPr>
-          <a:xfrm>
-            <a:off x="8302752" y="402336"/>
-            <a:ext cx="365760" cy="310896"/>
-          </a:xfrm>
-          <a:prstGeom prst="rect">
-            <a:avLst/>
-          </a:prstGeom>
-        </p:spPr>
-      </p:pic>
-      <p:sp>
-        <p:nvSpPr>
-          <p:cNvPr id="5" name="Shape 2"/>
-          <p:cNvSpPr/>
-          <p:nvPr/>
-        </p:nvSpPr>
-        <p:spPr>
-          <a:xfrm>
-            <a:off x="548640" y="1463040"/>
-            <a:ext cx="8046720" cy="1005840"/>
-          </a:xfrm>
-          <a:prstGeom prst="roundRect">
-            <a:avLst>
-              <a:gd name="adj" fmla="val 10909"/>
-            </a:avLst>
-          </a:prstGeom>
-          <a:solidFill>
-            <a:srgbClr val="F4E4DC"/>
-          </a:solidFill>
-          <a:ln/>
-          <a:effectLst>
-            <a:outerShdw sx="100000" sy="100000" kx="0" ky="0" algn="bl" rotWithShape="0" blurRad="88900" dist="38100" dir="5400000">
-              <a:srgbClr val="000000">
-                <a:alpha val="10000"/>
-              </a:srgbClr>
-            </a:outerShdw>
-          </a:effectLst>
-        </p:spPr>
-      </p:sp>
-      <p:sp>
-        <p:nvSpPr>
-          <p:cNvPr id="6" name="Shape 3"/>
-          <p:cNvSpPr/>
-          <p:nvPr/>
-        </p:nvSpPr>
-        <p:spPr>
-          <a:xfrm>
-            <a:off x="841248" y="1737360"/>
-            <a:ext cx="502920" cy="502920"/>
-          </a:xfrm>
-          <a:prstGeom prst="ellipse">
-            <a:avLst/>
-          </a:prstGeom>
-          <a:solidFill>
-            <a:srgbClr val="D97757"/>
-          </a:solidFill>
-          <a:ln/>
-        </p:spPr>
-      </p:sp>
-      <p:pic>
-        <p:nvPicPr>
-          <p:cNvPr id="7" name="Image 1" descr="preencoded.png">    </p:cNvPr>
+          <p:cNvPr id="4" name="Image 0" descr="preencoded.png"/>
           <p:cNvPicPr>
             <a:picLocks noChangeAspect="1"/>
           </p:cNvPicPr>
@@ -3019,8 +2453,8 @@
         </p:blipFill>
         <p:spPr>
           <a:xfrm>
-            <a:off x="972007" y="1868119"/>
-            <a:ext cx="241402" cy="241402"/>
+            <a:off x="8302752" y="402336"/>
+            <a:ext cx="365760" cy="310896"/>
           </a:xfrm>
           <a:prstGeom prst="rect">
             <a:avLst/>
@@ -3029,67 +2463,50 @@
       </p:pic>
       <p:sp>
         <p:nvSpPr>
-          <p:cNvPr id="8" name="Text 4"/>
-          <p:cNvSpPr/>
-          <p:nvPr/>
-        </p:nvSpPr>
-        <p:spPr>
-          <a:xfrm>
-            <a:off x="1572768" y="1463040"/>
-            <a:ext cx="6766560" cy="1005840"/>
-          </a:xfrm>
-          <a:prstGeom prst="rect">
-            <a:avLst/>
-          </a:prstGeom>
-          <a:noFill/>
-          <a:ln/>
-        </p:spPr>
-        <p:txBody>
-          <a:bodyPr wrap="square" lIns="0" tIns="0" rIns="0" bIns="0" rtlCol="0" anchor="ctr"/>
-          <a:lstStyle/>
-          <a:p>
-            <a:pPr indent="0" marL="0">
-              <a:buNone/>
-            </a:pPr>
-            <a:r>
-              <a:rPr lang="en-US" sz="1600" b="1" dirty="0">
-                <a:solidFill>
-                  <a:srgbClr val="C25E40"/>
-                </a:solidFill>
-                <a:latin typeface="Courier New" pitchFamily="34" charset="0"/>
-                <a:ea typeface="Courier New" pitchFamily="34" charset="-122"/>
-                <a:cs typeface="Courier New" pitchFamily="34" charset="-120"/>
-              </a:rPr>
-              <a:t>IChatClient </a:t>
-            </a:r>
-            <a:pPr indent="0" marL="0">
-              <a:buNone/>
-            </a:pPr>
-            <a:r>
-              <a:rPr lang="en-US" sz="1600" dirty="0">
-                <a:solidFill>
-                  <a:srgbClr val="141413"/>
-                </a:solidFill>
-                <a:latin typeface="Inter" pitchFamily="34" charset="0"/>
-                <a:ea typeface="Inter" pitchFamily="34" charset="-122"/>
-                <a:cs typeface="Inter" pitchFamily="34" charset="-120"/>
-              </a:rPr>
-              <a:t>is a provider-agnostic chat abstraction.</a:t>
-            </a:r>
-            <a:endParaRPr lang="en-US" sz="1600" dirty="0"/>
-          </a:p>
-        </p:txBody>
-      </p:sp>
-      <p:sp>
-        <p:nvSpPr>
-          <p:cNvPr id="9" name="Shape 5"/>
-          <p:cNvSpPr/>
-          <p:nvPr/>
-        </p:nvSpPr>
-        <p:spPr>
-          <a:xfrm>
-            <a:off x="566928" y="2697480"/>
-            <a:ext cx="420624" cy="420624"/>
+          <p:cNvPr id="5" name="Shape 2"/>
+          <p:cNvSpPr/>
+          <p:nvPr/>
+        </p:nvSpPr>
+        <p:spPr>
+          <a:xfrm>
+            <a:off x="548640" y="1463040"/>
+            <a:ext cx="8046720" cy="1005840"/>
+          </a:xfrm>
+          <a:prstGeom prst="roundRect">
+            <a:avLst>
+              <a:gd name="adj" fmla="val 10909"/>
+            </a:avLst>
+          </a:prstGeom>
+          <a:solidFill>
+            <a:srgbClr val="F4E4DC"/>
+          </a:solidFill>
+          <a:ln/>
+          <a:effectLst>
+            <a:outerShdw blurRad="88900" dist="38100" dir="5400000" algn="bl" rotWithShape="0">
+              <a:srgbClr val="000000">
+                <a:alpha val="10000"/>
+              </a:srgbClr>
+            </a:outerShdw>
+          </a:effectLst>
+        </p:spPr>
+        <p:txBody>
+          <a:bodyPr/>
+          <a:lstStyle/>
+          <a:p>
+            <a:endParaRPr lang="en-US"/>
+          </a:p>
+        </p:txBody>
+      </p:sp>
+      <p:sp>
+        <p:nvSpPr>
+          <p:cNvPr id="6" name="Shape 3"/>
+          <p:cNvSpPr/>
+          <p:nvPr/>
+        </p:nvSpPr>
+        <p:spPr>
+          <a:xfrm>
+            <a:off x="841248" y="1737360"/>
+            <a:ext cx="502920" cy="502920"/>
           </a:xfrm>
           <a:prstGeom prst="ellipse">
             <a:avLst/>
@@ -3099,10 +2516,17 @@
           </a:solidFill>
           <a:ln/>
         </p:spPr>
+        <p:txBody>
+          <a:bodyPr/>
+          <a:lstStyle/>
+          <a:p>
+            <a:endParaRPr lang="en-US"/>
+          </a:p>
+        </p:txBody>
       </p:sp>
       <p:pic>
         <p:nvPicPr>
-          <p:cNvPr id="10" name="Image 2" descr="preencoded.png">    </p:cNvPr>
+          <p:cNvPr id="7" name="Image 1" descr="preencoded.png"/>
           <p:cNvPicPr>
             <a:picLocks noChangeAspect="1"/>
           </p:cNvPicPr>
@@ -3116,8 +2540,8 @@
         </p:blipFill>
         <p:spPr>
           <a:xfrm>
-            <a:off x="676290" y="2806842"/>
-            <a:ext cx="201900" cy="201900"/>
+            <a:off x="972007" y="1868119"/>
+            <a:ext cx="241402" cy="241402"/>
           </a:xfrm>
           <a:prstGeom prst="rect">
             <a:avLst/>
@@ -3126,14 +2550,14 @@
       </p:pic>
       <p:sp>
         <p:nvSpPr>
-          <p:cNvPr id="11" name="Text 6"/>
-          <p:cNvSpPr/>
-          <p:nvPr/>
-        </p:nvSpPr>
-        <p:spPr>
-          <a:xfrm>
-            <a:off x="1133856" y="2660904"/>
-            <a:ext cx="4206240" cy="292608"/>
+          <p:cNvPr id="8" name="Text 4"/>
+          <p:cNvSpPr/>
+          <p:nvPr/>
+        </p:nvSpPr>
+        <p:spPr>
+          <a:xfrm>
+            <a:off x="1572768" y="1463040"/>
+            <a:ext cx="6766560" cy="1005840"/>
           </a:xfrm>
           <a:prstGeom prst="rect">
             <a:avLst/>
@@ -3145,11 +2569,22 @@
           <a:bodyPr wrap="square" lIns="0" tIns="0" rIns="0" bIns="0" rtlCol="0" anchor="ctr"/>
           <a:lstStyle/>
           <a:p>
-            <a:pPr indent="0" marL="0">
-              <a:buNone/>
-            </a:pPr>
-            <a:r>
-              <a:rPr lang="en-US" sz="1400" b="1" dirty="0">
+            <a:pPr marL="0" indent="0">
+              <a:buNone/>
+            </a:pPr>
+            <a:r>
+              <a:rPr lang="en-US" sz="1600" b="1" dirty="0">
+                <a:solidFill>
+                  <a:srgbClr val="C25E40"/>
+                </a:solidFill>
+                <a:latin typeface="Courier New" pitchFamily="34" charset="0"/>
+                <a:ea typeface="Courier New" pitchFamily="34" charset="-122"/>
+                <a:cs typeface="Courier New" pitchFamily="34" charset="-120"/>
+              </a:rPr>
+              <a:t>IChatClient </a:t>
+            </a:r>
+            <a:r>
+              <a:rPr lang="en-US" sz="1600" dirty="0">
                 <a:solidFill>
                   <a:srgbClr val="141413"/>
                 </a:solidFill>
@@ -3157,60 +2592,21 @@
                 <a:ea typeface="Inter" pitchFamily="34" charset="-122"/>
                 <a:cs typeface="Inter" pitchFamily="34" charset="-120"/>
               </a:rPr>
-              <a:t>One interface, many providers</a:t>
-            </a:r>
-            <a:endParaRPr lang="en-US" sz="1400" dirty="0"/>
-          </a:p>
-        </p:txBody>
-      </p:sp>
-      <p:sp>
-        <p:nvSpPr>
-          <p:cNvPr id="12" name="Text 7"/>
-          <p:cNvSpPr/>
-          <p:nvPr/>
-        </p:nvSpPr>
-        <p:spPr>
-          <a:xfrm>
-            <a:off x="5303520" y="2660904"/>
-            <a:ext cx="3200400" cy="292608"/>
-          </a:xfrm>
-          <a:prstGeom prst="rect">
-            <a:avLst/>
-          </a:prstGeom>
-          <a:noFill/>
-          <a:ln/>
-        </p:spPr>
-        <p:txBody>
-          <a:bodyPr wrap="square" lIns="0" tIns="0" rIns="0" bIns="0" rtlCol="0" anchor="ctr"/>
-          <a:lstStyle/>
-          <a:p>
-            <a:pPr indent="0" marL="0">
-              <a:buNone/>
-            </a:pPr>
-            <a:r>
-              <a:rPr lang="en-US" sz="1150" dirty="0">
-                <a:solidFill>
-                  <a:srgbClr val="615C52"/>
-                </a:solidFill>
-                <a:latin typeface="Inter" pitchFamily="34" charset="0"/>
-                <a:ea typeface="Inter" pitchFamily="34" charset="-122"/>
-                <a:cs typeface="Inter" pitchFamily="34" charset="-120"/>
-              </a:rPr>
-              <a:t>Swap Anthropic, OpenAI, Azure, local</a:t>
-            </a:r>
-            <a:endParaRPr lang="en-US" sz="1150" dirty="0"/>
-          </a:p>
-        </p:txBody>
-      </p:sp>
-      <p:sp>
-        <p:nvSpPr>
-          <p:cNvPr id="13" name="Shape 8"/>
-          <p:cNvSpPr/>
-          <p:nvPr/>
-        </p:nvSpPr>
-        <p:spPr>
-          <a:xfrm>
-            <a:off x="566928" y="3200400"/>
+              <a:t>is a provider-agnostic chat abstraction.</a:t>
+            </a:r>
+            <a:endParaRPr lang="en-US" sz="1600" dirty="0"/>
+          </a:p>
+        </p:txBody>
+      </p:sp>
+      <p:sp>
+        <p:nvSpPr>
+          <p:cNvPr id="9" name="Shape 5"/>
+          <p:cNvSpPr/>
+          <p:nvPr/>
+        </p:nvSpPr>
+        <p:spPr>
+          <a:xfrm>
+            <a:off x="566928" y="2697480"/>
             <a:ext cx="420624" cy="420624"/>
           </a:xfrm>
           <a:prstGeom prst="ellipse">
@@ -3221,10 +2617,17 @@
           </a:solidFill>
           <a:ln/>
         </p:spPr>
+        <p:txBody>
+          <a:bodyPr/>
+          <a:lstStyle/>
+          <a:p>
+            <a:endParaRPr lang="en-US"/>
+          </a:p>
+        </p:txBody>
       </p:sp>
       <p:pic>
         <p:nvPicPr>
-          <p:cNvPr id="14" name="Image 3" descr="preencoded.png">    </p:cNvPr>
+          <p:cNvPr id="10" name="Image 2" descr="preencoded.png"/>
           <p:cNvPicPr>
             <a:picLocks noChangeAspect="1"/>
           </p:cNvPicPr>
@@ -3238,7 +2641,7 @@
         </p:blipFill>
         <p:spPr>
           <a:xfrm>
-            <a:off x="676290" y="3309762"/>
+            <a:off x="676290" y="2806842"/>
             <a:ext cx="201900" cy="201900"/>
           </a:xfrm>
           <a:prstGeom prst="rect">
@@ -3248,13 +2651,13 @@
       </p:pic>
       <p:sp>
         <p:nvSpPr>
-          <p:cNvPr id="15" name="Text 9"/>
-          <p:cNvSpPr/>
-          <p:nvPr/>
-        </p:nvSpPr>
-        <p:spPr>
-          <a:xfrm>
-            <a:off x="1133856" y="3163824"/>
+          <p:cNvPr id="11" name="Text 6"/>
+          <p:cNvSpPr/>
+          <p:nvPr/>
+        </p:nvSpPr>
+        <p:spPr>
+          <a:xfrm>
+            <a:off x="1133856" y="2660904"/>
             <a:ext cx="4206240" cy="292608"/>
           </a:xfrm>
           <a:prstGeom prst="rect">
@@ -3267,7 +2670,7 @@
           <a:bodyPr wrap="square" lIns="0" tIns="0" rIns="0" bIns="0" rtlCol="0" anchor="ctr"/>
           <a:lstStyle/>
           <a:p>
-            <a:pPr indent="0" marL="0">
+            <a:pPr marL="0" indent="0">
               <a:buNone/>
             </a:pPr>
             <a:r>
@@ -3279,7 +2682,7 @@
                 <a:ea typeface="Inter" pitchFamily="34" charset="-122"/>
                 <a:cs typeface="Inter" pitchFamily="34" charset="-120"/>
               </a:rPr>
-              <a:t>Standard middleware</a:t>
+              <a:t>One interface, many providers</a:t>
             </a:r>
             <a:endParaRPr lang="en-US" sz="1400" dirty="0"/>
           </a:p>
@@ -3287,13 +2690,13 @@
       </p:sp>
       <p:sp>
         <p:nvSpPr>
-          <p:cNvPr id="16" name="Text 10"/>
-          <p:cNvSpPr/>
-          <p:nvPr/>
-        </p:nvSpPr>
-        <p:spPr>
-          <a:xfrm>
-            <a:off x="5303520" y="3163824"/>
+          <p:cNvPr id="12" name="Text 7"/>
+          <p:cNvSpPr/>
+          <p:nvPr/>
+        </p:nvSpPr>
+        <p:spPr>
+          <a:xfrm>
+            <a:off x="5303520" y="2660904"/>
             <a:ext cx="3200400" cy="292608"/>
           </a:xfrm>
           <a:prstGeom prst="rect">
@@ -3306,7 +2709,7 @@
           <a:bodyPr wrap="square" lIns="0" tIns="0" rIns="0" bIns="0" rtlCol="0" anchor="ctr"/>
           <a:lstStyle/>
           <a:p>
-            <a:pPr indent="0" marL="0">
+            <a:pPr marL="0" indent="0">
               <a:buNone/>
             </a:pPr>
             <a:r>
@@ -3318,7 +2721,7 @@
                 <a:ea typeface="Inter" pitchFamily="34" charset="-122"/>
                 <a:cs typeface="Inter" pitchFamily="34" charset="-120"/>
               </a:rPr>
-              <a:t>Logging, telemetry, function-calling</a:t>
+              <a:t>Swap Anthropic, OpenAI, Azure, local</a:t>
             </a:r>
             <a:endParaRPr lang="en-US" sz="1150" dirty="0"/>
           </a:p>
@@ -3326,13 +2729,13 @@
       </p:sp>
       <p:sp>
         <p:nvSpPr>
-          <p:cNvPr id="17" name="Shape 11"/>
-          <p:cNvSpPr/>
-          <p:nvPr/>
-        </p:nvSpPr>
-        <p:spPr>
-          <a:xfrm>
-            <a:off x="566928" y="3703320"/>
+          <p:cNvPr id="13" name="Shape 8"/>
+          <p:cNvSpPr/>
+          <p:nvPr/>
+        </p:nvSpPr>
+        <p:spPr>
+          <a:xfrm>
+            <a:off x="566928" y="3200400"/>
             <a:ext cx="420624" cy="420624"/>
           </a:xfrm>
           <a:prstGeom prst="ellipse">
@@ -3343,10 +2746,17 @@
           </a:solidFill>
           <a:ln/>
         </p:spPr>
+        <p:txBody>
+          <a:bodyPr/>
+          <a:lstStyle/>
+          <a:p>
+            <a:endParaRPr lang="en-US"/>
+          </a:p>
+        </p:txBody>
       </p:sp>
       <p:pic>
         <p:nvPicPr>
-          <p:cNvPr id="18" name="Image 4" descr="preencoded.png">    </p:cNvPr>
+          <p:cNvPr id="14" name="Image 3" descr="preencoded.png"/>
           <p:cNvPicPr>
             <a:picLocks noChangeAspect="1"/>
           </p:cNvPicPr>
@@ -3360,6 +2770,135 @@
         </p:blipFill>
         <p:spPr>
           <a:xfrm>
+            <a:off x="676290" y="3309762"/>
+            <a:ext cx="201900" cy="201900"/>
+          </a:xfrm>
+          <a:prstGeom prst="rect">
+            <a:avLst/>
+          </a:prstGeom>
+        </p:spPr>
+      </p:pic>
+      <p:sp>
+        <p:nvSpPr>
+          <p:cNvPr id="15" name="Text 9"/>
+          <p:cNvSpPr/>
+          <p:nvPr/>
+        </p:nvSpPr>
+        <p:spPr>
+          <a:xfrm>
+            <a:off x="1133856" y="3163824"/>
+            <a:ext cx="4206240" cy="292608"/>
+          </a:xfrm>
+          <a:prstGeom prst="rect">
+            <a:avLst/>
+          </a:prstGeom>
+          <a:noFill/>
+          <a:ln/>
+        </p:spPr>
+        <p:txBody>
+          <a:bodyPr wrap="square" lIns="0" tIns="0" rIns="0" bIns="0" rtlCol="0" anchor="ctr"/>
+          <a:lstStyle/>
+          <a:p>
+            <a:pPr marL="0" indent="0">
+              <a:buNone/>
+            </a:pPr>
+            <a:r>
+              <a:rPr lang="en-US" sz="1400" b="1" dirty="0">
+                <a:solidFill>
+                  <a:srgbClr val="141413"/>
+                </a:solidFill>
+                <a:latin typeface="Inter" pitchFamily="34" charset="0"/>
+                <a:ea typeface="Inter" pitchFamily="34" charset="-122"/>
+                <a:cs typeface="Inter" pitchFamily="34" charset="-120"/>
+              </a:rPr>
+              <a:t>Standard middleware</a:t>
+            </a:r>
+            <a:endParaRPr lang="en-US" sz="1400" dirty="0"/>
+          </a:p>
+        </p:txBody>
+      </p:sp>
+      <p:sp>
+        <p:nvSpPr>
+          <p:cNvPr id="16" name="Text 10"/>
+          <p:cNvSpPr/>
+          <p:nvPr/>
+        </p:nvSpPr>
+        <p:spPr>
+          <a:xfrm>
+            <a:off x="5303520" y="3163824"/>
+            <a:ext cx="3200400" cy="292608"/>
+          </a:xfrm>
+          <a:prstGeom prst="rect">
+            <a:avLst/>
+          </a:prstGeom>
+          <a:noFill/>
+          <a:ln/>
+        </p:spPr>
+        <p:txBody>
+          <a:bodyPr wrap="square" lIns="0" tIns="0" rIns="0" bIns="0" rtlCol="0" anchor="ctr"/>
+          <a:lstStyle/>
+          <a:p>
+            <a:pPr marL="0" indent="0">
+              <a:buNone/>
+            </a:pPr>
+            <a:r>
+              <a:rPr lang="en-US" sz="1150" dirty="0">
+                <a:solidFill>
+                  <a:srgbClr val="615C52"/>
+                </a:solidFill>
+                <a:latin typeface="Inter" pitchFamily="34" charset="0"/>
+                <a:ea typeface="Inter" pitchFamily="34" charset="-122"/>
+                <a:cs typeface="Inter" pitchFamily="34" charset="-120"/>
+              </a:rPr>
+              <a:t>Logging, telemetry, function-calling</a:t>
+            </a:r>
+            <a:endParaRPr lang="en-US" sz="1150" dirty="0"/>
+          </a:p>
+        </p:txBody>
+      </p:sp>
+      <p:sp>
+        <p:nvSpPr>
+          <p:cNvPr id="17" name="Shape 11"/>
+          <p:cNvSpPr/>
+          <p:nvPr/>
+        </p:nvSpPr>
+        <p:spPr>
+          <a:xfrm>
+            <a:off x="566928" y="3703320"/>
+            <a:ext cx="420624" cy="420624"/>
+          </a:xfrm>
+          <a:prstGeom prst="ellipse">
+            <a:avLst/>
+          </a:prstGeom>
+          <a:solidFill>
+            <a:srgbClr val="D97757"/>
+          </a:solidFill>
+          <a:ln/>
+        </p:spPr>
+        <p:txBody>
+          <a:bodyPr/>
+          <a:lstStyle/>
+          <a:p>
+            <a:endParaRPr lang="en-US"/>
+          </a:p>
+        </p:txBody>
+      </p:sp>
+      <p:pic>
+        <p:nvPicPr>
+          <p:cNvPr id="18" name="Image 4" descr="preencoded.png"/>
+          <p:cNvPicPr>
+            <a:picLocks noChangeAspect="1"/>
+          </p:cNvPicPr>
+          <p:nvPr/>
+        </p:nvPicPr>
+        <p:blipFill>
+          <a:blip r:embed="rId6"/>
+          <a:stretch>
+            <a:fillRect/>
+          </a:stretch>
+        </p:blipFill>
+        <p:spPr>
+          <a:xfrm>
             <a:off x="676290" y="3812682"/>
             <a:ext cx="201900" cy="201900"/>
           </a:xfrm>
@@ -3389,7 +2928,7 @@
           <a:bodyPr wrap="square" lIns="0" tIns="0" rIns="0" bIns="0" rtlCol="0" anchor="ctr"/>
           <a:lstStyle/>
           <a:p>
-            <a:pPr indent="0" marL="0">
+            <a:pPr marL="0" indent="0">
               <a:buNone/>
             </a:pPr>
             <a:r>
@@ -3428,7 +2967,7 @@
           <a:bodyPr wrap="square" lIns="0" tIns="0" rIns="0" bIns="0" rtlCol="0" anchor="ctr"/>
           <a:lstStyle/>
           <a:p>
-            <a:pPr indent="0" marL="0">
+            <a:pPr marL="0" indent="0">
               <a:buNone/>
             </a:pPr>
             <a:r>
@@ -3467,7 +3006,7 @@
           <a:bodyPr wrap="square" rtlCol="0" anchor="ctr"/>
           <a:lstStyle/>
           <a:p>
-            <a:pPr indent="0" marL="0">
+            <a:pPr marL="0" indent="0">
               <a:buNone/>
             </a:pPr>
             <a:r>
@@ -3506,7 +3045,7 @@
           <a:bodyPr wrap="square" rtlCol="0" anchor="ctr"/>
           <a:lstStyle/>
           <a:p>
-            <a:pPr algn="r" indent="0" marL="0">
+            <a:pPr marL="0" indent="0" algn="r">
               <a:buNone/>
             </a:pPr>
             <a:r>
@@ -3521,45 +3060,6 @@
               <a:t>Day 2 · Section 1  ·  12/13</a:t>
             </a:r>
             <a:endParaRPr lang="en-US" sz="900" dirty="0"/>
-          </a:p>
-        </p:txBody>
-      </p:sp>
-      <p:sp>
-        <p:nvSpPr>
-          <p:cNvPr id="23" name="Text 16"/>
-          <p:cNvSpPr/>
-          <p:nvPr/>
-        </p:nvSpPr>
-        <p:spPr>
-          <a:xfrm>
-            <a:off x="548640" y="4462272"/>
-            <a:ext cx="8046720" cy="274320"/>
-          </a:xfrm>
-          <a:prstGeom prst="rect">
-            <a:avLst/>
-          </a:prstGeom>
-          <a:noFill/>
-          <a:ln/>
-        </p:spPr>
-        <p:txBody>
-          <a:bodyPr wrap="square" lIns="0" tIns="0" rIns="0" bIns="0" rtlCol="0" anchor="ctr"/>
-          <a:lstStyle/>
-          <a:p>
-            <a:pPr indent="0" marL="0">
-              <a:buNone/>
-            </a:pPr>
-            <a:r>
-              <a:rPr lang="en-US" sz="1000" i="1" dirty="0">
-                <a:solidFill>
-                  <a:srgbClr val="615C52"/>
-                </a:solidFill>
-                <a:latin typeface="Inter" pitchFamily="34" charset="0"/>
-                <a:ea typeface="Inter" pitchFamily="34" charset="-122"/>
-                <a:cs typeface="Inter" pitchFamily="34" charset="-120"/>
-              </a:rPr>
-              <a:t>▸ IChatClient gives portability; the raw SDK gives full control — know both.</a:t>
-            </a:r>
-            <a:endParaRPr lang="en-US" sz="1000" dirty="0"/>
           </a:p>
         </p:txBody>
       </p:sp>
@@ -3579,6 +3079,7 @@
         <a:solidFill>
           <a:srgbClr val="F0EEE6"/>
         </a:solidFill>
+        <a:effectLst/>
       </p:bgPr>
     </p:bg>
     <p:spTree>
@@ -3597,60 +3098,7 @@
       </p:grpSpPr>
       <p:pic>
         <p:nvPicPr>
-          <p:cNvPr id="2" name="Image 0" descr="preencoded.png">    </p:cNvPr>
-          <p:cNvPicPr>
-            <a:picLocks noChangeAspect="1"/>
-          </p:cNvPicPr>
-          <p:nvPr/>
-        </p:nvPicPr>
-        <p:blipFill>
-          <a:blip r:embed="rId1"/>
-          <a:stretch>
-            <a:fillRect/>
-          </a:stretch>
-        </p:blipFill>
-        <p:spPr>
-          <a:xfrm>
-            <a:off x="8302752" y="402336"/>
-            <a:ext cx="365760" cy="310896"/>
-          </a:xfrm>
-          <a:prstGeom prst="rect">
-            <a:avLst/>
-          </a:prstGeom>
-        </p:spPr>
-      </p:pic>
-      <p:sp>
-        <p:nvSpPr>
-          <p:cNvPr id="3" name="Shape 0"/>
-          <p:cNvSpPr/>
-          <p:nvPr/>
-        </p:nvSpPr>
-        <p:spPr>
-          <a:xfrm>
-            <a:off x="548640" y="822960"/>
-            <a:ext cx="3154680" cy="3429000"/>
-          </a:xfrm>
-          <a:prstGeom prst="roundRect">
-            <a:avLst>
-              <a:gd name="adj" fmla="val 3478"/>
-            </a:avLst>
-          </a:prstGeom>
-          <a:solidFill>
-            <a:srgbClr val="D97757"/>
-          </a:solidFill>
-          <a:ln/>
-          <a:effectLst>
-            <a:outerShdw sx="100000" sy="100000" kx="0" ky="0" algn="bl" rotWithShape="0" blurRad="88900" dist="38100" dir="5400000">
-              <a:srgbClr val="000000">
-                <a:alpha val="10000"/>
-              </a:srgbClr>
-            </a:outerShdw>
-          </a:effectLst>
-        </p:spPr>
-      </p:sp>
-      <p:pic>
-        <p:nvPicPr>
-          <p:cNvPr id="4" name="Image 1" descr="preencoded.png">    </p:cNvPr>
+          <p:cNvPr id="2" name="Image 0" descr="preencoded.png"/>
           <p:cNvPicPr>
             <a:picLocks noChangeAspect="1"/>
           </p:cNvPicPr>
@@ -3664,6 +3112,66 @@
         </p:blipFill>
         <p:spPr>
           <a:xfrm>
+            <a:off x="8302752" y="402336"/>
+            <a:ext cx="365760" cy="310896"/>
+          </a:xfrm>
+          <a:prstGeom prst="rect">
+            <a:avLst/>
+          </a:prstGeom>
+        </p:spPr>
+      </p:pic>
+      <p:sp>
+        <p:nvSpPr>
+          <p:cNvPr id="3" name="Shape 0"/>
+          <p:cNvSpPr/>
+          <p:nvPr/>
+        </p:nvSpPr>
+        <p:spPr>
+          <a:xfrm>
+            <a:off x="548640" y="822960"/>
+            <a:ext cx="3154680" cy="3429000"/>
+          </a:xfrm>
+          <a:prstGeom prst="roundRect">
+            <a:avLst>
+              <a:gd name="adj" fmla="val 3478"/>
+            </a:avLst>
+          </a:prstGeom>
+          <a:solidFill>
+            <a:srgbClr val="D97757"/>
+          </a:solidFill>
+          <a:ln/>
+          <a:effectLst>
+            <a:outerShdw blurRad="88900" dist="38100" dir="5400000" algn="bl" rotWithShape="0">
+              <a:srgbClr val="000000">
+                <a:alpha val="10000"/>
+              </a:srgbClr>
+            </a:outerShdw>
+          </a:effectLst>
+        </p:spPr>
+        <p:txBody>
+          <a:bodyPr/>
+          <a:lstStyle/>
+          <a:p>
+            <a:endParaRPr lang="en-US"/>
+          </a:p>
+        </p:txBody>
+      </p:sp>
+      <p:pic>
+        <p:nvPicPr>
+          <p:cNvPr id="4" name="Image 1" descr="preencoded.png"/>
+          <p:cNvPicPr>
+            <a:picLocks noChangeAspect="1"/>
+          </p:cNvPicPr>
+          <p:nvPr/>
+        </p:nvPicPr>
+        <p:blipFill>
+          <a:blip r:embed="rId3"/>
+          <a:stretch>
+            <a:fillRect/>
+          </a:stretch>
+        </p:blipFill>
+        <p:spPr>
+          <a:xfrm>
             <a:off x="868680" y="1133856"/>
             <a:ext cx="548640" cy="548640"/>
           </a:xfrm>
@@ -3693,7 +3201,7 @@
           <a:bodyPr wrap="square" lIns="0" tIns="0" rIns="0" bIns="0" rtlCol="0" anchor="ctr"/>
           <a:lstStyle/>
           <a:p>
-            <a:pPr indent="0" marL="0">
+            <a:pPr marL="0" indent="0">
               <a:buNone/>
             </a:pPr>
             <a:r>
@@ -3732,7 +3240,7 @@
           <a:bodyPr wrap="square" lIns="0" tIns="0" rIns="0" bIns="0" rtlCol="0" anchor="ctr"/>
           <a:lstStyle/>
           <a:p>
-            <a:pPr indent="0" marL="0">
+            <a:pPr marL="0" indent="0">
               <a:buNone/>
             </a:pPr>
             <a:r>
@@ -3772,6 +3280,13 @@
             <a:prstDash val="solid"/>
           </a:ln>
         </p:spPr>
+        <p:txBody>
+          <a:bodyPr/>
+          <a:lstStyle/>
+          <a:p>
+            <a:endParaRPr lang="en-US"/>
+          </a:p>
+        </p:txBody>
       </p:sp>
       <p:sp>
         <p:nvSpPr>
@@ -3794,11 +3309,11 @@
           <a:bodyPr wrap="square" lIns="0" tIns="0" rIns="0" bIns="0" rtlCol="0" anchor="ctr"/>
           <a:lstStyle/>
           <a:p>
-            <a:pPr indent="0" marL="0">
-              <a:buNone/>
-            </a:pPr>
-            <a:r>
-              <a:rPr lang="en-US" sz="1100" b="1" spc="100" kern="0" dirty="0">
+            <a:pPr marL="0" indent="0">
+              <a:buNone/>
+            </a:pPr>
+            <a:r>
+              <a:rPr lang="en-US" sz="1100" b="1" kern="0" spc="100" dirty="0">
                 <a:solidFill>
                   <a:srgbClr val="FBE9E2"/>
                 </a:solidFill>
@@ -3833,7 +3348,7 @@
           <a:bodyPr wrap="square" lIns="0" tIns="0" rIns="0" bIns="0" rtlCol="0" anchor="ctr"/>
           <a:lstStyle/>
           <a:p>
-            <a:pPr indent="0" marL="0">
+            <a:pPr marL="0" indent="0">
               <a:buNone/>
             </a:pPr>
             <a:r>
@@ -3872,11 +3387,11 @@
           <a:bodyPr wrap="square" lIns="0" tIns="0" rIns="0" bIns="0" rtlCol="0" anchor="ctr"/>
           <a:lstStyle/>
           <a:p>
-            <a:pPr indent="0" marL="0">
-              <a:buNone/>
-            </a:pPr>
-            <a:r>
-              <a:rPr lang="en-US" sz="1100" b="1" spc="200" kern="0" dirty="0">
+            <a:pPr marL="0" indent="0">
+              <a:buNone/>
+            </a:pPr>
+            <a:r>
+              <a:rPr lang="en-US" sz="1100" b="1" kern="0" spc="200" dirty="0">
                 <a:solidFill>
                   <a:srgbClr val="C25E40"/>
                 </a:solidFill>
@@ -3909,6 +3424,13 @@
           </a:solidFill>
           <a:ln/>
         </p:spPr>
+        <p:txBody>
+          <a:bodyPr/>
+          <a:lstStyle/>
+          <a:p>
+            <a:endParaRPr lang="en-US"/>
+          </a:p>
+        </p:txBody>
       </p:sp>
       <p:sp>
         <p:nvSpPr>
@@ -3931,7 +3453,7 @@
           <a:bodyPr wrap="square" lIns="0" tIns="0" rIns="0" bIns="0" rtlCol="0" anchor="ctr"/>
           <a:lstStyle/>
           <a:p>
-            <a:pPr algn="ctr" indent="0" marL="0">
+            <a:pPr marL="0" indent="0" algn="ctr">
               <a:buNone/>
             </a:pPr>
             <a:r>
@@ -3970,7 +3492,7 @@
           <a:bodyPr wrap="square" lIns="0" tIns="0" rIns="0" bIns="0" rtlCol="0" anchor="ctr"/>
           <a:lstStyle/>
           <a:p>
-            <a:pPr indent="0" marL="0">
+            <a:pPr marL="0" indent="0">
               <a:buNone/>
             </a:pPr>
             <a:r>
@@ -4007,6 +3529,13 @@
           </a:solidFill>
           <a:ln/>
         </p:spPr>
+        <p:txBody>
+          <a:bodyPr/>
+          <a:lstStyle/>
+          <a:p>
+            <a:endParaRPr lang="en-US"/>
+          </a:p>
+        </p:txBody>
       </p:sp>
       <p:sp>
         <p:nvSpPr>
@@ -4029,7 +3558,7 @@
           <a:bodyPr wrap="square" lIns="0" tIns="0" rIns="0" bIns="0" rtlCol="0" anchor="ctr"/>
           <a:lstStyle/>
           <a:p>
-            <a:pPr algn="ctr" indent="0" marL="0">
+            <a:pPr marL="0" indent="0" algn="ctr">
               <a:buNone/>
             </a:pPr>
             <a:r>
@@ -4068,7 +3597,7 @@
           <a:bodyPr wrap="square" lIns="0" tIns="0" rIns="0" bIns="0" rtlCol="0" anchor="ctr"/>
           <a:lstStyle/>
           <a:p>
-            <a:pPr indent="0" marL="0">
+            <a:pPr marL="0" indent="0">
               <a:buNone/>
             </a:pPr>
             <a:r>
@@ -4105,6 +3634,13 @@
           </a:solidFill>
           <a:ln/>
         </p:spPr>
+        <p:txBody>
+          <a:bodyPr/>
+          <a:lstStyle/>
+          <a:p>
+            <a:endParaRPr lang="en-US"/>
+          </a:p>
+        </p:txBody>
       </p:sp>
       <p:sp>
         <p:nvSpPr>
@@ -4127,7 +3663,7 @@
           <a:bodyPr wrap="square" lIns="0" tIns="0" rIns="0" bIns="0" rtlCol="0" anchor="ctr"/>
           <a:lstStyle/>
           <a:p>
-            <a:pPr algn="ctr" indent="0" marL="0">
+            <a:pPr marL="0" indent="0" algn="ctr">
               <a:buNone/>
             </a:pPr>
             <a:r>
@@ -4166,7 +3702,7 @@
           <a:bodyPr wrap="square" lIns="0" tIns="0" rIns="0" bIns="0" rtlCol="0" anchor="ctr"/>
           <a:lstStyle/>
           <a:p>
-            <a:pPr indent="0" marL="0">
+            <a:pPr marL="0" indent="0">
               <a:buNone/>
             </a:pPr>
             <a:r>
@@ -4210,6 +3746,13 @@
             <a:prstDash val="solid"/>
           </a:ln>
         </p:spPr>
+        <p:txBody>
+          <a:bodyPr/>
+          <a:lstStyle/>
+          <a:p>
+            <a:endParaRPr lang="en-US"/>
+          </a:p>
+        </p:txBody>
       </p:sp>
       <p:sp>
         <p:nvSpPr>
@@ -4232,11 +3775,11 @@
           <a:bodyPr wrap="square" lIns="0" tIns="0" rIns="0" bIns="0" rtlCol="0" anchor="ctr"/>
           <a:lstStyle/>
           <a:p>
-            <a:pPr indent="0" marL="0">
-              <a:buNone/>
-            </a:pPr>
-            <a:r>
-              <a:rPr lang="en-US" sz="1050" b="1" spc="100" kern="0" dirty="0">
+            <a:pPr marL="0" indent="0">
+              <a:buNone/>
+            </a:pPr>
+            <a:r>
+              <a:rPr lang="en-US" sz="1050" b="1" kern="0" spc="100" dirty="0">
                 <a:solidFill>
                   <a:srgbClr val="615C52"/>
                 </a:solidFill>
@@ -4252,70 +3795,7 @@
       </p:sp>
       <p:pic>
         <p:nvPicPr>
-          <p:cNvPr id="22" name="Image 2" descr="preencoded.png">    </p:cNvPr>
-          <p:cNvPicPr>
-            <a:picLocks noChangeAspect="1"/>
-          </p:cNvPicPr>
-          <p:nvPr/>
-        </p:nvPicPr>
-        <p:blipFill>
-          <a:blip r:embed="rId3"/>
-          <a:stretch>
-            <a:fillRect/>
-          </a:stretch>
-        </p:blipFill>
-        <p:spPr>
-          <a:xfrm>
-            <a:off x="4297680" y="2898648"/>
-            <a:ext cx="182880" cy="182880"/>
-          </a:xfrm>
-          <a:prstGeom prst="rect">
-            <a:avLst/>
-          </a:prstGeom>
-        </p:spPr>
-      </p:pic>
-      <p:sp>
-        <p:nvSpPr>
-          <p:cNvPr id="23" name="Text 18"/>
-          <p:cNvSpPr/>
-          <p:nvPr/>
-        </p:nvSpPr>
-        <p:spPr>
-          <a:xfrm>
-            <a:off x="4572000" y="2852928"/>
-            <a:ext cx="3931920" cy="256032"/>
-          </a:xfrm>
-          <a:prstGeom prst="rect">
-            <a:avLst/>
-          </a:prstGeom>
-          <a:noFill/>
-          <a:ln/>
-        </p:spPr>
-        <p:txBody>
-          <a:bodyPr wrap="square" lIns="0" tIns="0" rIns="0" bIns="0" rtlCol="0" anchor="ctr"/>
-          <a:lstStyle/>
-          <a:p>
-            <a:pPr indent="0" marL="0">
-              <a:buNone/>
-            </a:pPr>
-            <a:r>
-              <a:rPr lang="en-US" sz="1250" dirty="0">
-                <a:solidFill>
-                  <a:srgbClr val="141413"/>
-                </a:solidFill>
-                <a:latin typeface="Inter" pitchFamily="34" charset="0"/>
-                <a:ea typeface="Inter" pitchFamily="34" charset="-122"/>
-                <a:cs typeface="Inter" pitchFamily="34" charset="-120"/>
-              </a:rPr>
-              <a:t>Endpoint returns a response</a:t>
-            </a:r>
-            <a:endParaRPr lang="en-US" sz="1250" dirty="0"/>
-          </a:p>
-        </p:txBody>
-      </p:sp>
-      <p:pic>
-        <p:nvPicPr>
-          <p:cNvPr id="24" name="Image 3" descr="preencoded.png">    </p:cNvPr>
+          <p:cNvPr id="22" name="Image 2" descr="preencoded.png"/>
           <p:cNvPicPr>
             <a:picLocks noChangeAspect="1"/>
           </p:cNvPicPr>
@@ -4329,7 +3809,7 @@
         </p:blipFill>
         <p:spPr>
           <a:xfrm>
-            <a:off x="4297680" y="3182112"/>
+            <a:off x="4297680" y="2898648"/>
             <a:ext cx="182880" cy="182880"/>
           </a:xfrm>
           <a:prstGeom prst="rect">
@@ -4339,13 +3819,13 @@
       </p:pic>
       <p:sp>
         <p:nvSpPr>
-          <p:cNvPr id="25" name="Text 19"/>
-          <p:cNvSpPr/>
-          <p:nvPr/>
-        </p:nvSpPr>
-        <p:spPr>
-          <a:xfrm>
-            <a:off x="4572000" y="3136392"/>
+          <p:cNvPr id="23" name="Text 18"/>
+          <p:cNvSpPr/>
+          <p:nvPr/>
+        </p:nvSpPr>
+        <p:spPr>
+          <a:xfrm>
+            <a:off x="4572000" y="2852928"/>
             <a:ext cx="3931920" cy="256032"/>
           </a:xfrm>
           <a:prstGeom prst="rect">
@@ -4358,7 +3838,7 @@
           <a:bodyPr wrap="square" lIns="0" tIns="0" rIns="0" bIns="0" rtlCol="0" anchor="ctr"/>
           <a:lstStyle/>
           <a:p>
-            <a:pPr indent="0" marL="0">
+            <a:pPr marL="0" indent="0">
               <a:buNone/>
             </a:pPr>
             <a:r>
@@ -4370,7 +3850,7 @@
                 <a:ea typeface="Inter" pitchFamily="34" charset="-122"/>
                 <a:cs typeface="Inter" pitchFamily="34" charset="-120"/>
               </a:rPr>
-              <a:t>History persists across turns</a:t>
+              <a:t>Endpoint returns a response</a:t>
             </a:r>
             <a:endParaRPr lang="en-US" sz="1250" dirty="0"/>
           </a:p>
@@ -4378,21 +3858,21 @@
       </p:sp>
       <p:pic>
         <p:nvPicPr>
-          <p:cNvPr id="26" name="Image 4" descr="preencoded.png">    </p:cNvPr>
+          <p:cNvPr id="24" name="Image 3" descr="preencoded.png"/>
           <p:cNvPicPr>
             <a:picLocks noChangeAspect="1"/>
           </p:cNvPicPr>
           <p:nvPr/>
         </p:nvPicPr>
         <p:blipFill>
-          <a:blip r:embed="rId5"/>
+          <a:blip r:embed="rId4"/>
           <a:stretch>
             <a:fillRect/>
           </a:stretch>
         </p:blipFill>
         <p:spPr>
           <a:xfrm>
-            <a:off x="4297680" y="3465576"/>
+            <a:off x="4297680" y="3182112"/>
             <a:ext cx="182880" cy="182880"/>
           </a:xfrm>
           <a:prstGeom prst="rect">
@@ -4402,13 +3882,13 @@
       </p:pic>
       <p:sp>
         <p:nvSpPr>
-          <p:cNvPr id="27" name="Text 20"/>
-          <p:cNvSpPr/>
-          <p:nvPr/>
-        </p:nvSpPr>
-        <p:spPr>
-          <a:xfrm>
-            <a:off x="4572000" y="3419856"/>
+          <p:cNvPr id="25" name="Text 19"/>
+          <p:cNvSpPr/>
+          <p:nvPr/>
+        </p:nvSpPr>
+        <p:spPr>
+          <a:xfrm>
+            <a:off x="4572000" y="3136392"/>
             <a:ext cx="3931920" cy="256032"/>
           </a:xfrm>
           <a:prstGeom prst="rect">
@@ -4421,7 +3901,7 @@
           <a:bodyPr wrap="square" lIns="0" tIns="0" rIns="0" bIns="0" rtlCol="0" anchor="ctr"/>
           <a:lstStyle/>
           <a:p>
-            <a:pPr indent="0" marL="0">
+            <a:pPr marL="0" indent="0">
               <a:buNone/>
             </a:pPr>
             <a:r>
@@ -4433,7 +3913,7 @@
                 <a:ea typeface="Inter" pitchFamily="34" charset="-122"/>
                 <a:cs typeface="Inter" pitchFamily="34" charset="-120"/>
               </a:rPr>
-              <a:t>2nd call shows cache-read tokens</a:t>
+              <a:t>History persists across turns</a:t>
             </a:r>
             <a:endParaRPr lang="en-US" sz="1250" dirty="0"/>
           </a:p>
@@ -4441,20 +3921,83 @@
       </p:sp>
       <p:pic>
         <p:nvPicPr>
-          <p:cNvPr id="28" name="Image 5" descr="preencoded.png">    </p:cNvPr>
+          <p:cNvPr id="26" name="Image 4" descr="preencoded.png"/>
           <p:cNvPicPr>
             <a:picLocks noChangeAspect="1"/>
           </p:cNvPicPr>
           <p:nvPr/>
         </p:nvPicPr>
         <p:blipFill>
-          <a:blip r:embed="rId6"/>
+          <a:blip r:embed="rId4"/>
           <a:stretch>
             <a:fillRect/>
           </a:stretch>
         </p:blipFill>
         <p:spPr>
           <a:xfrm>
+            <a:off x="4297680" y="3465576"/>
+            <a:ext cx="182880" cy="182880"/>
+          </a:xfrm>
+          <a:prstGeom prst="rect">
+            <a:avLst/>
+          </a:prstGeom>
+        </p:spPr>
+      </p:pic>
+      <p:sp>
+        <p:nvSpPr>
+          <p:cNvPr id="27" name="Text 20"/>
+          <p:cNvSpPr/>
+          <p:nvPr/>
+        </p:nvSpPr>
+        <p:spPr>
+          <a:xfrm>
+            <a:off x="4572000" y="3419856"/>
+            <a:ext cx="3931920" cy="256032"/>
+          </a:xfrm>
+          <a:prstGeom prst="rect">
+            <a:avLst/>
+          </a:prstGeom>
+          <a:noFill/>
+          <a:ln/>
+        </p:spPr>
+        <p:txBody>
+          <a:bodyPr wrap="square" lIns="0" tIns="0" rIns="0" bIns="0" rtlCol="0" anchor="ctr"/>
+          <a:lstStyle/>
+          <a:p>
+            <a:pPr marL="0" indent="0">
+              <a:buNone/>
+            </a:pPr>
+            <a:r>
+              <a:rPr lang="en-US" sz="1250" dirty="0">
+                <a:solidFill>
+                  <a:srgbClr val="141413"/>
+                </a:solidFill>
+                <a:latin typeface="Inter" pitchFamily="34" charset="0"/>
+                <a:ea typeface="Inter" pitchFamily="34" charset="-122"/>
+                <a:cs typeface="Inter" pitchFamily="34" charset="-120"/>
+              </a:rPr>
+              <a:t>2nd call shows cache-read tokens</a:t>
+            </a:r>
+            <a:endParaRPr lang="en-US" sz="1250" dirty="0"/>
+          </a:p>
+        </p:txBody>
+      </p:sp>
+      <p:pic>
+        <p:nvPicPr>
+          <p:cNvPr id="28" name="Image 5" descr="preencoded.png"/>
+          <p:cNvPicPr>
+            <a:picLocks noChangeAspect="1"/>
+          </p:cNvPicPr>
+          <p:nvPr/>
+        </p:nvPicPr>
+        <p:blipFill>
+          <a:blip r:embed="rId4"/>
+          <a:stretch>
+            <a:fillRect/>
+          </a:stretch>
+        </p:blipFill>
+        <p:spPr>
+          <a:xfrm>
             <a:off x="4297680" y="3749040"/>
             <a:ext cx="182880" cy="182880"/>
           </a:xfrm>
@@ -4484,7 +4027,7 @@
           <a:bodyPr wrap="square" lIns="0" tIns="0" rIns="0" bIns="0" rtlCol="0" anchor="ctr"/>
           <a:lstStyle/>
           <a:p>
-            <a:pPr indent="0" marL="0">
+            <a:pPr marL="0" indent="0">
               <a:buNone/>
             </a:pPr>
             <a:r>
@@ -4523,7 +4066,7 @@
           <a:bodyPr wrap="square" rtlCol="0" anchor="ctr"/>
           <a:lstStyle/>
           <a:p>
-            <a:pPr indent="0" marL="0">
+            <a:pPr marL="0" indent="0">
               <a:buNone/>
             </a:pPr>
             <a:r>
@@ -4562,7 +4105,7 @@
           <a:bodyPr wrap="square" rtlCol="0" anchor="ctr"/>
           <a:lstStyle/>
           <a:p>
-            <a:pPr algn="r" indent="0" marL="0">
+            <a:pPr marL="0" indent="0" algn="r">
               <a:buNone/>
             </a:pPr>
             <a:r>
@@ -4577,45 +4120,6 @@
               <a:t>Day 2 · Section 1  ·  13/13</a:t>
             </a:r>
             <a:endParaRPr lang="en-US" sz="900" dirty="0"/>
-          </a:p>
-        </p:txBody>
-      </p:sp>
-      <p:sp>
-        <p:nvSpPr>
-          <p:cNvPr id="32" name="Text 24"/>
-          <p:cNvSpPr/>
-          <p:nvPr/>
-        </p:nvSpPr>
-        <p:spPr>
-          <a:xfrm>
-            <a:off x="548640" y="4462272"/>
-            <a:ext cx="8046720" cy="274320"/>
-          </a:xfrm>
-          <a:prstGeom prst="rect">
-            <a:avLst/>
-          </a:prstGeom>
-          <a:noFill/>
-          <a:ln/>
-        </p:spPr>
-        <p:txBody>
-          <a:bodyPr wrap="square" lIns="0" tIns="0" rIns="0" bIns="0" rtlCol="0" anchor="ctr"/>
-          <a:lstStyle/>
-          <a:p>
-            <a:pPr indent="0" marL="0">
-              <a:buNone/>
-            </a:pPr>
-            <a:r>
-              <a:rPr lang="en-US" sz="1000" i="1" dirty="0">
-                <a:solidFill>
-                  <a:srgbClr val="615C52"/>
-                </a:solidFill>
-                <a:latin typeface="Inter" pitchFamily="34" charset="0"/>
-                <a:ea typeface="Inter" pitchFamily="34" charset="-122"/>
-                <a:cs typeface="Inter" pitchFamily="34" charset="-120"/>
-              </a:rPr>
-              <a:t>▸ Done = a committed /api/chat with history and a visible cache-read on call two.</a:t>
-            </a:r>
-            <a:endParaRPr lang="en-US" sz="1000" dirty="0"/>
           </a:p>
         </p:txBody>
       </p:sp>
@@ -4635,6 +4139,7 @@
         <a:solidFill>
           <a:srgbClr val="F0EEE6"/>
         </a:solidFill>
+        <a:effectLst/>
       </p:bgPr>
     </p:bg>
     <p:spTree>
@@ -4672,11 +4177,11 @@
           <a:bodyPr wrap="square" lIns="0" tIns="0" rIns="0" bIns="0" rtlCol="0" anchor="ctr"/>
           <a:lstStyle/>
           <a:p>
-            <a:pPr indent="0" marL="0">
-              <a:buNone/>
-            </a:pPr>
-            <a:r>
-              <a:rPr lang="en-US" sz="1100" b="1" spc="200" kern="0" dirty="0">
+            <a:pPr marL="0" indent="0">
+              <a:buNone/>
+            </a:pPr>
+            <a:r>
+              <a:rPr lang="en-US" sz="1100" b="1" kern="0" spc="200" dirty="0">
                 <a:solidFill>
                   <a:srgbClr val="C25E40"/>
                 </a:solidFill>
@@ -4711,7 +4216,7 @@
           <a:bodyPr wrap="square" lIns="0" tIns="0" rIns="0" bIns="0" rtlCol="0" anchor="ctr"/>
           <a:lstStyle/>
           <a:p>
-            <a:pPr indent="0" marL="0">
+            <a:pPr marL="0" indent="0">
               <a:buNone/>
             </a:pPr>
             <a:r>
@@ -4731,51 +4236,7 @@
       </p:sp>
       <p:pic>
         <p:nvPicPr>
-          <p:cNvPr id="4" name="Image 0" descr="preencoded.png">    </p:cNvPr>
-          <p:cNvPicPr>
-            <a:picLocks noChangeAspect="1"/>
-          </p:cNvPicPr>
-          <p:nvPr/>
-        </p:nvPicPr>
-        <p:blipFill>
-          <a:blip r:embed="rId1"/>
-          <a:stretch>
-            <a:fillRect/>
-          </a:stretch>
-        </p:blipFill>
-        <p:spPr>
-          <a:xfrm>
-            <a:off x="8302752" y="402336"/>
-            <a:ext cx="365760" cy="310896"/>
-          </a:xfrm>
-          <a:prstGeom prst="rect">
-            <a:avLst/>
-          </a:prstGeom>
-        </p:spPr>
-      </p:pic>
-      <p:sp>
-        <p:nvSpPr>
-          <p:cNvPr id="5" name="Shape 2"/>
-          <p:cNvSpPr/>
-          <p:nvPr/>
-        </p:nvSpPr>
-        <p:spPr>
-          <a:xfrm>
-            <a:off x="566928" y="1389888"/>
-            <a:ext cx="310896" cy="310896"/>
-          </a:xfrm>
-          <a:prstGeom prst="ellipse">
-            <a:avLst/>
-          </a:prstGeom>
-          <a:solidFill>
-            <a:srgbClr val="D97757"/>
-          </a:solidFill>
-          <a:ln/>
-        </p:spPr>
-      </p:sp>
-      <p:pic>
-        <p:nvPicPr>
-          <p:cNvPr id="6" name="Image 1" descr="preencoded.png">    </p:cNvPr>
+          <p:cNvPr id="4" name="Image 0" descr="preencoded.png"/>
           <p:cNvPicPr>
             <a:picLocks noChangeAspect="1"/>
           </p:cNvPicPr>
@@ -4789,8 +4250,8 @@
         </p:blipFill>
         <p:spPr>
           <a:xfrm>
-            <a:off x="647761" y="1470721"/>
-            <a:ext cx="149230" cy="149230"/>
+            <a:off x="8302752" y="402336"/>
+            <a:ext cx="365760" cy="310896"/>
           </a:xfrm>
           <a:prstGeom prst="rect">
             <a:avLst/>
@@ -4799,52 +4260,13 @@
       </p:pic>
       <p:sp>
         <p:nvSpPr>
-          <p:cNvPr id="7" name="Text 3"/>
-          <p:cNvSpPr/>
-          <p:nvPr/>
-        </p:nvSpPr>
-        <p:spPr>
-          <a:xfrm>
-            <a:off x="1024128" y="1371600"/>
-            <a:ext cx="7406640" cy="411480"/>
-          </a:xfrm>
-          <a:prstGeom prst="rect">
-            <a:avLst/>
-          </a:prstGeom>
-          <a:noFill/>
-          <a:ln/>
-        </p:spPr>
-        <p:txBody>
-          <a:bodyPr wrap="square" lIns="0" tIns="0" rIns="0" bIns="0" rtlCol="0" anchor="ctr"/>
-          <a:lstStyle/>
-          <a:p>
-            <a:pPr indent="0" marL="0">
-              <a:buNone/>
-            </a:pPr>
-            <a:r>
-              <a:rPr lang="en-US" sz="1550" dirty="0">
-                <a:solidFill>
-                  <a:srgbClr val="141413"/>
-                </a:solidFill>
-                <a:latin typeface="Inter" pitchFamily="34" charset="0"/>
-                <a:ea typeface="Inter" pitchFamily="34" charset="-122"/>
-                <a:cs typeface="Inter" pitchFamily="34" charset="-120"/>
-              </a:rPr>
-              <a:t>Install &amp; configure the official Anthropic package</a:t>
-            </a:r>
-            <a:endParaRPr lang="en-US" sz="1550" dirty="0"/>
-          </a:p>
-        </p:txBody>
-      </p:sp>
-      <p:sp>
-        <p:nvSpPr>
-          <p:cNvPr id="8" name="Shape 4"/>
-          <p:cNvSpPr/>
-          <p:nvPr/>
-        </p:nvSpPr>
-        <p:spPr>
-          <a:xfrm>
-            <a:off x="566928" y="1801368"/>
+          <p:cNvPr id="5" name="Shape 2"/>
+          <p:cNvSpPr/>
+          <p:nvPr/>
+        </p:nvSpPr>
+        <p:spPr>
+          <a:xfrm>
+            <a:off x="566928" y="1389888"/>
             <a:ext cx="310896" cy="310896"/>
           </a:xfrm>
           <a:prstGeom prst="ellipse">
@@ -4855,10 +4277,17 @@
           </a:solidFill>
           <a:ln/>
         </p:spPr>
+        <p:txBody>
+          <a:bodyPr/>
+          <a:lstStyle/>
+          <a:p>
+            <a:endParaRPr lang="en-US"/>
+          </a:p>
+        </p:txBody>
       </p:sp>
       <p:pic>
         <p:nvPicPr>
-          <p:cNvPr id="9" name="Image 2" descr="preencoded.png">    </p:cNvPr>
+          <p:cNvPr id="6" name="Image 1" descr="preencoded.png"/>
           <p:cNvPicPr>
             <a:picLocks noChangeAspect="1"/>
           </p:cNvPicPr>
@@ -4872,7 +4301,7 @@
         </p:blipFill>
         <p:spPr>
           <a:xfrm>
-            <a:off x="647761" y="1882201"/>
+            <a:off x="647761" y="1470721"/>
             <a:ext cx="149230" cy="149230"/>
           </a:xfrm>
           <a:prstGeom prst="rect">
@@ -4882,13 +4311,13 @@
       </p:pic>
       <p:sp>
         <p:nvSpPr>
-          <p:cNvPr id="10" name="Text 5"/>
-          <p:cNvSpPr/>
-          <p:nvPr/>
-        </p:nvSpPr>
-        <p:spPr>
-          <a:xfrm>
-            <a:off x="1024128" y="1783080"/>
+          <p:cNvPr id="7" name="Text 3"/>
+          <p:cNvSpPr/>
+          <p:nvPr/>
+        </p:nvSpPr>
+        <p:spPr>
+          <a:xfrm>
+            <a:off x="1024128" y="1371600"/>
             <a:ext cx="7406640" cy="411480"/>
           </a:xfrm>
           <a:prstGeom prst="rect">
@@ -4901,7 +4330,7 @@
           <a:bodyPr wrap="square" lIns="0" tIns="0" rIns="0" bIns="0" rtlCol="0" anchor="ctr"/>
           <a:lstStyle/>
           <a:p>
-            <a:pPr indent="0" marL="0">
+            <a:pPr marL="0" indent="0">
               <a:buNone/>
             </a:pPr>
             <a:r>
@@ -4913,7 +4342,7 @@
                 <a:ea typeface="Inter" pitchFamily="34" charset="-122"/>
                 <a:cs typeface="Inter" pitchFamily="34" charset="-120"/>
               </a:rPr>
-              <a:t>Register AnthropicClient via DI (options pattern)</a:t>
+              <a:t>Install &amp; configure the official Anthropic package</a:t>
             </a:r>
             <a:endParaRPr lang="en-US" sz="1550" dirty="0"/>
           </a:p>
@@ -4921,13 +4350,13 @@
       </p:sp>
       <p:sp>
         <p:nvSpPr>
-          <p:cNvPr id="11" name="Shape 6"/>
-          <p:cNvSpPr/>
-          <p:nvPr/>
-        </p:nvSpPr>
-        <p:spPr>
-          <a:xfrm>
-            <a:off x="566928" y="2212848"/>
+          <p:cNvPr id="8" name="Shape 4"/>
+          <p:cNvSpPr/>
+          <p:nvPr/>
+        </p:nvSpPr>
+        <p:spPr>
+          <a:xfrm>
+            <a:off x="566928" y="1801368"/>
             <a:ext cx="310896" cy="310896"/>
           </a:xfrm>
           <a:prstGeom prst="ellipse">
@@ -4938,24 +4367,31 @@
           </a:solidFill>
           <a:ln/>
         </p:spPr>
+        <p:txBody>
+          <a:bodyPr/>
+          <a:lstStyle/>
+          <a:p>
+            <a:endParaRPr lang="en-US"/>
+          </a:p>
+        </p:txBody>
       </p:sp>
       <p:pic>
         <p:nvPicPr>
-          <p:cNvPr id="12" name="Image 3" descr="preencoded.png">    </p:cNvPr>
+          <p:cNvPr id="9" name="Image 2" descr="preencoded.png"/>
           <p:cNvPicPr>
             <a:picLocks noChangeAspect="1"/>
           </p:cNvPicPr>
           <p:nvPr/>
         </p:nvPicPr>
         <p:blipFill>
-          <a:blip r:embed="rId4"/>
+          <a:blip r:embed="rId3"/>
           <a:stretch>
             <a:fillRect/>
           </a:stretch>
         </p:blipFill>
         <p:spPr>
           <a:xfrm>
-            <a:off x="647761" y="2293681"/>
+            <a:off x="647761" y="1882201"/>
             <a:ext cx="149230" cy="149230"/>
           </a:xfrm>
           <a:prstGeom prst="rect">
@@ -4965,13 +4401,13 @@
       </p:pic>
       <p:sp>
         <p:nvSpPr>
-          <p:cNvPr id="13" name="Text 7"/>
-          <p:cNvSpPr/>
-          <p:nvPr/>
-        </p:nvSpPr>
-        <p:spPr>
-          <a:xfrm>
-            <a:off x="1024128" y="2194560"/>
+          <p:cNvPr id="10" name="Text 5"/>
+          <p:cNvSpPr/>
+          <p:nvPr/>
+        </p:nvSpPr>
+        <p:spPr>
+          <a:xfrm>
+            <a:off x="1024128" y="1783080"/>
             <a:ext cx="7406640" cy="411480"/>
           </a:xfrm>
           <a:prstGeom prst="rect">
@@ -4984,7 +4420,7 @@
           <a:bodyPr wrap="square" lIns="0" tIns="0" rIns="0" bIns="0" rtlCol="0" anchor="ctr"/>
           <a:lstStyle/>
           <a:p>
-            <a:pPr indent="0" marL="0">
+            <a:pPr marL="0" indent="0">
               <a:buNone/>
             </a:pPr>
             <a:r>
@@ -4996,7 +4432,7 @@
                 <a:ea typeface="Inter" pitchFamily="34" charset="-122"/>
                 <a:cs typeface="Inter" pitchFamily="34" charset="-120"/>
               </a:rPr>
-              <a:t>Make single- and multi-turn calls</a:t>
+              <a:t>Register AnthropicClient via DI (options pattern)</a:t>
             </a:r>
             <a:endParaRPr lang="en-US" sz="1550" dirty="0"/>
           </a:p>
@@ -5004,13 +4440,13 @@
       </p:sp>
       <p:sp>
         <p:nvSpPr>
-          <p:cNvPr id="14" name="Shape 8"/>
-          <p:cNvSpPr/>
-          <p:nvPr/>
-        </p:nvSpPr>
-        <p:spPr>
-          <a:xfrm>
-            <a:off x="566928" y="2624328"/>
+          <p:cNvPr id="11" name="Shape 6"/>
+          <p:cNvSpPr/>
+          <p:nvPr/>
+        </p:nvSpPr>
+        <p:spPr>
+          <a:xfrm>
+            <a:off x="566928" y="2212848"/>
             <a:ext cx="310896" cy="310896"/>
           </a:xfrm>
           <a:prstGeom prst="ellipse">
@@ -5021,24 +4457,31 @@
           </a:solidFill>
           <a:ln/>
         </p:spPr>
+        <p:txBody>
+          <a:bodyPr/>
+          <a:lstStyle/>
+          <a:p>
+            <a:endParaRPr lang="en-US"/>
+          </a:p>
+        </p:txBody>
       </p:sp>
       <p:pic>
         <p:nvPicPr>
-          <p:cNvPr id="15" name="Image 4" descr="preencoded.png">    </p:cNvPr>
+          <p:cNvPr id="12" name="Image 3" descr="preencoded.png"/>
           <p:cNvPicPr>
             <a:picLocks noChangeAspect="1"/>
           </p:cNvPicPr>
           <p:nvPr/>
         </p:nvPicPr>
         <p:blipFill>
-          <a:blip r:embed="rId5"/>
+          <a:blip r:embed="rId3"/>
           <a:stretch>
             <a:fillRect/>
           </a:stretch>
         </p:blipFill>
         <p:spPr>
           <a:xfrm>
-            <a:off x="647761" y="2705161"/>
+            <a:off x="647761" y="2293681"/>
             <a:ext cx="149230" cy="149230"/>
           </a:xfrm>
           <a:prstGeom prst="rect">
@@ -5048,13 +4491,13 @@
       </p:pic>
       <p:sp>
         <p:nvSpPr>
-          <p:cNvPr id="16" name="Text 9"/>
-          <p:cNvSpPr/>
-          <p:nvPr/>
-        </p:nvSpPr>
-        <p:spPr>
-          <a:xfrm>
-            <a:off x="1024128" y="2606040"/>
+          <p:cNvPr id="13" name="Text 7"/>
+          <p:cNvSpPr/>
+          <p:nvPr/>
+        </p:nvSpPr>
+        <p:spPr>
+          <a:xfrm>
+            <a:off x="1024128" y="2194560"/>
             <a:ext cx="7406640" cy="411480"/>
           </a:xfrm>
           <a:prstGeom prst="rect">
@@ -5067,7 +4510,7 @@
           <a:bodyPr wrap="square" lIns="0" tIns="0" rIns="0" bIns="0" rtlCol="0" anchor="ctr"/>
           <a:lstStyle/>
           <a:p>
-            <a:pPr indent="0" marL="0">
+            <a:pPr marL="0" indent="0">
               <a:buNone/>
             </a:pPr>
             <a:r>
@@ -5079,7 +4522,7 @@
                 <a:ea typeface="Inter" pitchFamily="34" charset="-122"/>
                 <a:cs typeface="Inter" pitchFamily="34" charset="-120"/>
               </a:rPr>
-              <a:t>Design a ClaudeService abstraction</a:t>
+              <a:t>Make single- and multi-turn calls</a:t>
             </a:r>
             <a:endParaRPr lang="en-US" sz="1550" dirty="0"/>
           </a:p>
@@ -5087,13 +4530,13 @@
       </p:sp>
       <p:sp>
         <p:nvSpPr>
-          <p:cNvPr id="17" name="Shape 10"/>
-          <p:cNvSpPr/>
-          <p:nvPr/>
-        </p:nvSpPr>
-        <p:spPr>
-          <a:xfrm>
-            <a:off x="566928" y="3035808"/>
+          <p:cNvPr id="14" name="Shape 8"/>
+          <p:cNvSpPr/>
+          <p:nvPr/>
+        </p:nvSpPr>
+        <p:spPr>
+          <a:xfrm>
+            <a:off x="566928" y="2624328"/>
             <a:ext cx="310896" cy="310896"/>
           </a:xfrm>
           <a:prstGeom prst="ellipse">
@@ -5104,24 +4547,31 @@
           </a:solidFill>
           <a:ln/>
         </p:spPr>
+        <p:txBody>
+          <a:bodyPr/>
+          <a:lstStyle/>
+          <a:p>
+            <a:endParaRPr lang="en-US"/>
+          </a:p>
+        </p:txBody>
       </p:sp>
       <p:pic>
         <p:nvPicPr>
-          <p:cNvPr id="18" name="Image 5" descr="preencoded.png">    </p:cNvPr>
+          <p:cNvPr id="15" name="Image 4" descr="preencoded.png"/>
           <p:cNvPicPr>
             <a:picLocks noChangeAspect="1"/>
           </p:cNvPicPr>
           <p:nvPr/>
         </p:nvPicPr>
         <p:blipFill>
-          <a:blip r:embed="rId6"/>
+          <a:blip r:embed="rId3"/>
           <a:stretch>
             <a:fillRect/>
           </a:stretch>
         </p:blipFill>
         <p:spPr>
           <a:xfrm>
-            <a:off x="647761" y="3116641"/>
+            <a:off x="647761" y="2705161"/>
             <a:ext cx="149230" cy="149230"/>
           </a:xfrm>
           <a:prstGeom prst="rect">
@@ -5131,13 +4581,13 @@
       </p:pic>
       <p:sp>
         <p:nvSpPr>
-          <p:cNvPr id="19" name="Text 11"/>
-          <p:cNvSpPr/>
-          <p:nvPr/>
-        </p:nvSpPr>
-        <p:spPr>
-          <a:xfrm>
-            <a:off x="1024128" y="3017520"/>
+          <p:cNvPr id="16" name="Text 9"/>
+          <p:cNvSpPr/>
+          <p:nvPr/>
+        </p:nvSpPr>
+        <p:spPr>
+          <a:xfrm>
+            <a:off x="1024128" y="2606040"/>
             <a:ext cx="7406640" cy="411480"/>
           </a:xfrm>
           <a:prstGeom prst="rect">
@@ -5150,7 +4600,7 @@
           <a:bodyPr wrap="square" lIns="0" tIns="0" rIns="0" bIns="0" rtlCol="0" anchor="ctr"/>
           <a:lstStyle/>
           <a:p>
-            <a:pPr indent="0" marL="0">
+            <a:pPr marL="0" indent="0">
               <a:buNone/>
             </a:pPr>
             <a:r>
@@ -5162,7 +4612,7 @@
                 <a:ea typeface="Inter" pitchFamily="34" charset="-122"/>
                 <a:cs typeface="Inter" pitchFamily="34" charset="-120"/>
               </a:rPr>
-              <a:t>Manage history with IDistributedCache</a:t>
+              <a:t>Design a ClaudeService abstraction</a:t>
             </a:r>
             <a:endParaRPr lang="en-US" sz="1550" dirty="0"/>
           </a:p>
@@ -5170,13 +4620,13 @@
       </p:sp>
       <p:sp>
         <p:nvSpPr>
-          <p:cNvPr id="20" name="Shape 12"/>
-          <p:cNvSpPr/>
-          <p:nvPr/>
-        </p:nvSpPr>
-        <p:spPr>
-          <a:xfrm>
-            <a:off x="566928" y="3447288"/>
+          <p:cNvPr id="17" name="Shape 10"/>
+          <p:cNvSpPr/>
+          <p:nvPr/>
+        </p:nvSpPr>
+        <p:spPr>
+          <a:xfrm>
+            <a:off x="566928" y="3035808"/>
             <a:ext cx="310896" cy="310896"/>
           </a:xfrm>
           <a:prstGeom prst="ellipse">
@@ -5187,24 +4637,31 @@
           </a:solidFill>
           <a:ln/>
         </p:spPr>
+        <p:txBody>
+          <a:bodyPr/>
+          <a:lstStyle/>
+          <a:p>
+            <a:endParaRPr lang="en-US"/>
+          </a:p>
+        </p:txBody>
       </p:sp>
       <p:pic>
         <p:nvPicPr>
-          <p:cNvPr id="21" name="Image 6" descr="preencoded.png">    </p:cNvPr>
+          <p:cNvPr id="18" name="Image 5" descr="preencoded.png"/>
           <p:cNvPicPr>
             <a:picLocks noChangeAspect="1"/>
           </p:cNvPicPr>
           <p:nvPr/>
         </p:nvPicPr>
         <p:blipFill>
-          <a:blip r:embed="rId7"/>
+          <a:blip r:embed="rId3"/>
           <a:stretch>
             <a:fillRect/>
           </a:stretch>
         </p:blipFill>
         <p:spPr>
           <a:xfrm>
-            <a:off x="647761" y="3528121"/>
+            <a:off x="647761" y="3116641"/>
             <a:ext cx="149230" cy="149230"/>
           </a:xfrm>
           <a:prstGeom prst="rect">
@@ -5214,13 +4671,13 @@
       </p:pic>
       <p:sp>
         <p:nvSpPr>
-          <p:cNvPr id="22" name="Text 13"/>
-          <p:cNvSpPr/>
-          <p:nvPr/>
-        </p:nvSpPr>
-        <p:spPr>
-          <a:xfrm>
-            <a:off x="1024128" y="3429000"/>
+          <p:cNvPr id="19" name="Text 11"/>
+          <p:cNvSpPr/>
+          <p:nvPr/>
+        </p:nvSpPr>
+        <p:spPr>
+          <a:xfrm>
+            <a:off x="1024128" y="3017520"/>
             <a:ext cx="7406640" cy="411480"/>
           </a:xfrm>
           <a:prstGeom prst="rect">
@@ -5233,7 +4690,7 @@
           <a:bodyPr wrap="square" lIns="0" tIns="0" rIns="0" bIns="0" rtlCol="0" anchor="ctr"/>
           <a:lstStyle/>
           <a:p>
-            <a:pPr indent="0" marL="0">
+            <a:pPr marL="0" indent="0">
               <a:buNone/>
             </a:pPr>
             <a:r>
@@ -5245,7 +4702,7 @@
                 <a:ea typeface="Inter" pitchFamily="34" charset="-122"/>
                 <a:cs typeface="Inter" pitchFamily="34" charset="-120"/>
               </a:rPr>
-              <a:t>Apply prompt caching &amp; Polly retries</a:t>
+              <a:t>Manage history with IDistributedCache</a:t>
             </a:r>
             <a:endParaRPr lang="en-US" sz="1550" dirty="0"/>
           </a:p>
@@ -5253,13 +4710,13 @@
       </p:sp>
       <p:sp>
         <p:nvSpPr>
-          <p:cNvPr id="23" name="Shape 14"/>
-          <p:cNvSpPr/>
-          <p:nvPr/>
-        </p:nvSpPr>
-        <p:spPr>
-          <a:xfrm>
-            <a:off x="566928" y="3858768"/>
+          <p:cNvPr id="20" name="Shape 12"/>
+          <p:cNvSpPr/>
+          <p:nvPr/>
+        </p:nvSpPr>
+        <p:spPr>
+          <a:xfrm>
+            <a:off x="566928" y="3447288"/>
             <a:ext cx="310896" cy="310896"/>
           </a:xfrm>
           <a:prstGeom prst="ellipse">
@@ -5270,23 +4727,120 @@
           </a:solidFill>
           <a:ln/>
         </p:spPr>
+        <p:txBody>
+          <a:bodyPr/>
+          <a:lstStyle/>
+          <a:p>
+            <a:endParaRPr lang="en-US"/>
+          </a:p>
+        </p:txBody>
       </p:sp>
       <p:pic>
         <p:nvPicPr>
-          <p:cNvPr id="24" name="Image 7" descr="preencoded.png">    </p:cNvPr>
+          <p:cNvPr id="21" name="Image 6" descr="preencoded.png"/>
           <p:cNvPicPr>
             <a:picLocks noChangeAspect="1"/>
           </p:cNvPicPr>
           <p:nvPr/>
         </p:nvPicPr>
         <p:blipFill>
-          <a:blip r:embed="rId8"/>
+          <a:blip r:embed="rId3"/>
           <a:stretch>
             <a:fillRect/>
           </a:stretch>
         </p:blipFill>
         <p:spPr>
           <a:xfrm>
+            <a:off x="647761" y="3528121"/>
+            <a:ext cx="149230" cy="149230"/>
+          </a:xfrm>
+          <a:prstGeom prst="rect">
+            <a:avLst/>
+          </a:prstGeom>
+        </p:spPr>
+      </p:pic>
+      <p:sp>
+        <p:nvSpPr>
+          <p:cNvPr id="22" name="Text 13"/>
+          <p:cNvSpPr/>
+          <p:nvPr/>
+        </p:nvSpPr>
+        <p:spPr>
+          <a:xfrm>
+            <a:off x="1024128" y="3429000"/>
+            <a:ext cx="7406640" cy="411480"/>
+          </a:xfrm>
+          <a:prstGeom prst="rect">
+            <a:avLst/>
+          </a:prstGeom>
+          <a:noFill/>
+          <a:ln/>
+        </p:spPr>
+        <p:txBody>
+          <a:bodyPr wrap="square" lIns="0" tIns="0" rIns="0" bIns="0" rtlCol="0" anchor="ctr"/>
+          <a:lstStyle/>
+          <a:p>
+            <a:pPr marL="0" indent="0">
+              <a:buNone/>
+            </a:pPr>
+            <a:r>
+              <a:rPr lang="en-US" sz="1550" dirty="0">
+                <a:solidFill>
+                  <a:srgbClr val="141413"/>
+                </a:solidFill>
+                <a:latin typeface="Inter" pitchFamily="34" charset="0"/>
+                <a:ea typeface="Inter" pitchFamily="34" charset="-122"/>
+                <a:cs typeface="Inter" pitchFamily="34" charset="-120"/>
+              </a:rPr>
+              <a:t>Apply prompt caching &amp; Polly retries</a:t>
+            </a:r>
+            <a:endParaRPr lang="en-US" sz="1550" dirty="0"/>
+          </a:p>
+        </p:txBody>
+      </p:sp>
+      <p:sp>
+        <p:nvSpPr>
+          <p:cNvPr id="23" name="Shape 14"/>
+          <p:cNvSpPr/>
+          <p:nvPr/>
+        </p:nvSpPr>
+        <p:spPr>
+          <a:xfrm>
+            <a:off x="566928" y="3858768"/>
+            <a:ext cx="310896" cy="310896"/>
+          </a:xfrm>
+          <a:prstGeom prst="ellipse">
+            <a:avLst/>
+          </a:prstGeom>
+          <a:solidFill>
+            <a:srgbClr val="D97757"/>
+          </a:solidFill>
+          <a:ln/>
+        </p:spPr>
+        <p:txBody>
+          <a:bodyPr/>
+          <a:lstStyle/>
+          <a:p>
+            <a:endParaRPr lang="en-US"/>
+          </a:p>
+        </p:txBody>
+      </p:sp>
+      <p:pic>
+        <p:nvPicPr>
+          <p:cNvPr id="24" name="Image 7" descr="preencoded.png"/>
+          <p:cNvPicPr>
+            <a:picLocks noChangeAspect="1"/>
+          </p:cNvPicPr>
+          <p:nvPr/>
+        </p:nvPicPr>
+        <p:blipFill>
+          <a:blip r:embed="rId3"/>
+          <a:stretch>
+            <a:fillRect/>
+          </a:stretch>
+        </p:blipFill>
+        <p:spPr>
+          <a:xfrm>
             <a:off x="647761" y="3939601"/>
             <a:ext cx="149230" cy="149230"/>
           </a:xfrm>
@@ -5316,7 +4870,7 @@
           <a:bodyPr wrap="square" lIns="0" tIns="0" rIns="0" bIns="0" rtlCol="0" anchor="ctr"/>
           <a:lstStyle/>
           <a:p>
-            <a:pPr indent="0" marL="0">
+            <a:pPr marL="0" indent="0">
               <a:buNone/>
             </a:pPr>
             <a:r>
@@ -5355,7 +4909,7 @@
           <a:bodyPr wrap="square" rtlCol="0" anchor="ctr"/>
           <a:lstStyle/>
           <a:p>
-            <a:pPr indent="0" marL="0">
+            <a:pPr marL="0" indent="0">
               <a:buNone/>
             </a:pPr>
             <a:r>
@@ -5394,7 +4948,7 @@
           <a:bodyPr wrap="square" rtlCol="0" anchor="ctr"/>
           <a:lstStyle/>
           <a:p>
-            <a:pPr algn="r" indent="0" marL="0">
+            <a:pPr marL="0" indent="0" algn="r">
               <a:buNone/>
             </a:pPr>
             <a:r>
@@ -5409,45 +4963,6 @@
               <a:t>Day 2 · Section 1  ·  2/13</a:t>
             </a:r>
             <a:endParaRPr lang="en-US" sz="900" dirty="0"/>
-          </a:p>
-        </p:txBody>
-      </p:sp>
-      <p:sp>
-        <p:nvSpPr>
-          <p:cNvPr id="28" name="Text 18"/>
-          <p:cNvSpPr/>
-          <p:nvPr/>
-        </p:nvSpPr>
-        <p:spPr>
-          <a:xfrm>
-            <a:off x="548640" y="4462272"/>
-            <a:ext cx="8046720" cy="274320"/>
-          </a:xfrm>
-          <a:prstGeom prst="rect">
-            <a:avLst/>
-          </a:prstGeom>
-          <a:noFill/>
-          <a:ln/>
-        </p:spPr>
-        <p:txBody>
-          <a:bodyPr wrap="square" lIns="0" tIns="0" rIns="0" bIns="0" rtlCol="0" anchor="ctr"/>
-          <a:lstStyle/>
-          <a:p>
-            <a:pPr indent="0" marL="0">
-              <a:buNone/>
-            </a:pPr>
-            <a:r>
-              <a:rPr lang="en-US" sz="1000" i="1" dirty="0">
-                <a:solidFill>
-                  <a:srgbClr val="615C52"/>
-                </a:solidFill>
-                <a:latin typeface="Inter" pitchFamily="34" charset="0"/>
-                <a:ea typeface="Inter" pitchFamily="34" charset="-122"/>
-                <a:cs typeface="Inter" pitchFamily="34" charset="-120"/>
-              </a:rPr>
-              <a:t>▸ Seven objectives — install, wire, abstract, optimize, then look ahead to IChatClient.</a:t>
-            </a:r>
-            <a:endParaRPr lang="en-US" sz="1000" dirty="0"/>
           </a:p>
         </p:txBody>
       </p:sp>
@@ -5467,6 +4982,7 @@
         <a:solidFill>
           <a:srgbClr val="F0EEE6"/>
         </a:solidFill>
+        <a:effectLst/>
       </p:bgPr>
     </p:bg>
     <p:spTree>
@@ -5504,11 +5020,11 @@
           <a:bodyPr wrap="square" lIns="0" tIns="0" rIns="0" bIns="0" rtlCol="0" anchor="ctr"/>
           <a:lstStyle/>
           <a:p>
-            <a:pPr indent="0" marL="0">
-              <a:buNone/>
-            </a:pPr>
-            <a:r>
-              <a:rPr lang="en-US" sz="1100" b="1" spc="200" kern="0" dirty="0">
+            <a:pPr marL="0" indent="0">
+              <a:buNone/>
+            </a:pPr>
+            <a:r>
+              <a:rPr lang="en-US" sz="1100" b="1" kern="0" spc="200" dirty="0">
                 <a:solidFill>
                   <a:srgbClr val="C25E40"/>
                 </a:solidFill>
@@ -5543,7 +5059,7 @@
           <a:bodyPr wrap="square" lIns="0" tIns="0" rIns="0" bIns="0" rtlCol="0" anchor="ctr"/>
           <a:lstStyle/>
           <a:p>
-            <a:pPr indent="0" marL="0">
+            <a:pPr marL="0" indent="0">
               <a:buNone/>
             </a:pPr>
             <a:r>
@@ -5563,80 +5079,7 @@
       </p:sp>
       <p:pic>
         <p:nvPicPr>
-          <p:cNvPr id="4" name="Image 0" descr="preencoded.png">    </p:cNvPr>
-          <p:cNvPicPr>
-            <a:picLocks noChangeAspect="1"/>
-          </p:cNvPicPr>
-          <p:nvPr/>
-        </p:nvPicPr>
-        <p:blipFill>
-          <a:blip r:embed="rId1"/>
-          <a:stretch>
-            <a:fillRect/>
-          </a:stretch>
-        </p:blipFill>
-        <p:spPr>
-          <a:xfrm>
-            <a:off x="8302752" y="402336"/>
-            <a:ext cx="365760" cy="310896"/>
-          </a:xfrm>
-          <a:prstGeom prst="rect">
-            <a:avLst/>
-          </a:prstGeom>
-        </p:spPr>
-      </p:pic>
-      <p:sp>
-        <p:nvSpPr>
-          <p:cNvPr id="5" name="Shape 2"/>
-          <p:cNvSpPr/>
-          <p:nvPr/>
-        </p:nvSpPr>
-        <p:spPr>
-          <a:xfrm>
-            <a:off x="548640" y="1417320"/>
-            <a:ext cx="8046720" cy="960120"/>
-          </a:xfrm>
-          <a:prstGeom prst="roundRect">
-            <a:avLst>
-              <a:gd name="adj" fmla="val 9524"/>
-            </a:avLst>
-          </a:prstGeom>
-          <a:solidFill>
-            <a:srgbClr val="F4E4DC"/>
-          </a:solidFill>
-          <a:ln/>
-          <a:effectLst>
-            <a:outerShdw sx="100000" sy="100000" kx="0" ky="0" algn="bl" rotWithShape="0" blurRad="88900" dist="38100" dir="5400000">
-              <a:srgbClr val="000000">
-                <a:alpha val="10000"/>
-              </a:srgbClr>
-            </a:outerShdw>
-          </a:effectLst>
-        </p:spPr>
-      </p:sp>
-      <p:sp>
-        <p:nvSpPr>
-          <p:cNvPr id="6" name="Shape 3"/>
-          <p:cNvSpPr/>
-          <p:nvPr/>
-        </p:nvSpPr>
-        <p:spPr>
-          <a:xfrm>
-            <a:off x="777240" y="1673352"/>
-            <a:ext cx="457200" cy="457200"/>
-          </a:xfrm>
-          <a:prstGeom prst="ellipse">
-            <a:avLst/>
-          </a:prstGeom>
-          <a:solidFill>
-            <a:srgbClr val="D97757"/>
-          </a:solidFill>
-          <a:ln/>
-        </p:spPr>
-      </p:sp>
-      <p:pic>
-        <p:nvPicPr>
-          <p:cNvPr id="7" name="Image 1" descr="preencoded.png">    </p:cNvPr>
+          <p:cNvPr id="4" name="Image 0" descr="preencoded.png"/>
           <p:cNvPicPr>
             <a:picLocks noChangeAspect="1"/>
           </p:cNvPicPr>
@@ -5650,6 +5093,93 @@
         </p:blipFill>
         <p:spPr>
           <a:xfrm>
+            <a:off x="8302752" y="402336"/>
+            <a:ext cx="365760" cy="310896"/>
+          </a:xfrm>
+          <a:prstGeom prst="rect">
+            <a:avLst/>
+          </a:prstGeom>
+        </p:spPr>
+      </p:pic>
+      <p:sp>
+        <p:nvSpPr>
+          <p:cNvPr id="5" name="Shape 2"/>
+          <p:cNvSpPr/>
+          <p:nvPr/>
+        </p:nvSpPr>
+        <p:spPr>
+          <a:xfrm>
+            <a:off x="548640" y="1417320"/>
+            <a:ext cx="8046720" cy="960120"/>
+          </a:xfrm>
+          <a:prstGeom prst="roundRect">
+            <a:avLst>
+              <a:gd name="adj" fmla="val 9524"/>
+            </a:avLst>
+          </a:prstGeom>
+          <a:solidFill>
+            <a:srgbClr val="F4E4DC"/>
+          </a:solidFill>
+          <a:ln/>
+          <a:effectLst>
+            <a:outerShdw blurRad="88900" dist="38100" dir="5400000" algn="bl" rotWithShape="0">
+              <a:srgbClr val="000000">
+                <a:alpha val="10000"/>
+              </a:srgbClr>
+            </a:outerShdw>
+          </a:effectLst>
+        </p:spPr>
+        <p:txBody>
+          <a:bodyPr/>
+          <a:lstStyle/>
+          <a:p>
+            <a:endParaRPr lang="en-US"/>
+          </a:p>
+        </p:txBody>
+      </p:sp>
+      <p:sp>
+        <p:nvSpPr>
+          <p:cNvPr id="6" name="Shape 3"/>
+          <p:cNvSpPr/>
+          <p:nvPr/>
+        </p:nvSpPr>
+        <p:spPr>
+          <a:xfrm>
+            <a:off x="777240" y="1673352"/>
+            <a:ext cx="457200" cy="457200"/>
+          </a:xfrm>
+          <a:prstGeom prst="ellipse">
+            <a:avLst/>
+          </a:prstGeom>
+          <a:solidFill>
+            <a:srgbClr val="D97757"/>
+          </a:solidFill>
+          <a:ln/>
+        </p:spPr>
+        <p:txBody>
+          <a:bodyPr/>
+          <a:lstStyle/>
+          <a:p>
+            <a:endParaRPr lang="en-US"/>
+          </a:p>
+        </p:txBody>
+      </p:sp>
+      <p:pic>
+        <p:nvPicPr>
+          <p:cNvPr id="7" name="Image 1" descr="preencoded.png"/>
+          <p:cNvPicPr>
+            <a:picLocks noChangeAspect="1"/>
+          </p:cNvPicPr>
+          <p:nvPr/>
+        </p:nvPicPr>
+        <p:blipFill>
+          <a:blip r:embed="rId3"/>
+          <a:stretch>
+            <a:fillRect/>
+          </a:stretch>
+        </p:blipFill>
+        <p:spPr>
+          <a:xfrm>
             <a:off x="896112" y="1792224"/>
             <a:ext cx="219456" cy="219456"/>
           </a:xfrm>
@@ -5679,7 +5209,7 @@
           <a:bodyPr wrap="square" lIns="0" tIns="0" rIns="0" bIns="0" rtlCol="0" anchor="ctr"/>
           <a:lstStyle/>
           <a:p>
-            <a:pPr indent="0" marL="0">
+            <a:pPr marL="0" indent="0">
               <a:buNone/>
             </a:pPr>
             <a:r>
@@ -5693,9 +5223,6 @@
               </a:rPr>
               <a:t>Anthropic  v12.x</a:t>
             </a:r>
-            <a:pPr indent="0" marL="0">
-              <a:buNone/>
-            </a:pPr>
             <a:r>
               <a:rPr lang="en-US" sz="1400" b="1" dirty="0">
                 <a:solidFill>
@@ -5707,13 +5234,10 @@
               </a:rPr>
               <a:t>   — official &amp; recommended</a:t>
             </a:r>
-            <a:pPr indent="0" marL="0">
-              <a:buNone/>
-            </a:pPr>
             <a:endParaRPr lang="en-US" sz="1600" dirty="0"/>
           </a:p>
           <a:p>
-            <a:pPr indent="0" marL="0">
+            <a:pPr marL="0" indent="0">
               <a:buNone/>
             </a:pPr>
             <a:r>
@@ -5757,6 +5281,13 @@
             <a:prstDash val="solid"/>
           </a:ln>
         </p:spPr>
+        <p:txBody>
+          <a:bodyPr/>
+          <a:lstStyle/>
+          <a:p>
+            <a:endParaRPr lang="en-US"/>
+          </a:p>
+        </p:txBody>
       </p:sp>
       <p:sp>
         <p:nvSpPr>
@@ -5779,7 +5310,7 @@
           <a:bodyPr wrap="square" lIns="0" tIns="0" rIns="0" bIns="0" rtlCol="0" anchor="ctr"/>
           <a:lstStyle/>
           <a:p>
-            <a:pPr indent="0" marL="0">
+            <a:pPr marL="0" indent="0">
               <a:buNone/>
             </a:pPr>
             <a:r>
@@ -5818,7 +5349,7 @@
           <a:bodyPr wrap="square" lIns="0" tIns="0" rIns="0" bIns="0" rtlCol="0" anchor="ctr"/>
           <a:lstStyle/>
           <a:p>
-            <a:pPr indent="0" marL="0">
+            <a:pPr marL="0" indent="0">
               <a:buNone/>
             </a:pPr>
             <a:r>
@@ -5857,6 +5388,13 @@
           </a:solidFill>
           <a:ln/>
         </p:spPr>
+        <p:txBody>
+          <a:bodyPr/>
+          <a:lstStyle/>
+          <a:p>
+            <a:endParaRPr lang="en-US"/>
+          </a:p>
+        </p:txBody>
       </p:sp>
       <p:sp>
         <p:nvSpPr>
@@ -5877,17 +5415,24 @@
           </a:solidFill>
           <a:ln/>
         </p:spPr>
+        <p:txBody>
+          <a:bodyPr/>
+          <a:lstStyle/>
+          <a:p>
+            <a:endParaRPr lang="en-US"/>
+          </a:p>
+        </p:txBody>
       </p:sp>
       <p:pic>
         <p:nvPicPr>
-          <p:cNvPr id="14" name="Image 2" descr="preencoded.png">    </p:cNvPr>
+          <p:cNvPr id="14" name="Image 2" descr="preencoded.png"/>
           <p:cNvPicPr>
             <a:picLocks noChangeAspect="1"/>
           </p:cNvPicPr>
           <p:nvPr/>
         </p:nvPicPr>
         <p:blipFill>
-          <a:blip r:embed="rId3"/>
+          <a:blip r:embed="rId4"/>
           <a:stretch>
             <a:fillRect/>
           </a:stretch>
@@ -5923,7 +5468,7 @@
           <a:bodyPr wrap="square" lIns="0" tIns="0" rIns="0" bIns="0" rtlCol="0" anchor="ctr"/>
           <a:lstStyle/>
           <a:p>
-            <a:pPr indent="0" marL="0">
+            <a:pPr marL="0" indent="0">
               <a:buNone/>
             </a:pPr>
             <a:r>
@@ -5937,13 +5482,10 @@
               </a:rPr>
               <a:t>tryAGI.Anthropic v3.x</a:t>
             </a:r>
-            <a:pPr indent="0" marL="0">
-              <a:buNone/>
-            </a:pPr>
             <a:endParaRPr lang="en-US" sz="1300" dirty="0"/>
           </a:p>
           <a:p>
-            <a:pPr indent="0" marL="0">
+            <a:pPr marL="0" indent="0">
               <a:buNone/>
             </a:pPr>
             <a:r>
@@ -5982,7 +5524,7 @@
           <a:bodyPr wrap="square" rtlCol="0" anchor="ctr"/>
           <a:lstStyle/>
           <a:p>
-            <a:pPr indent="0" marL="0">
+            <a:pPr marL="0" indent="0">
               <a:buNone/>
             </a:pPr>
             <a:r>
@@ -6021,7 +5563,7 @@
           <a:bodyPr wrap="square" rtlCol="0" anchor="ctr"/>
           <a:lstStyle/>
           <a:p>
-            <a:pPr algn="r" indent="0" marL="0">
+            <a:pPr marL="0" indent="0" algn="r">
               <a:buNone/>
             </a:pPr>
             <a:r>
@@ -6036,45 +5578,6 @@
               <a:t>Day 2 · Section 1  ·  3/13</a:t>
             </a:r>
             <a:endParaRPr lang="en-US" sz="900" dirty="0"/>
-          </a:p>
-        </p:txBody>
-      </p:sp>
-      <p:sp>
-        <p:nvSpPr>
-          <p:cNvPr id="18" name="Text 13"/>
-          <p:cNvSpPr/>
-          <p:nvPr/>
-        </p:nvSpPr>
-        <p:spPr>
-          <a:xfrm>
-            <a:off x="548640" y="4462272"/>
-            <a:ext cx="8046720" cy="274320"/>
-          </a:xfrm>
-          <a:prstGeom prst="rect">
-            <a:avLst/>
-          </a:prstGeom>
-          <a:noFill/>
-          <a:ln/>
-        </p:spPr>
-        <p:txBody>
-          <a:bodyPr wrap="square" lIns="0" tIns="0" rIns="0" bIns="0" rtlCol="0" anchor="ctr"/>
-          <a:lstStyle/>
-          <a:p>
-            <a:pPr indent="0" marL="0">
-              <a:buNone/>
-            </a:pPr>
-            <a:r>
-              <a:rPr lang="en-US" sz="1000" i="1" dirty="0">
-                <a:solidFill>
-                  <a:srgbClr val="615C52"/>
-                </a:solidFill>
-                <a:latin typeface="Inter" pitchFamily="34" charset="0"/>
-                <a:ea typeface="Inter" pitchFamily="34" charset="-122"/>
-                <a:cs typeface="Inter" pitchFamily="34" charset="-120"/>
-              </a:rPr>
-              <a:t>▸ Use the official v12.x; the old tryAGI v3.x is a separate, incompatible lineage.</a:t>
-            </a:r>
-            <a:endParaRPr lang="en-US" sz="1000" dirty="0"/>
           </a:p>
         </p:txBody>
       </p:sp>
@@ -6094,6 +5597,7 @@
         <a:solidFill>
           <a:srgbClr val="F0EEE6"/>
         </a:solidFill>
+        <a:effectLst/>
       </p:bgPr>
     </p:bg>
     <p:spTree>
@@ -6131,11 +5635,11 @@
           <a:bodyPr wrap="square" lIns="0" tIns="0" rIns="0" bIns="0" rtlCol="0" anchor="ctr"/>
           <a:lstStyle/>
           <a:p>
-            <a:pPr indent="0" marL="0">
-              <a:buNone/>
-            </a:pPr>
-            <a:r>
-              <a:rPr lang="en-US" sz="1100" b="1" spc="200" kern="0" dirty="0">
+            <a:pPr marL="0" indent="0">
+              <a:buNone/>
+            </a:pPr>
+            <a:r>
+              <a:rPr lang="en-US" sz="1100" b="1" kern="0" spc="200" dirty="0">
                 <a:solidFill>
                   <a:srgbClr val="C25E40"/>
                 </a:solidFill>
@@ -6170,7 +5674,7 @@
           <a:bodyPr wrap="square" lIns="0" tIns="0" rIns="0" bIns="0" rtlCol="0" anchor="ctr"/>
           <a:lstStyle/>
           <a:p>
-            <a:pPr indent="0" marL="0">
+            <a:pPr marL="0" indent="0">
               <a:buNone/>
             </a:pPr>
             <a:r>
@@ -6190,389 +5694,7 @@
       </p:sp>
       <p:pic>
         <p:nvPicPr>
-          <p:cNvPr id="4" name="Image 0" descr="preencoded.png">    </p:cNvPr>
-          <p:cNvPicPr>
-            <a:picLocks noChangeAspect="1"/>
-          </p:cNvPicPr>
-          <p:nvPr/>
-        </p:nvPicPr>
-        <p:blipFill>
-          <a:blip r:embed="rId1"/>
-          <a:stretch>
-            <a:fillRect/>
-          </a:stretch>
-        </p:blipFill>
-        <p:spPr>
-          <a:xfrm>
-            <a:off x="8302752" y="402336"/>
-            <a:ext cx="365760" cy="310896"/>
-          </a:xfrm>
-          <a:prstGeom prst="rect">
-            <a:avLst/>
-          </a:prstGeom>
-        </p:spPr>
-      </p:pic>
-      <p:sp>
-        <p:nvSpPr>
-          <p:cNvPr id="5" name="Shape 2"/>
-          <p:cNvSpPr/>
-          <p:nvPr/>
-        </p:nvSpPr>
-        <p:spPr>
-          <a:xfrm>
-            <a:off x="548640" y="1371600"/>
-            <a:ext cx="4800600" cy="2788920"/>
-          </a:xfrm>
-          <a:prstGeom prst="roundRect">
-            <a:avLst>
-              <a:gd name="adj" fmla="val 2623"/>
-            </a:avLst>
-          </a:prstGeom>
-          <a:solidFill>
-            <a:srgbClr val="1F1E1D"/>
-          </a:solidFill>
-          <a:ln/>
-          <a:effectLst>
-            <a:outerShdw sx="100000" sy="100000" kx="0" ky="0" algn="bl" rotWithShape="0" blurRad="88900" dist="38100" dir="5400000">
-              <a:srgbClr val="000000">
-                <a:alpha val="10000"/>
-              </a:srgbClr>
-            </a:outerShdw>
-          </a:effectLst>
-        </p:spPr>
-      </p:sp>
-      <p:sp>
-        <p:nvSpPr>
-          <p:cNvPr id="6" name="Text 3"/>
-          <p:cNvSpPr/>
-          <p:nvPr/>
-        </p:nvSpPr>
-        <p:spPr>
-          <a:xfrm>
-            <a:off x="822960" y="1517904"/>
-            <a:ext cx="4251960" cy="256032"/>
-          </a:xfrm>
-          <a:prstGeom prst="rect">
-            <a:avLst/>
-          </a:prstGeom>
-          <a:noFill/>
-          <a:ln/>
-        </p:spPr>
-        <p:txBody>
-          <a:bodyPr wrap="square" lIns="0" tIns="0" rIns="0" bIns="0" rtlCol="0" anchor="ctr"/>
-          <a:lstStyle/>
-          <a:p>
-            <a:pPr indent="0" marL="0">
-              <a:buNone/>
-            </a:pPr>
-            <a:r>
-              <a:rPr lang="en-US" sz="1050" b="1" spc="50" kern="0" dirty="0">
-                <a:solidFill>
-                  <a:srgbClr val="D97757"/>
-                </a:solidFill>
-                <a:latin typeface="Courier New" pitchFamily="34" charset="0"/>
-                <a:ea typeface="Courier New" pitchFamily="34" charset="-122"/>
-                <a:cs typeface="Courier New" pitchFamily="34" charset="-120"/>
-              </a:rPr>
-              <a:t>// setup</a:t>
-            </a:r>
-            <a:endParaRPr lang="en-US" sz="1050" dirty="0"/>
-          </a:p>
-        </p:txBody>
-      </p:sp>
-      <p:sp>
-        <p:nvSpPr>
-          <p:cNvPr id="7" name="Text 4"/>
-          <p:cNvSpPr/>
-          <p:nvPr/>
-        </p:nvSpPr>
-        <p:spPr>
-          <a:xfrm>
-            <a:off x="841248" y="1828800"/>
-            <a:ext cx="4251960" cy="2148840"/>
-          </a:xfrm>
-          <a:prstGeom prst="rect">
-            <a:avLst/>
-          </a:prstGeom>
-          <a:noFill/>
-          <a:ln/>
-        </p:spPr>
-        <p:txBody>
-          <a:bodyPr wrap="square" lIns="0" tIns="0" rIns="0" bIns="0" rtlCol="0" anchor="t"/>
-          <a:lstStyle/>
-          <a:p>
-            <a:pPr indent="0" marL="0">
-              <a:lnSpc>
-                <a:spcPct val="128000"/>
-              </a:lnSpc>
-              <a:buNone/>
-            </a:pPr>
-            <a:r>
-              <a:rPr lang="en-US" sz="1300" b="1" dirty="0">
-                <a:solidFill>
-                  <a:srgbClr val="D97757"/>
-                </a:solidFill>
-                <a:latin typeface="Courier New" pitchFamily="34" charset="0"/>
-                <a:ea typeface="Courier New" pitchFamily="34" charset="-122"/>
-                <a:cs typeface="Courier New" pitchFamily="34" charset="-120"/>
-              </a:rPr>
-              <a:t>$ </a:t>
-            </a:r>
-            <a:pPr indent="0" marL="0">
-              <a:lnSpc>
-                <a:spcPct val="128000"/>
-              </a:lnSpc>
-              <a:buNone/>
-            </a:pPr>
-            <a:r>
-              <a:rPr lang="en-US" sz="1300" dirty="0">
-                <a:solidFill>
-                  <a:srgbClr val="E9E5DD"/>
-                </a:solidFill>
-                <a:latin typeface="Courier New" pitchFamily="34" charset="0"/>
-                <a:ea typeface="Courier New" pitchFamily="34" charset="-122"/>
-                <a:cs typeface="Courier New" pitchFamily="34" charset="-120"/>
-              </a:rPr>
-              <a:t>dotnet add package Anthropic</a:t>
-            </a:r>
-            <a:endParaRPr lang="en-US" sz="1300" dirty="0"/>
-          </a:p>
-          <a:p>
-            <a:pPr indent="0" marL="0">
-              <a:lnSpc>
-                <a:spcPct val="128000"/>
-              </a:lnSpc>
-              <a:buNone/>
-            </a:pPr>
-            <a:r>
-              <a:rPr lang="en-US" sz="1300" b="1" dirty="0">
-                <a:solidFill>
-                  <a:srgbClr val="D97757"/>
-                </a:solidFill>
-                <a:latin typeface="Courier New" pitchFamily="34" charset="0"/>
-                <a:ea typeface="Courier New" pitchFamily="34" charset="-122"/>
-                <a:cs typeface="Courier New" pitchFamily="34" charset="-120"/>
-              </a:rPr>
-              <a:t>$ </a:t>
-            </a:r>
-            <a:pPr indent="0" marL="0">
-              <a:lnSpc>
-                <a:spcPct val="128000"/>
-              </a:lnSpc>
-              <a:buNone/>
-            </a:pPr>
-            <a:r>
-              <a:rPr lang="en-US" sz="1300" dirty="0">
-                <a:solidFill>
-                  <a:srgbClr val="E9E5DD"/>
-                </a:solidFill>
-                <a:latin typeface="Courier New" pitchFamily="34" charset="0"/>
-                <a:ea typeface="Courier New" pitchFamily="34" charset="-122"/>
-                <a:cs typeface="Courier New" pitchFamily="34" charset="-120"/>
-              </a:rPr>
-              <a:t>dotnet user-secrets set \</a:t>
-            </a:r>
-            <a:endParaRPr lang="en-US" sz="1300" dirty="0"/>
-          </a:p>
-          <a:p>
-            <a:pPr indent="0" marL="0">
-              <a:lnSpc>
-                <a:spcPct val="128000"/>
-              </a:lnSpc>
-              <a:buNone/>
-            </a:pPr>
-            <a:r>
-              <a:rPr lang="en-US" sz="1300" dirty="0">
-                <a:solidFill>
-                  <a:srgbClr val="E9E5DD"/>
-                </a:solidFill>
-                <a:latin typeface="Courier New" pitchFamily="34" charset="0"/>
-                <a:ea typeface="Courier New" pitchFamily="34" charset="-122"/>
-                <a:cs typeface="Courier New" pitchFamily="34" charset="-120"/>
-              </a:rPr>
-              <a:t>   "Anthropic:ApiKey" </a:t>
-            </a:r>
-            <a:pPr indent="0" marL="0">
-              <a:lnSpc>
-                <a:spcPct val="128000"/>
-              </a:lnSpc>
-              <a:buNone/>
-            </a:pPr>
-            <a:r>
-              <a:rPr lang="en-US" sz="1300" dirty="0">
-                <a:solidFill>
-                  <a:srgbClr val="E0A04A"/>
-                </a:solidFill>
-                <a:latin typeface="Courier New" pitchFamily="34" charset="0"/>
-                <a:ea typeface="Courier New" pitchFamily="34" charset="-122"/>
-                <a:cs typeface="Courier New" pitchFamily="34" charset="-120"/>
-              </a:rPr>
-              <a:t>"sk-ant-..."</a:t>
-            </a:r>
-            <a:endParaRPr lang="en-US" sz="1300" dirty="0"/>
-          </a:p>
-          <a:p>
-            <a:pPr indent="0" marL="0">
-              <a:lnSpc>
-                <a:spcPct val="128000"/>
-              </a:lnSpc>
-              <a:buNone/>
-            </a:pPr>
-            <a:endParaRPr lang="en-US" sz="1300" dirty="0"/>
-          </a:p>
-          <a:p>
-            <a:pPr indent="0" marL="0">
-              <a:lnSpc>
-                <a:spcPct val="128000"/>
-              </a:lnSpc>
-              <a:buNone/>
-            </a:pPr>
-            <a:r>
-              <a:rPr lang="en-US" sz="1300" dirty="0">
-                <a:solidFill>
-                  <a:srgbClr val="E9E5DD"/>
-                </a:solidFill>
-                <a:latin typeface="Courier New" pitchFamily="34" charset="0"/>
-                <a:ea typeface="Courier New" pitchFamily="34" charset="-122"/>
-                <a:cs typeface="Courier New" pitchFamily="34" charset="-120"/>
-              </a:rPr>
-              <a:t>builder.Services</a:t>
-            </a:r>
-            <a:endParaRPr lang="en-US" sz="1300" dirty="0"/>
-          </a:p>
-          <a:p>
-            <a:pPr indent="0" marL="0">
-              <a:lnSpc>
-                <a:spcPct val="128000"/>
-              </a:lnSpc>
-              <a:buNone/>
-            </a:pPr>
-            <a:r>
-              <a:rPr lang="en-US" sz="1300" dirty="0">
-                <a:solidFill>
-                  <a:srgbClr val="E9E5DD"/>
-                </a:solidFill>
-                <a:latin typeface="Courier New" pitchFamily="34" charset="0"/>
-                <a:ea typeface="Courier New" pitchFamily="34" charset="-122"/>
-                <a:cs typeface="Courier New" pitchFamily="34" charset="-120"/>
-              </a:rPr>
-              <a:t>  .Configure&lt;</a:t>
-            </a:r>
-            <a:pPr indent="0" marL="0">
-              <a:lnSpc>
-                <a:spcPct val="128000"/>
-              </a:lnSpc>
-              <a:buNone/>
-            </a:pPr>
-            <a:r>
-              <a:rPr lang="en-US" sz="1300" dirty="0">
-                <a:solidFill>
-                  <a:srgbClr val="9FC3E0"/>
-                </a:solidFill>
-                <a:latin typeface="Courier New" pitchFamily="34" charset="0"/>
-                <a:ea typeface="Courier New" pitchFamily="34" charset="-122"/>
-                <a:cs typeface="Courier New" pitchFamily="34" charset="-120"/>
-              </a:rPr>
-              <a:t>AnthropicOptions</a:t>
-            </a:r>
-            <a:pPr indent="0" marL="0">
-              <a:lnSpc>
-                <a:spcPct val="128000"/>
-              </a:lnSpc>
-              <a:buNone/>
-            </a:pPr>
-            <a:r>
-              <a:rPr lang="en-US" sz="1300" dirty="0">
-                <a:solidFill>
-                  <a:srgbClr val="E9E5DD"/>
-                </a:solidFill>
-                <a:latin typeface="Courier New" pitchFamily="34" charset="0"/>
-                <a:ea typeface="Courier New" pitchFamily="34" charset="-122"/>
-                <a:cs typeface="Courier New" pitchFamily="34" charset="-120"/>
-              </a:rPr>
-              <a:t>&gt;(</a:t>
-            </a:r>
-            <a:endParaRPr lang="en-US" sz="1300" dirty="0"/>
-          </a:p>
-          <a:p>
-            <a:pPr indent="0" marL="0">
-              <a:lnSpc>
-                <a:spcPct val="128000"/>
-              </a:lnSpc>
-              <a:buNone/>
-            </a:pPr>
-            <a:r>
-              <a:rPr lang="en-US" sz="1300" dirty="0">
-                <a:solidFill>
-                  <a:srgbClr val="E9E5DD"/>
-                </a:solidFill>
-                <a:latin typeface="Courier New" pitchFamily="34" charset="0"/>
-                <a:ea typeface="Courier New" pitchFamily="34" charset="-122"/>
-                <a:cs typeface="Courier New" pitchFamily="34" charset="-120"/>
-              </a:rPr>
-              <a:t>    config.GetSection(</a:t>
-            </a:r>
-            <a:pPr indent="0" marL="0">
-              <a:lnSpc>
-                <a:spcPct val="128000"/>
-              </a:lnSpc>
-              <a:buNone/>
-            </a:pPr>
-            <a:r>
-              <a:rPr lang="en-US" sz="1300" dirty="0">
-                <a:solidFill>
-                  <a:srgbClr val="E0A04A"/>
-                </a:solidFill>
-                <a:latin typeface="Courier New" pitchFamily="34" charset="0"/>
-                <a:ea typeface="Courier New" pitchFamily="34" charset="-122"/>
-                <a:cs typeface="Courier New" pitchFamily="34" charset="-120"/>
-              </a:rPr>
-              <a:t>"Anthropic"</a:t>
-            </a:r>
-            <a:pPr indent="0" marL="0">
-              <a:lnSpc>
-                <a:spcPct val="128000"/>
-              </a:lnSpc>
-              <a:buNone/>
-            </a:pPr>
-            <a:r>
-              <a:rPr lang="en-US" sz="1300" dirty="0">
-                <a:solidFill>
-                  <a:srgbClr val="E9E5DD"/>
-                </a:solidFill>
-                <a:latin typeface="Courier New" pitchFamily="34" charset="0"/>
-                <a:ea typeface="Courier New" pitchFamily="34" charset="-122"/>
-                <a:cs typeface="Courier New" pitchFamily="34" charset="-120"/>
-              </a:rPr>
-              <a:t>));</a:t>
-            </a:r>
-            <a:endParaRPr lang="en-US" sz="1300" dirty="0"/>
-          </a:p>
-        </p:txBody>
-      </p:sp>
-      <p:sp>
-        <p:nvSpPr>
-          <p:cNvPr id="8" name="Shape 5"/>
-          <p:cNvSpPr/>
-          <p:nvPr/>
-        </p:nvSpPr>
-        <p:spPr>
-          <a:xfrm>
-            <a:off x="5623560" y="1463040"/>
-            <a:ext cx="420624" cy="420624"/>
-          </a:xfrm>
-          <a:prstGeom prst="ellipse">
-            <a:avLst/>
-          </a:prstGeom>
-          <a:solidFill>
-            <a:srgbClr val="D97757"/>
-          </a:solidFill>
-          <a:ln/>
-        </p:spPr>
-      </p:sp>
-      <p:pic>
-        <p:nvPicPr>
-          <p:cNvPr id="9" name="Image 1" descr="preencoded.png">    </p:cNvPr>
+          <p:cNvPr id="4" name="Image 0" descr="preencoded.png"/>
           <p:cNvPicPr>
             <a:picLocks noChangeAspect="1"/>
           </p:cNvPicPr>
@@ -6586,8 +5708,8 @@
         </p:blipFill>
         <p:spPr>
           <a:xfrm>
-            <a:off x="5732922" y="1572402"/>
-            <a:ext cx="201900" cy="201900"/>
+            <a:off x="8302752" y="402336"/>
+            <a:ext cx="365760" cy="310896"/>
           </a:xfrm>
           <a:prstGeom prst="rect">
             <a:avLst/>
@@ -6596,14 +5718,50 @@
       </p:pic>
       <p:sp>
         <p:nvSpPr>
-          <p:cNvPr id="10" name="Text 6"/>
-          <p:cNvSpPr/>
-          <p:nvPr/>
-        </p:nvSpPr>
-        <p:spPr>
-          <a:xfrm>
-            <a:off x="6190488" y="1426464"/>
-            <a:ext cx="2926080" cy="292608"/>
+          <p:cNvPr id="5" name="Shape 2"/>
+          <p:cNvSpPr/>
+          <p:nvPr/>
+        </p:nvSpPr>
+        <p:spPr>
+          <a:xfrm>
+            <a:off x="548640" y="1371600"/>
+            <a:ext cx="4800600" cy="2788920"/>
+          </a:xfrm>
+          <a:prstGeom prst="roundRect">
+            <a:avLst>
+              <a:gd name="adj" fmla="val 2623"/>
+            </a:avLst>
+          </a:prstGeom>
+          <a:solidFill>
+            <a:srgbClr val="1F1E1D"/>
+          </a:solidFill>
+          <a:ln/>
+          <a:effectLst>
+            <a:outerShdw blurRad="88900" dist="38100" dir="5400000" algn="bl" rotWithShape="0">
+              <a:srgbClr val="000000">
+                <a:alpha val="10000"/>
+              </a:srgbClr>
+            </a:outerShdw>
+          </a:effectLst>
+        </p:spPr>
+        <p:txBody>
+          <a:bodyPr/>
+          <a:lstStyle/>
+          <a:p>
+            <a:endParaRPr lang="en-US"/>
+          </a:p>
+        </p:txBody>
+      </p:sp>
+      <p:sp>
+        <p:nvSpPr>
+          <p:cNvPr id="6" name="Text 3"/>
+          <p:cNvSpPr/>
+          <p:nvPr/>
+        </p:nvSpPr>
+        <p:spPr>
+          <a:xfrm>
+            <a:off x="822960" y="1517904"/>
+            <a:ext cx="4251960" cy="256032"/>
           </a:xfrm>
           <a:prstGeom prst="rect">
             <a:avLst/>
@@ -6615,72 +5773,261 @@
           <a:bodyPr wrap="square" lIns="0" tIns="0" rIns="0" bIns="0" rtlCol="0" anchor="ctr"/>
           <a:lstStyle/>
           <a:p>
-            <a:pPr indent="0" marL="0">
-              <a:buNone/>
-            </a:pPr>
-            <a:r>
-              <a:rPr lang="en-US" sz="1400" b="1" dirty="0">
-                <a:solidFill>
-                  <a:srgbClr val="141413"/>
-                </a:solidFill>
-                <a:latin typeface="Inter" pitchFamily="34" charset="0"/>
-                <a:ea typeface="Inter" pitchFamily="34" charset="-122"/>
-                <a:cs typeface="Inter" pitchFamily="34" charset="-120"/>
-              </a:rPr>
-              <a:t>Add the package</a:t>
-            </a:r>
-            <a:endParaRPr lang="en-US" sz="1400" dirty="0"/>
-          </a:p>
-        </p:txBody>
-      </p:sp>
-      <p:sp>
-        <p:nvSpPr>
-          <p:cNvPr id="11" name="Text 7"/>
-          <p:cNvSpPr/>
-          <p:nvPr/>
-        </p:nvSpPr>
-        <p:spPr>
-          <a:xfrm>
-            <a:off x="6190488" y="1709928"/>
-            <a:ext cx="2971800" cy="457200"/>
-          </a:xfrm>
-          <a:prstGeom prst="rect">
-            <a:avLst/>
-          </a:prstGeom>
-          <a:noFill/>
-          <a:ln/>
-        </p:spPr>
-        <p:txBody>
-          <a:bodyPr wrap="square" lIns="0" tIns="0" rIns="0" bIns="0" rtlCol="0" anchor="ctr"/>
-          <a:lstStyle/>
-          <a:p>
-            <a:pPr indent="0" marL="0">
-              <a:buNone/>
-            </a:pPr>
-            <a:r>
-              <a:rPr lang="en-US" sz="1150" dirty="0">
-                <a:solidFill>
-                  <a:srgbClr val="615C52"/>
-                </a:solidFill>
-                <a:latin typeface="Inter" pitchFamily="34" charset="0"/>
-                <a:ea typeface="Inter" pitchFamily="34" charset="-122"/>
-                <a:cs typeface="Inter" pitchFamily="34" charset="-120"/>
+            <a:pPr marL="0" indent="0">
+              <a:buNone/>
+            </a:pPr>
+            <a:r>
+              <a:rPr lang="en-US" sz="1050" b="1" kern="0" spc="50" dirty="0">
+                <a:solidFill>
+                  <a:srgbClr val="D97757"/>
+                </a:solidFill>
+                <a:latin typeface="Courier New" pitchFamily="34" charset="0"/>
+                <a:ea typeface="Courier New" pitchFamily="34" charset="-122"/>
+                <a:cs typeface="Courier New" pitchFamily="34" charset="-120"/>
+              </a:rPr>
+              <a:t>// setup</a:t>
+            </a:r>
+            <a:endParaRPr lang="en-US" sz="1050" dirty="0"/>
+          </a:p>
+        </p:txBody>
+      </p:sp>
+      <p:sp>
+        <p:nvSpPr>
+          <p:cNvPr id="7" name="Text 4"/>
+          <p:cNvSpPr/>
+          <p:nvPr/>
+        </p:nvSpPr>
+        <p:spPr>
+          <a:xfrm>
+            <a:off x="841248" y="1828800"/>
+            <a:ext cx="4251960" cy="2148840"/>
+          </a:xfrm>
+          <a:prstGeom prst="rect">
+            <a:avLst/>
+          </a:prstGeom>
+          <a:noFill/>
+          <a:ln/>
+        </p:spPr>
+        <p:txBody>
+          <a:bodyPr wrap="square" lIns="0" tIns="0" rIns="0" bIns="0" rtlCol="0" anchor="t"/>
+          <a:lstStyle/>
+          <a:p>
+            <a:pPr marL="0" indent="0">
+              <a:lnSpc>
+                <a:spcPct val="128000"/>
+              </a:lnSpc>
+              <a:buNone/>
+            </a:pPr>
+            <a:r>
+              <a:rPr lang="en-US" sz="1300" b="1" dirty="0">
+                <a:solidFill>
+                  <a:srgbClr val="D97757"/>
+                </a:solidFill>
+                <a:latin typeface="Courier New" pitchFamily="34" charset="0"/>
+                <a:ea typeface="Courier New" pitchFamily="34" charset="-122"/>
+                <a:cs typeface="Courier New" pitchFamily="34" charset="-120"/>
+              </a:rPr>
+              <a:t>$ </a:t>
+            </a:r>
+            <a:r>
+              <a:rPr lang="en-US" sz="1300" dirty="0">
+                <a:solidFill>
+                  <a:srgbClr val="E9E5DD"/>
+                </a:solidFill>
+                <a:latin typeface="Courier New" pitchFamily="34" charset="0"/>
+                <a:ea typeface="Courier New" pitchFamily="34" charset="-122"/>
+                <a:cs typeface="Courier New" pitchFamily="34" charset="-120"/>
               </a:rPr>
               <a:t>dotnet add package Anthropic</a:t>
             </a:r>
-            <a:endParaRPr lang="en-US" sz="1150" dirty="0"/>
-          </a:p>
-        </p:txBody>
-      </p:sp>
-      <p:sp>
-        <p:nvSpPr>
-          <p:cNvPr id="12" name="Shape 8"/>
-          <p:cNvSpPr/>
-          <p:nvPr/>
-        </p:nvSpPr>
-        <p:spPr>
-          <a:xfrm>
-            <a:off x="5623560" y="2331720"/>
+            <a:endParaRPr lang="en-US" sz="1300" dirty="0"/>
+          </a:p>
+          <a:p>
+            <a:pPr marL="0" indent="0">
+              <a:lnSpc>
+                <a:spcPct val="128000"/>
+              </a:lnSpc>
+              <a:buNone/>
+            </a:pPr>
+            <a:r>
+              <a:rPr lang="en-US" sz="1300" b="1" dirty="0">
+                <a:solidFill>
+                  <a:srgbClr val="D97757"/>
+                </a:solidFill>
+                <a:latin typeface="Courier New" pitchFamily="34" charset="0"/>
+                <a:ea typeface="Courier New" pitchFamily="34" charset="-122"/>
+                <a:cs typeface="Courier New" pitchFamily="34" charset="-120"/>
+              </a:rPr>
+              <a:t>$ </a:t>
+            </a:r>
+            <a:r>
+              <a:rPr lang="en-US" sz="1300" dirty="0">
+                <a:solidFill>
+                  <a:srgbClr val="E9E5DD"/>
+                </a:solidFill>
+                <a:latin typeface="Courier New" pitchFamily="34" charset="0"/>
+                <a:ea typeface="Courier New" pitchFamily="34" charset="-122"/>
+                <a:cs typeface="Courier New" pitchFamily="34" charset="-120"/>
+              </a:rPr>
+              <a:t>dotnet user-secrets set \</a:t>
+            </a:r>
+            <a:endParaRPr lang="en-US" sz="1300" dirty="0"/>
+          </a:p>
+          <a:p>
+            <a:pPr marL="0" indent="0">
+              <a:lnSpc>
+                <a:spcPct val="128000"/>
+              </a:lnSpc>
+              <a:buNone/>
+            </a:pPr>
+            <a:r>
+              <a:rPr lang="en-US" sz="1300" dirty="0">
+                <a:solidFill>
+                  <a:srgbClr val="E9E5DD"/>
+                </a:solidFill>
+                <a:latin typeface="Courier New" pitchFamily="34" charset="0"/>
+                <a:ea typeface="Courier New" pitchFamily="34" charset="-122"/>
+                <a:cs typeface="Courier New" pitchFamily="34" charset="-120"/>
+              </a:rPr>
+              <a:t>   "Anthropic:ApiKey" </a:t>
+            </a:r>
+            <a:r>
+              <a:rPr lang="en-US" sz="1300" dirty="0">
+                <a:solidFill>
+                  <a:srgbClr val="E0A04A"/>
+                </a:solidFill>
+                <a:latin typeface="Courier New" pitchFamily="34" charset="0"/>
+                <a:ea typeface="Courier New" pitchFamily="34" charset="-122"/>
+                <a:cs typeface="Courier New" pitchFamily="34" charset="-120"/>
+              </a:rPr>
+              <a:t>"sk-ant-..."</a:t>
+            </a:r>
+            <a:endParaRPr lang="en-US" sz="1300" dirty="0"/>
+          </a:p>
+          <a:p>
+            <a:pPr marL="0" indent="0">
+              <a:lnSpc>
+                <a:spcPct val="128000"/>
+              </a:lnSpc>
+              <a:buNone/>
+            </a:pPr>
+            <a:endParaRPr lang="en-US" sz="1300" dirty="0"/>
+          </a:p>
+          <a:p>
+            <a:pPr marL="0" indent="0">
+              <a:lnSpc>
+                <a:spcPct val="128000"/>
+              </a:lnSpc>
+              <a:buNone/>
+            </a:pPr>
+            <a:r>
+              <a:rPr lang="en-US" sz="1300" dirty="0">
+                <a:solidFill>
+                  <a:srgbClr val="E9E5DD"/>
+                </a:solidFill>
+                <a:latin typeface="Courier New" pitchFamily="34" charset="0"/>
+                <a:ea typeface="Courier New" pitchFamily="34" charset="-122"/>
+                <a:cs typeface="Courier New" pitchFamily="34" charset="-120"/>
+              </a:rPr>
+              <a:t>builder.Services</a:t>
+            </a:r>
+            <a:endParaRPr lang="en-US" sz="1300" dirty="0"/>
+          </a:p>
+          <a:p>
+            <a:pPr marL="0" indent="0">
+              <a:lnSpc>
+                <a:spcPct val="128000"/>
+              </a:lnSpc>
+              <a:buNone/>
+            </a:pPr>
+            <a:r>
+              <a:rPr lang="en-US" sz="1300" dirty="0">
+                <a:solidFill>
+                  <a:srgbClr val="E9E5DD"/>
+                </a:solidFill>
+                <a:latin typeface="Courier New" pitchFamily="34" charset="0"/>
+                <a:ea typeface="Courier New" pitchFamily="34" charset="-122"/>
+                <a:cs typeface="Courier New" pitchFamily="34" charset="-120"/>
+              </a:rPr>
+              <a:t>  .Configure&lt;</a:t>
+            </a:r>
+            <a:r>
+              <a:rPr lang="en-US" sz="1300" dirty="0">
+                <a:solidFill>
+                  <a:srgbClr val="9FC3E0"/>
+                </a:solidFill>
+                <a:latin typeface="Courier New" pitchFamily="34" charset="0"/>
+                <a:ea typeface="Courier New" pitchFamily="34" charset="-122"/>
+                <a:cs typeface="Courier New" pitchFamily="34" charset="-120"/>
+              </a:rPr>
+              <a:t>AnthropicOptions</a:t>
+            </a:r>
+            <a:r>
+              <a:rPr lang="en-US" sz="1300" dirty="0">
+                <a:solidFill>
+                  <a:srgbClr val="E9E5DD"/>
+                </a:solidFill>
+                <a:latin typeface="Courier New" pitchFamily="34" charset="0"/>
+                <a:ea typeface="Courier New" pitchFamily="34" charset="-122"/>
+                <a:cs typeface="Courier New" pitchFamily="34" charset="-120"/>
+              </a:rPr>
+              <a:t>&gt;(</a:t>
+            </a:r>
+            <a:endParaRPr lang="en-US" sz="1300" dirty="0"/>
+          </a:p>
+          <a:p>
+            <a:pPr marL="0" indent="0">
+              <a:lnSpc>
+                <a:spcPct val="128000"/>
+              </a:lnSpc>
+              <a:buNone/>
+            </a:pPr>
+            <a:r>
+              <a:rPr lang="en-US" sz="1300" dirty="0">
+                <a:solidFill>
+                  <a:srgbClr val="E9E5DD"/>
+                </a:solidFill>
+                <a:latin typeface="Courier New" pitchFamily="34" charset="0"/>
+                <a:ea typeface="Courier New" pitchFamily="34" charset="-122"/>
+                <a:cs typeface="Courier New" pitchFamily="34" charset="-120"/>
+              </a:rPr>
+              <a:t>    config.GetSection(</a:t>
+            </a:r>
+            <a:r>
+              <a:rPr lang="en-US" sz="1300" dirty="0">
+                <a:solidFill>
+                  <a:srgbClr val="E0A04A"/>
+                </a:solidFill>
+                <a:latin typeface="Courier New" pitchFamily="34" charset="0"/>
+                <a:ea typeface="Courier New" pitchFamily="34" charset="-122"/>
+                <a:cs typeface="Courier New" pitchFamily="34" charset="-120"/>
+              </a:rPr>
+              <a:t>"Anthropic"</a:t>
+            </a:r>
+            <a:r>
+              <a:rPr lang="en-US" sz="1300" dirty="0">
+                <a:solidFill>
+                  <a:srgbClr val="E9E5DD"/>
+                </a:solidFill>
+                <a:latin typeface="Courier New" pitchFamily="34" charset="0"/>
+                <a:ea typeface="Courier New" pitchFamily="34" charset="-122"/>
+                <a:cs typeface="Courier New" pitchFamily="34" charset="-120"/>
+              </a:rPr>
+              <a:t>));</a:t>
+            </a:r>
+            <a:endParaRPr lang="en-US" sz="1300" dirty="0"/>
+          </a:p>
+        </p:txBody>
+      </p:sp>
+      <p:sp>
+        <p:nvSpPr>
+          <p:cNvPr id="8" name="Shape 5"/>
+          <p:cNvSpPr/>
+          <p:nvPr/>
+        </p:nvSpPr>
+        <p:spPr>
+          <a:xfrm>
+            <a:off x="5623560" y="1463040"/>
             <a:ext cx="420624" cy="420624"/>
           </a:xfrm>
           <a:prstGeom prst="ellipse">
@@ -6691,10 +6038,17 @@
           </a:solidFill>
           <a:ln/>
         </p:spPr>
+        <p:txBody>
+          <a:bodyPr/>
+          <a:lstStyle/>
+          <a:p>
+            <a:endParaRPr lang="en-US"/>
+          </a:p>
+        </p:txBody>
       </p:sp>
       <p:pic>
         <p:nvPicPr>
-          <p:cNvPr id="13" name="Image 2" descr="preencoded.png">    </p:cNvPr>
+          <p:cNvPr id="9" name="Image 1" descr="preencoded.png"/>
           <p:cNvPicPr>
             <a:picLocks noChangeAspect="1"/>
           </p:cNvPicPr>
@@ -6708,7 +6062,7 @@
         </p:blipFill>
         <p:spPr>
           <a:xfrm>
-            <a:off x="5732922" y="2441082"/>
+            <a:off x="5732922" y="1572402"/>
             <a:ext cx="201900" cy="201900"/>
           </a:xfrm>
           <a:prstGeom prst="rect">
@@ -6718,13 +6072,13 @@
       </p:pic>
       <p:sp>
         <p:nvSpPr>
-          <p:cNvPr id="14" name="Text 9"/>
-          <p:cNvSpPr/>
-          <p:nvPr/>
-        </p:nvSpPr>
-        <p:spPr>
-          <a:xfrm>
-            <a:off x="6190488" y="2295144"/>
+          <p:cNvPr id="10" name="Text 6"/>
+          <p:cNvSpPr/>
+          <p:nvPr/>
+        </p:nvSpPr>
+        <p:spPr>
+          <a:xfrm>
+            <a:off x="6190488" y="1426464"/>
             <a:ext cx="2926080" cy="292608"/>
           </a:xfrm>
           <a:prstGeom prst="rect">
@@ -6737,7 +6091,7 @@
           <a:bodyPr wrap="square" lIns="0" tIns="0" rIns="0" bIns="0" rtlCol="0" anchor="ctr"/>
           <a:lstStyle/>
           <a:p>
-            <a:pPr indent="0" marL="0">
+            <a:pPr marL="0" indent="0">
               <a:buNone/>
             </a:pPr>
             <a:r>
@@ -6749,7 +6103,7 @@
                 <a:ea typeface="Inter" pitchFamily="34" charset="-122"/>
                 <a:cs typeface="Inter" pitchFamily="34" charset="-120"/>
               </a:rPr>
-              <a:t>Key in user-secrets</a:t>
+              <a:t>Add the package</a:t>
             </a:r>
             <a:endParaRPr lang="en-US" sz="1400" dirty="0"/>
           </a:p>
@@ -6757,13 +6111,13 @@
       </p:sp>
       <p:sp>
         <p:nvSpPr>
-          <p:cNvPr id="15" name="Text 10"/>
-          <p:cNvSpPr/>
-          <p:nvPr/>
-        </p:nvSpPr>
-        <p:spPr>
-          <a:xfrm>
-            <a:off x="6190488" y="2578608"/>
+          <p:cNvPr id="11" name="Text 7"/>
+          <p:cNvSpPr/>
+          <p:nvPr/>
+        </p:nvSpPr>
+        <p:spPr>
+          <a:xfrm>
+            <a:off x="6190488" y="1709928"/>
             <a:ext cx="2971800" cy="457200"/>
           </a:xfrm>
           <a:prstGeom prst="rect">
@@ -6776,7 +6130,7 @@
           <a:bodyPr wrap="square" lIns="0" tIns="0" rIns="0" bIns="0" rtlCol="0" anchor="ctr"/>
           <a:lstStyle/>
           <a:p>
-            <a:pPr indent="0" marL="0">
+            <a:pPr marL="0" indent="0">
               <a:buNone/>
             </a:pPr>
             <a:r>
@@ -6788,7 +6142,7 @@
                 <a:ea typeface="Inter" pitchFamily="34" charset="-122"/>
                 <a:cs typeface="Inter" pitchFamily="34" charset="-120"/>
               </a:rPr>
-              <a:t>Never in appsettings or git</a:t>
+              <a:t>dotnet add package Anthropic</a:t>
             </a:r>
             <a:endParaRPr lang="en-US" sz="1150" dirty="0"/>
           </a:p>
@@ -6796,13 +6150,13 @@
       </p:sp>
       <p:sp>
         <p:nvSpPr>
-          <p:cNvPr id="16" name="Shape 11"/>
-          <p:cNvSpPr/>
-          <p:nvPr/>
-        </p:nvSpPr>
-        <p:spPr>
-          <a:xfrm>
-            <a:off x="5623560" y="3200400"/>
+          <p:cNvPr id="12" name="Shape 8"/>
+          <p:cNvSpPr/>
+          <p:nvPr/>
+        </p:nvSpPr>
+        <p:spPr>
+          <a:xfrm>
+            <a:off x="5623560" y="2331720"/>
             <a:ext cx="420624" cy="420624"/>
           </a:xfrm>
           <a:prstGeom prst="ellipse">
@@ -6813,10 +6167,17 @@
           </a:solidFill>
           <a:ln/>
         </p:spPr>
+        <p:txBody>
+          <a:bodyPr/>
+          <a:lstStyle/>
+          <a:p>
+            <a:endParaRPr lang="en-US"/>
+          </a:p>
+        </p:txBody>
       </p:sp>
       <p:pic>
         <p:nvPicPr>
-          <p:cNvPr id="17" name="Image 3" descr="preencoded.png">    </p:cNvPr>
+          <p:cNvPr id="13" name="Image 2" descr="preencoded.png"/>
           <p:cNvPicPr>
             <a:picLocks noChangeAspect="1"/>
           </p:cNvPicPr>
@@ -6830,6 +6191,135 @@
         </p:blipFill>
         <p:spPr>
           <a:xfrm>
+            <a:off x="5732922" y="2441082"/>
+            <a:ext cx="201900" cy="201900"/>
+          </a:xfrm>
+          <a:prstGeom prst="rect">
+            <a:avLst/>
+          </a:prstGeom>
+        </p:spPr>
+      </p:pic>
+      <p:sp>
+        <p:nvSpPr>
+          <p:cNvPr id="14" name="Text 9"/>
+          <p:cNvSpPr/>
+          <p:nvPr/>
+        </p:nvSpPr>
+        <p:spPr>
+          <a:xfrm>
+            <a:off x="6190488" y="2295144"/>
+            <a:ext cx="2926080" cy="292608"/>
+          </a:xfrm>
+          <a:prstGeom prst="rect">
+            <a:avLst/>
+          </a:prstGeom>
+          <a:noFill/>
+          <a:ln/>
+        </p:spPr>
+        <p:txBody>
+          <a:bodyPr wrap="square" lIns="0" tIns="0" rIns="0" bIns="0" rtlCol="0" anchor="ctr"/>
+          <a:lstStyle/>
+          <a:p>
+            <a:pPr marL="0" indent="0">
+              <a:buNone/>
+            </a:pPr>
+            <a:r>
+              <a:rPr lang="en-US" sz="1400" b="1" dirty="0">
+                <a:solidFill>
+                  <a:srgbClr val="141413"/>
+                </a:solidFill>
+                <a:latin typeface="Inter" pitchFamily="34" charset="0"/>
+                <a:ea typeface="Inter" pitchFamily="34" charset="-122"/>
+                <a:cs typeface="Inter" pitchFamily="34" charset="-120"/>
+              </a:rPr>
+              <a:t>Key in user-secrets</a:t>
+            </a:r>
+            <a:endParaRPr lang="en-US" sz="1400" dirty="0"/>
+          </a:p>
+        </p:txBody>
+      </p:sp>
+      <p:sp>
+        <p:nvSpPr>
+          <p:cNvPr id="15" name="Text 10"/>
+          <p:cNvSpPr/>
+          <p:nvPr/>
+        </p:nvSpPr>
+        <p:spPr>
+          <a:xfrm>
+            <a:off x="6190488" y="2578608"/>
+            <a:ext cx="2971800" cy="457200"/>
+          </a:xfrm>
+          <a:prstGeom prst="rect">
+            <a:avLst/>
+          </a:prstGeom>
+          <a:noFill/>
+          <a:ln/>
+        </p:spPr>
+        <p:txBody>
+          <a:bodyPr wrap="square" lIns="0" tIns="0" rIns="0" bIns="0" rtlCol="0" anchor="ctr"/>
+          <a:lstStyle/>
+          <a:p>
+            <a:pPr marL="0" indent="0">
+              <a:buNone/>
+            </a:pPr>
+            <a:r>
+              <a:rPr lang="en-US" sz="1150" dirty="0">
+                <a:solidFill>
+                  <a:srgbClr val="615C52"/>
+                </a:solidFill>
+                <a:latin typeface="Inter" pitchFamily="34" charset="0"/>
+                <a:ea typeface="Inter" pitchFamily="34" charset="-122"/>
+                <a:cs typeface="Inter" pitchFamily="34" charset="-120"/>
+              </a:rPr>
+              <a:t>Never in appsettings or git</a:t>
+            </a:r>
+            <a:endParaRPr lang="en-US" sz="1150" dirty="0"/>
+          </a:p>
+        </p:txBody>
+      </p:sp>
+      <p:sp>
+        <p:nvSpPr>
+          <p:cNvPr id="16" name="Shape 11"/>
+          <p:cNvSpPr/>
+          <p:nvPr/>
+        </p:nvSpPr>
+        <p:spPr>
+          <a:xfrm>
+            <a:off x="5623560" y="3200400"/>
+            <a:ext cx="420624" cy="420624"/>
+          </a:xfrm>
+          <a:prstGeom prst="ellipse">
+            <a:avLst/>
+          </a:prstGeom>
+          <a:solidFill>
+            <a:srgbClr val="D97757"/>
+          </a:solidFill>
+          <a:ln/>
+        </p:spPr>
+        <p:txBody>
+          <a:bodyPr/>
+          <a:lstStyle/>
+          <a:p>
+            <a:endParaRPr lang="en-US"/>
+          </a:p>
+        </p:txBody>
+      </p:sp>
+      <p:pic>
+        <p:nvPicPr>
+          <p:cNvPr id="17" name="Image 3" descr="preencoded.png"/>
+          <p:cNvPicPr>
+            <a:picLocks noChangeAspect="1"/>
+          </p:cNvPicPr>
+          <p:nvPr/>
+        </p:nvPicPr>
+        <p:blipFill>
+          <a:blip r:embed="rId5"/>
+          <a:stretch>
+            <a:fillRect/>
+          </a:stretch>
+        </p:blipFill>
+        <p:spPr>
+          <a:xfrm>
             <a:off x="5732922" y="3309762"/>
             <a:ext cx="201900" cy="201900"/>
           </a:xfrm>
@@ -6859,7 +6349,7 @@
           <a:bodyPr wrap="square" lIns="0" tIns="0" rIns="0" bIns="0" rtlCol="0" anchor="ctr"/>
           <a:lstStyle/>
           <a:p>
-            <a:pPr indent="0" marL="0">
+            <a:pPr marL="0" indent="0">
               <a:buNone/>
             </a:pPr>
             <a:r>
@@ -6898,7 +6388,7 @@
           <a:bodyPr wrap="square" lIns="0" tIns="0" rIns="0" bIns="0" rtlCol="0" anchor="ctr"/>
           <a:lstStyle/>
           <a:p>
-            <a:pPr indent="0" marL="0">
+            <a:pPr marL="0" indent="0">
               <a:buNone/>
             </a:pPr>
             <a:r>
@@ -6937,7 +6427,7 @@
           <a:bodyPr wrap="square" rtlCol="0" anchor="ctr"/>
           <a:lstStyle/>
           <a:p>
-            <a:pPr indent="0" marL="0">
+            <a:pPr marL="0" indent="0">
               <a:buNone/>
             </a:pPr>
             <a:r>
@@ -6976,7 +6466,7 @@
           <a:bodyPr wrap="square" rtlCol="0" anchor="ctr"/>
           <a:lstStyle/>
           <a:p>
-            <a:pPr algn="r" indent="0" marL="0">
+            <a:pPr marL="0" indent="0" algn="r">
               <a:buNone/>
             </a:pPr>
             <a:r>
@@ -6991,45 +6481,6 @@
               <a:t>Day 2 · Section 1  ·  4/13</a:t>
             </a:r>
             <a:endParaRPr lang="en-US" sz="900" dirty="0"/>
-          </a:p>
-        </p:txBody>
-      </p:sp>
-      <p:sp>
-        <p:nvSpPr>
-          <p:cNvPr id="22" name="Text 16"/>
-          <p:cNvSpPr/>
-          <p:nvPr/>
-        </p:nvSpPr>
-        <p:spPr>
-          <a:xfrm>
-            <a:off x="548640" y="4462272"/>
-            <a:ext cx="8046720" cy="274320"/>
-          </a:xfrm>
-          <a:prstGeom prst="rect">
-            <a:avLst/>
-          </a:prstGeom>
-          <a:noFill/>
-          <a:ln/>
-        </p:spPr>
-        <p:txBody>
-          <a:bodyPr wrap="square" lIns="0" tIns="0" rIns="0" bIns="0" rtlCol="0" anchor="ctr"/>
-          <a:lstStyle/>
-          <a:p>
-            <a:pPr indent="0" marL="0">
-              <a:buNone/>
-            </a:pPr>
-            <a:r>
-              <a:rPr lang="en-US" sz="1000" i="1" dirty="0">
-                <a:solidFill>
-                  <a:srgbClr val="615C52"/>
-                </a:solidFill>
-                <a:latin typeface="Inter" pitchFamily="34" charset="0"/>
-                <a:ea typeface="Inter" pitchFamily="34" charset="-122"/>
-                <a:cs typeface="Inter" pitchFamily="34" charset="-120"/>
-              </a:rPr>
-              <a:t>▸ Bind options once; the key stays in user-secrets, never in the repo.</a:t>
-            </a:r>
-            <a:endParaRPr lang="en-US" sz="1000" dirty="0"/>
           </a:p>
         </p:txBody>
       </p:sp>
@@ -7049,6 +6500,7 @@
         <a:solidFill>
           <a:srgbClr val="F0EEE6"/>
         </a:solidFill>
+        <a:effectLst/>
       </p:bgPr>
     </p:bg>
     <p:spTree>
@@ -7086,11 +6538,11 @@
           <a:bodyPr wrap="square" lIns="0" tIns="0" rIns="0" bIns="0" rtlCol="0" anchor="ctr"/>
           <a:lstStyle/>
           <a:p>
-            <a:pPr indent="0" marL="0">
-              <a:buNone/>
-            </a:pPr>
-            <a:r>
-              <a:rPr lang="en-US" sz="1100" b="1" spc="200" kern="0" dirty="0">
+            <a:pPr marL="0" indent="0">
+              <a:buNone/>
+            </a:pPr>
+            <a:r>
+              <a:rPr lang="en-US" sz="1100" b="1" kern="0" spc="200" dirty="0">
                 <a:solidFill>
                   <a:srgbClr val="C25E40"/>
                 </a:solidFill>
@@ -7125,7 +6577,7 @@
           <a:bodyPr wrap="square" lIns="0" tIns="0" rIns="0" bIns="0" rtlCol="0" anchor="ctr"/>
           <a:lstStyle/>
           <a:p>
-            <a:pPr indent="0" marL="0">
+            <a:pPr marL="0" indent="0">
               <a:buNone/>
             </a:pPr>
             <a:r>
@@ -7145,80 +6597,7 @@
       </p:sp>
       <p:pic>
         <p:nvPicPr>
-          <p:cNvPr id="4" name="Image 0" descr="preencoded.png">    </p:cNvPr>
-          <p:cNvPicPr>
-            <a:picLocks noChangeAspect="1"/>
-          </p:cNvPicPr>
-          <p:nvPr/>
-        </p:nvPicPr>
-        <p:blipFill>
-          <a:blip r:embed="rId1"/>
-          <a:stretch>
-            <a:fillRect/>
-          </a:stretch>
-        </p:blipFill>
-        <p:spPr>
-          <a:xfrm>
-            <a:off x="8302752" y="402336"/>
-            <a:ext cx="365760" cy="310896"/>
-          </a:xfrm>
-          <a:prstGeom prst="rect">
-            <a:avLst/>
-          </a:prstGeom>
-        </p:spPr>
-      </p:pic>
-      <p:sp>
-        <p:nvSpPr>
-          <p:cNvPr id="5" name="Shape 2"/>
-          <p:cNvSpPr/>
-          <p:nvPr/>
-        </p:nvSpPr>
-        <p:spPr>
-          <a:xfrm>
-            <a:off x="548640" y="1417320"/>
-            <a:ext cx="8046720" cy="1051560"/>
-          </a:xfrm>
-          <a:prstGeom prst="roundRect">
-            <a:avLst>
-              <a:gd name="adj" fmla="val 8696"/>
-            </a:avLst>
-          </a:prstGeom>
-          <a:solidFill>
-            <a:srgbClr val="F4E4DC"/>
-          </a:solidFill>
-          <a:ln/>
-          <a:effectLst>
-            <a:outerShdw sx="100000" sy="100000" kx="0" ky="0" algn="bl" rotWithShape="0" blurRad="88900" dist="38100" dir="5400000">
-              <a:srgbClr val="000000">
-                <a:alpha val="10000"/>
-              </a:srgbClr>
-            </a:outerShdw>
-          </a:effectLst>
-        </p:spPr>
-      </p:sp>
-      <p:sp>
-        <p:nvSpPr>
-          <p:cNvPr id="6" name="Shape 3"/>
-          <p:cNvSpPr/>
-          <p:nvPr/>
-        </p:nvSpPr>
-        <p:spPr>
-          <a:xfrm>
-            <a:off x="841248" y="1719072"/>
-            <a:ext cx="502920" cy="502920"/>
-          </a:xfrm>
-          <a:prstGeom prst="ellipse">
-            <a:avLst/>
-          </a:prstGeom>
-          <a:solidFill>
-            <a:srgbClr val="C25E40"/>
-          </a:solidFill>
-          <a:ln/>
-        </p:spPr>
-      </p:sp>
-      <p:pic>
-        <p:nvPicPr>
-          <p:cNvPr id="7" name="Image 1" descr="preencoded.png">    </p:cNvPr>
+          <p:cNvPr id="4" name="Image 0" descr="preencoded.png"/>
           <p:cNvPicPr>
             <a:picLocks noChangeAspect="1"/>
           </p:cNvPicPr>
@@ -7232,8 +6611,8 @@
         </p:blipFill>
         <p:spPr>
           <a:xfrm>
-            <a:off x="972007" y="1849831"/>
-            <a:ext cx="241402" cy="241402"/>
+            <a:off x="8302752" y="402336"/>
+            <a:ext cx="365760" cy="310896"/>
           </a:xfrm>
           <a:prstGeom prst="rect">
             <a:avLst/>
@@ -7242,85 +6621,176 @@
       </p:pic>
       <p:sp>
         <p:nvSpPr>
-          <p:cNvPr id="8" name="Text 4"/>
-          <p:cNvSpPr/>
-          <p:nvPr/>
-        </p:nvSpPr>
-        <p:spPr>
-          <a:xfrm>
-            <a:off x="1572768" y="1417320"/>
-            <a:ext cx="6766560" cy="1051560"/>
-          </a:xfrm>
-          <a:prstGeom prst="rect">
-            <a:avLst/>
-          </a:prstGeom>
-          <a:noFill/>
-          <a:ln/>
-        </p:spPr>
-        <p:txBody>
-          <a:bodyPr wrap="square" lIns="0" tIns="0" rIns="0" bIns="0" rtlCol="0" anchor="ctr"/>
-          <a:lstStyle/>
-          <a:p>
-            <a:pPr indent="0" marL="0">
-              <a:buNone/>
-            </a:pPr>
-            <a:r>
-              <a:rPr lang="en-US" sz="1600" b="1" dirty="0">
-                <a:solidFill>
-                  <a:srgbClr val="141413"/>
-                </a:solidFill>
-                <a:latin typeface="Inter" pitchFamily="34" charset="0"/>
-                <a:ea typeface="Inter" pitchFamily="34" charset="-122"/>
-                <a:cs typeface="Inter" pitchFamily="34" charset="-120"/>
-              </a:rPr>
-              <a:t>It holds an HttpClient. </a:t>
-            </a:r>
-            <a:pPr indent="0" marL="0">
-              <a:buNone/>
-            </a:pPr>
-            <a:r>
-              <a:rPr lang="en-US" sz="1600" b="1" dirty="0">
-                <a:solidFill>
-                  <a:srgbClr val="C25E40"/>
-                </a:solidFill>
-                <a:latin typeface="Inter" pitchFamily="34" charset="0"/>
-                <a:ea typeface="Inter" pitchFamily="34" charset="-122"/>
-                <a:cs typeface="Inter" pitchFamily="34" charset="-120"/>
-              </a:rPr>
-              <a:t>Scoped or Transient → socket exhaustion under load.</a:t>
-            </a:r>
-            <a:endParaRPr lang="en-US" sz="1600" dirty="0"/>
-          </a:p>
-        </p:txBody>
-      </p:sp>
-      <p:sp>
-        <p:nvSpPr>
-          <p:cNvPr id="9" name="Shape 5"/>
-          <p:cNvSpPr/>
-          <p:nvPr/>
-        </p:nvSpPr>
-        <p:spPr>
-          <a:xfrm>
-            <a:off x="548640" y="2697480"/>
-            <a:ext cx="5074920" cy="1417320"/>
+          <p:cNvPr id="5" name="Shape 2"/>
+          <p:cNvSpPr/>
+          <p:nvPr/>
+        </p:nvSpPr>
+        <p:spPr>
+          <a:xfrm>
+            <a:off x="548640" y="1417320"/>
+            <a:ext cx="8046720" cy="1051560"/>
           </a:xfrm>
           <a:prstGeom prst="roundRect">
             <a:avLst>
-              <a:gd name="adj" fmla="val 5161"/>
+              <a:gd name="adj" fmla="val 8696"/>
             </a:avLst>
           </a:prstGeom>
           <a:solidFill>
-            <a:srgbClr val="1F1E1D"/>
+            <a:srgbClr val="F4E4DC"/>
           </a:solidFill>
           <a:ln/>
           <a:effectLst>
-            <a:outerShdw sx="100000" sy="100000" kx="0" ky="0" algn="bl" rotWithShape="0" blurRad="88900" dist="38100" dir="5400000">
+            <a:outerShdw blurRad="88900" dist="38100" dir="5400000" algn="bl" rotWithShape="0">
               <a:srgbClr val="000000">
                 <a:alpha val="10000"/>
               </a:srgbClr>
             </a:outerShdw>
           </a:effectLst>
         </p:spPr>
+        <p:txBody>
+          <a:bodyPr/>
+          <a:lstStyle/>
+          <a:p>
+            <a:endParaRPr lang="en-US"/>
+          </a:p>
+        </p:txBody>
+      </p:sp>
+      <p:sp>
+        <p:nvSpPr>
+          <p:cNvPr id="6" name="Shape 3"/>
+          <p:cNvSpPr/>
+          <p:nvPr/>
+        </p:nvSpPr>
+        <p:spPr>
+          <a:xfrm>
+            <a:off x="841248" y="1719072"/>
+            <a:ext cx="502920" cy="502920"/>
+          </a:xfrm>
+          <a:prstGeom prst="ellipse">
+            <a:avLst/>
+          </a:prstGeom>
+          <a:solidFill>
+            <a:srgbClr val="C25E40"/>
+          </a:solidFill>
+          <a:ln/>
+        </p:spPr>
+        <p:txBody>
+          <a:bodyPr/>
+          <a:lstStyle/>
+          <a:p>
+            <a:endParaRPr lang="en-US"/>
+          </a:p>
+        </p:txBody>
+      </p:sp>
+      <p:pic>
+        <p:nvPicPr>
+          <p:cNvPr id="7" name="Image 1" descr="preencoded.png"/>
+          <p:cNvPicPr>
+            <a:picLocks noChangeAspect="1"/>
+          </p:cNvPicPr>
+          <p:nvPr/>
+        </p:nvPicPr>
+        <p:blipFill>
+          <a:blip r:embed="rId3"/>
+          <a:stretch>
+            <a:fillRect/>
+          </a:stretch>
+        </p:blipFill>
+        <p:spPr>
+          <a:xfrm>
+            <a:off x="972007" y="1849831"/>
+            <a:ext cx="241402" cy="241402"/>
+          </a:xfrm>
+          <a:prstGeom prst="rect">
+            <a:avLst/>
+          </a:prstGeom>
+        </p:spPr>
+      </p:pic>
+      <p:sp>
+        <p:nvSpPr>
+          <p:cNvPr id="8" name="Text 4"/>
+          <p:cNvSpPr/>
+          <p:nvPr/>
+        </p:nvSpPr>
+        <p:spPr>
+          <a:xfrm>
+            <a:off x="1572768" y="1417320"/>
+            <a:ext cx="6766560" cy="1051560"/>
+          </a:xfrm>
+          <a:prstGeom prst="rect">
+            <a:avLst/>
+          </a:prstGeom>
+          <a:noFill/>
+          <a:ln/>
+        </p:spPr>
+        <p:txBody>
+          <a:bodyPr wrap="square" lIns="0" tIns="0" rIns="0" bIns="0" rtlCol="0" anchor="ctr"/>
+          <a:lstStyle/>
+          <a:p>
+            <a:pPr marL="0" indent="0">
+              <a:buNone/>
+            </a:pPr>
+            <a:r>
+              <a:rPr lang="en-US" sz="1600" b="1" dirty="0">
+                <a:solidFill>
+                  <a:srgbClr val="141413"/>
+                </a:solidFill>
+                <a:latin typeface="Inter" pitchFamily="34" charset="0"/>
+                <a:ea typeface="Inter" pitchFamily="34" charset="-122"/>
+                <a:cs typeface="Inter" pitchFamily="34" charset="-120"/>
+              </a:rPr>
+              <a:t>It holds an HttpClient. </a:t>
+            </a:r>
+            <a:r>
+              <a:rPr lang="en-US" sz="1600" b="1" dirty="0">
+                <a:solidFill>
+                  <a:srgbClr val="C25E40"/>
+                </a:solidFill>
+                <a:latin typeface="Inter" pitchFamily="34" charset="0"/>
+                <a:ea typeface="Inter" pitchFamily="34" charset="-122"/>
+                <a:cs typeface="Inter" pitchFamily="34" charset="-120"/>
+              </a:rPr>
+              <a:t>Scoped or Transient → socket exhaustion under load.</a:t>
+            </a:r>
+            <a:endParaRPr lang="en-US" sz="1600" dirty="0"/>
+          </a:p>
+        </p:txBody>
+      </p:sp>
+      <p:sp>
+        <p:nvSpPr>
+          <p:cNvPr id="9" name="Shape 5"/>
+          <p:cNvSpPr/>
+          <p:nvPr/>
+        </p:nvSpPr>
+        <p:spPr>
+          <a:xfrm>
+            <a:off x="548640" y="2697480"/>
+            <a:ext cx="5074920" cy="1417320"/>
+          </a:xfrm>
+          <a:prstGeom prst="roundRect">
+            <a:avLst>
+              <a:gd name="adj" fmla="val 5161"/>
+            </a:avLst>
+          </a:prstGeom>
+          <a:solidFill>
+            <a:srgbClr val="1F1E1D"/>
+          </a:solidFill>
+          <a:ln/>
+          <a:effectLst>
+            <a:outerShdw blurRad="88900" dist="38100" dir="5400000" algn="bl" rotWithShape="0">
+              <a:srgbClr val="000000">
+                <a:alpha val="10000"/>
+              </a:srgbClr>
+            </a:outerShdw>
+          </a:effectLst>
+        </p:spPr>
+        <p:txBody>
+          <a:bodyPr/>
+          <a:lstStyle/>
+          <a:p>
+            <a:endParaRPr lang="en-US"/>
+          </a:p>
+        </p:txBody>
       </p:sp>
       <p:sp>
         <p:nvSpPr>
@@ -7343,7 +6813,7 @@
           <a:bodyPr wrap="square" lIns="0" tIns="0" rIns="0" bIns="0" rtlCol="0" anchor="t"/>
           <a:lstStyle/>
           <a:p>
-            <a:pPr indent="0" marL="0">
+            <a:pPr marL="0" indent="0">
               <a:lnSpc>
                 <a:spcPct val="128000"/>
               </a:lnSpc>
@@ -7363,7 +6833,7 @@
             <a:endParaRPr lang="en-US" sz="1250" dirty="0"/>
           </a:p>
           <a:p>
-            <a:pPr indent="0" marL="0">
+            <a:pPr marL="0" indent="0">
               <a:lnSpc>
                 <a:spcPct val="128000"/>
               </a:lnSpc>
@@ -7380,24 +6850,85 @@
               </a:rPr>
               <a:t>  .</a:t>
             </a:r>
-            <a:pPr indent="0" marL="0">
+            <a:r>
+              <a:rPr lang="en-US" sz="1250" b="1" dirty="0">
+                <a:solidFill>
+                  <a:srgbClr val="E0A04A"/>
+                </a:solidFill>
+                <a:latin typeface="Courier New" pitchFamily="34" charset="0"/>
+                <a:ea typeface="Courier New" pitchFamily="34" charset="-122"/>
+                <a:cs typeface="Courier New" pitchFamily="34" charset="-120"/>
+              </a:rPr>
+              <a:t>AddSingleton</a:t>
+            </a:r>
+            <a:r>
+              <a:rPr lang="en-US" sz="1250" dirty="0">
+                <a:solidFill>
+                  <a:srgbClr val="E9E5DD"/>
+                </a:solidFill>
+                <a:latin typeface="Courier New" pitchFamily="34" charset="0"/>
+                <a:ea typeface="Courier New" pitchFamily="34" charset="-122"/>
+                <a:cs typeface="Courier New" pitchFamily="34" charset="-120"/>
+              </a:rPr>
+              <a:t>&lt;</a:t>
+            </a:r>
+            <a:r>
+              <a:rPr lang="en-US" sz="1250" dirty="0">
+                <a:solidFill>
+                  <a:srgbClr val="9FC3E0"/>
+                </a:solidFill>
+                <a:latin typeface="Courier New" pitchFamily="34" charset="0"/>
+                <a:ea typeface="Courier New" pitchFamily="34" charset="-122"/>
+                <a:cs typeface="Courier New" pitchFamily="34" charset="-120"/>
+              </a:rPr>
+              <a:t>AnthropicClient</a:t>
+            </a:r>
+            <a:r>
+              <a:rPr lang="en-US" sz="1250" dirty="0">
+                <a:solidFill>
+                  <a:srgbClr val="E9E5DD"/>
+                </a:solidFill>
+                <a:latin typeface="Courier New" pitchFamily="34" charset="0"/>
+                <a:ea typeface="Courier New" pitchFamily="34" charset="-122"/>
+                <a:cs typeface="Courier New" pitchFamily="34" charset="-120"/>
+              </a:rPr>
+              <a:t>&gt;(</a:t>
+            </a:r>
+            <a:endParaRPr lang="en-US" sz="1250" dirty="0"/>
+          </a:p>
+          <a:p>
+            <a:pPr marL="0" indent="0">
               <a:lnSpc>
                 <a:spcPct val="128000"/>
               </a:lnSpc>
               <a:buNone/>
             </a:pPr>
             <a:r>
-              <a:rPr lang="en-US" sz="1250" b="1" dirty="0">
-                <a:solidFill>
-                  <a:srgbClr val="E0A04A"/>
+              <a:rPr lang="en-US" sz="1250" dirty="0">
+                <a:solidFill>
+                  <a:srgbClr val="E9E5DD"/>
                 </a:solidFill>
                 <a:latin typeface="Courier New" pitchFamily="34" charset="0"/>
                 <a:ea typeface="Courier New" pitchFamily="34" charset="-122"/>
                 <a:cs typeface="Courier New" pitchFamily="34" charset="-120"/>
               </a:rPr>
-              <a:t>AddSingleton</a:t>
-            </a:r>
-            <a:pPr indent="0" marL="0">
+              <a:t>    sp =&gt; new </a:t>
+            </a:r>
+            <a:r>
+              <a:rPr lang="en-US" sz="1250" dirty="0">
+                <a:solidFill>
+                  <a:srgbClr val="9FC3E0"/>
+                </a:solidFill>
+                <a:latin typeface="Courier New" pitchFamily="34" charset="0"/>
+                <a:ea typeface="Courier New" pitchFamily="34" charset="-122"/>
+                <a:cs typeface="Courier New" pitchFamily="34" charset="-120"/>
+              </a:rPr>
+              <a:t>AnthropicClient</a:t>
+            </a:r>
+            <a:endParaRPr lang="en-US" sz="1250" dirty="0"/>
+          </a:p>
+          <a:p>
+            <a:pPr marL="0" indent="0">
               <a:lnSpc>
                 <a:spcPct val="128000"/>
               </a:lnSpc>
@@ -7412,97 +6943,6 @@
                 <a:ea typeface="Courier New" pitchFamily="34" charset="-122"/>
                 <a:cs typeface="Courier New" pitchFamily="34" charset="-120"/>
               </a:rPr>
-              <a:t>&lt;</a:t>
-            </a:r>
-            <a:pPr indent="0" marL="0">
-              <a:lnSpc>
-                <a:spcPct val="128000"/>
-              </a:lnSpc>
-              <a:buNone/>
-            </a:pPr>
-            <a:r>
-              <a:rPr lang="en-US" sz="1250" dirty="0">
-                <a:solidFill>
-                  <a:srgbClr val="9FC3E0"/>
-                </a:solidFill>
-                <a:latin typeface="Courier New" pitchFamily="34" charset="0"/>
-                <a:ea typeface="Courier New" pitchFamily="34" charset="-122"/>
-                <a:cs typeface="Courier New" pitchFamily="34" charset="-120"/>
-              </a:rPr>
-              <a:t>AnthropicClient</a:t>
-            </a:r>
-            <a:pPr indent="0" marL="0">
-              <a:lnSpc>
-                <a:spcPct val="128000"/>
-              </a:lnSpc>
-              <a:buNone/>
-            </a:pPr>
-            <a:r>
-              <a:rPr lang="en-US" sz="1250" dirty="0">
-                <a:solidFill>
-                  <a:srgbClr val="E9E5DD"/>
-                </a:solidFill>
-                <a:latin typeface="Courier New" pitchFamily="34" charset="0"/>
-                <a:ea typeface="Courier New" pitchFamily="34" charset="-122"/>
-                <a:cs typeface="Courier New" pitchFamily="34" charset="-120"/>
-              </a:rPr>
-              <a:t>&gt;(</a:t>
-            </a:r>
-            <a:endParaRPr lang="en-US" sz="1250" dirty="0"/>
-          </a:p>
-          <a:p>
-            <a:pPr indent="0" marL="0">
-              <a:lnSpc>
-                <a:spcPct val="128000"/>
-              </a:lnSpc>
-              <a:buNone/>
-            </a:pPr>
-            <a:r>
-              <a:rPr lang="en-US" sz="1250" dirty="0">
-                <a:solidFill>
-                  <a:srgbClr val="E9E5DD"/>
-                </a:solidFill>
-                <a:latin typeface="Courier New" pitchFamily="34" charset="0"/>
-                <a:ea typeface="Courier New" pitchFamily="34" charset="-122"/>
-                <a:cs typeface="Courier New" pitchFamily="34" charset="-120"/>
-              </a:rPr>
-              <a:t>    sp =&gt; new </a:t>
-            </a:r>
-            <a:pPr indent="0" marL="0">
-              <a:lnSpc>
-                <a:spcPct val="128000"/>
-              </a:lnSpc>
-              <a:buNone/>
-            </a:pPr>
-            <a:r>
-              <a:rPr lang="en-US" sz="1250" dirty="0">
-                <a:solidFill>
-                  <a:srgbClr val="9FC3E0"/>
-                </a:solidFill>
-                <a:latin typeface="Courier New" pitchFamily="34" charset="0"/>
-                <a:ea typeface="Courier New" pitchFamily="34" charset="-122"/>
-                <a:cs typeface="Courier New" pitchFamily="34" charset="-120"/>
-              </a:rPr>
-              <a:t>AnthropicClient</a:t>
-            </a:r>
-            <a:endParaRPr lang="en-US" sz="1250" dirty="0"/>
-          </a:p>
-          <a:p>
-            <a:pPr indent="0" marL="0">
-              <a:lnSpc>
-                <a:spcPct val="128000"/>
-              </a:lnSpc>
-              <a:buNone/>
-            </a:pPr>
-            <a:r>
-              <a:rPr lang="en-US" sz="1250" dirty="0">
-                <a:solidFill>
-                  <a:srgbClr val="E9E5DD"/>
-                </a:solidFill>
-                <a:latin typeface="Courier New" pitchFamily="34" charset="0"/>
-                <a:ea typeface="Courier New" pitchFamily="34" charset="-122"/>
-                <a:cs typeface="Courier New" pitchFamily="34" charset="-120"/>
-              </a:rPr>
               <a:t>      (opts.ApiKey));</a:t>
             </a:r>
             <a:endParaRPr lang="en-US" sz="1250" dirty="0"/>
@@ -7530,7 +6970,7 @@
           <a:bodyPr wrap="square" lIns="0" tIns="0" rIns="0" bIns="0" rtlCol="0" anchor="ctr"/>
           <a:lstStyle/>
           <a:p>
-            <a:pPr indent="0" marL="0">
+            <a:pPr marL="0" indent="0">
               <a:lnSpc>
                 <a:spcPct val="110000"/>
               </a:lnSpc>
@@ -7547,24 +6987,52 @@
               </a:rPr>
               <a:t>One client, </a:t>
             </a:r>
-            <a:pPr indent="0" marL="0">
+            <a:r>
+              <a:rPr lang="en-US" sz="1450" b="1" dirty="0">
+                <a:solidFill>
+                  <a:srgbClr val="C25E40"/>
+                </a:solidFill>
+                <a:latin typeface="Inter" pitchFamily="34" charset="0"/>
+                <a:ea typeface="Inter" pitchFamily="34" charset="-122"/>
+                <a:cs typeface="Inter" pitchFamily="34" charset="-120"/>
+              </a:rPr>
+              <a:t>reused</a:t>
+            </a:r>
+            <a:r>
+              <a:rPr lang="en-US" sz="1450" dirty="0">
+                <a:solidFill>
+                  <a:srgbClr val="141413"/>
+                </a:solidFill>
+                <a:latin typeface="Inter" pitchFamily="34" charset="0"/>
+                <a:ea typeface="Inter" pitchFamily="34" charset="-122"/>
+                <a:cs typeface="Inter" pitchFamily="34" charset="-120"/>
+              </a:rPr>
+              <a:t> for the</a:t>
+            </a:r>
+            <a:endParaRPr lang="en-US" sz="1450" dirty="0"/>
+          </a:p>
+          <a:p>
+            <a:pPr marL="0" indent="0">
               <a:lnSpc>
                 <a:spcPct val="110000"/>
               </a:lnSpc>
               <a:buNone/>
             </a:pPr>
             <a:r>
-              <a:rPr lang="en-US" sz="1450" b="1" dirty="0">
-                <a:solidFill>
-                  <a:srgbClr val="C25E40"/>
-                </a:solidFill>
-                <a:latin typeface="Inter" pitchFamily="34" charset="0"/>
-                <a:ea typeface="Inter" pitchFamily="34" charset="-122"/>
-                <a:cs typeface="Inter" pitchFamily="34" charset="-120"/>
-              </a:rPr>
-              <a:t>reused</a:t>
-            </a:r>
-            <a:pPr indent="0" marL="0">
+              <a:rPr lang="en-US" sz="1450" dirty="0">
+                <a:solidFill>
+                  <a:srgbClr val="141413"/>
+                </a:solidFill>
+                <a:latin typeface="Inter" pitchFamily="34" charset="0"/>
+                <a:ea typeface="Inter" pitchFamily="34" charset="-122"/>
+                <a:cs typeface="Inter" pitchFamily="34" charset="-120"/>
+              </a:rPr>
+              <a:t>app's lifetime — pooled</a:t>
+            </a:r>
+            <a:endParaRPr lang="en-US" sz="1450" dirty="0"/>
+          </a:p>
+          <a:p>
+            <a:pPr marL="0" indent="0">
               <a:lnSpc>
                 <a:spcPct val="110000"/>
               </a:lnSpc>
@@ -7579,46 +7047,6 @@
                 <a:ea typeface="Inter" pitchFamily="34" charset="-122"/>
                 <a:cs typeface="Inter" pitchFamily="34" charset="-120"/>
               </a:rPr>
-              <a:t> for the</a:t>
-            </a:r>
-            <a:endParaRPr lang="en-US" sz="1450" dirty="0"/>
-          </a:p>
-          <a:p>
-            <a:pPr indent="0" marL="0">
-              <a:lnSpc>
-                <a:spcPct val="110000"/>
-              </a:lnSpc>
-              <a:buNone/>
-            </a:pPr>
-            <a:r>
-              <a:rPr lang="en-US" sz="1450" dirty="0">
-                <a:solidFill>
-                  <a:srgbClr val="141413"/>
-                </a:solidFill>
-                <a:latin typeface="Inter" pitchFamily="34" charset="0"/>
-                <a:ea typeface="Inter" pitchFamily="34" charset="-122"/>
-                <a:cs typeface="Inter" pitchFamily="34" charset="-120"/>
-              </a:rPr>
-              <a:t>app's lifetime — pooled</a:t>
-            </a:r>
-            <a:endParaRPr lang="en-US" sz="1450" dirty="0"/>
-          </a:p>
-          <a:p>
-            <a:pPr indent="0" marL="0">
-              <a:lnSpc>
-                <a:spcPct val="110000"/>
-              </a:lnSpc>
-              <a:buNone/>
-            </a:pPr>
-            <a:r>
-              <a:rPr lang="en-US" sz="1450" dirty="0">
-                <a:solidFill>
-                  <a:srgbClr val="141413"/>
-                </a:solidFill>
-                <a:latin typeface="Inter" pitchFamily="34" charset="0"/>
-                <a:ea typeface="Inter" pitchFamily="34" charset="-122"/>
-                <a:cs typeface="Inter" pitchFamily="34" charset="-120"/>
-              </a:rPr>
               <a:t>connections, no leaks.</a:t>
             </a:r>
             <a:endParaRPr lang="en-US" sz="1450" dirty="0"/>
@@ -7646,7 +7074,7 @@
           <a:bodyPr wrap="square" rtlCol="0" anchor="ctr"/>
           <a:lstStyle/>
           <a:p>
-            <a:pPr indent="0" marL="0">
+            <a:pPr marL="0" indent="0">
               <a:buNone/>
             </a:pPr>
             <a:r>
@@ -7685,7 +7113,7 @@
           <a:bodyPr wrap="square" rtlCol="0" anchor="ctr"/>
           <a:lstStyle/>
           <a:p>
-            <a:pPr algn="r" indent="0" marL="0">
+            <a:pPr marL="0" indent="0" algn="r">
               <a:buNone/>
             </a:pPr>
             <a:r>
@@ -7700,45 +7128,6 @@
               <a:t>Day 2 · Section 1  ·  5/13</a:t>
             </a:r>
             <a:endParaRPr lang="en-US" sz="900" dirty="0"/>
-          </a:p>
-        </p:txBody>
-      </p:sp>
-      <p:sp>
-        <p:nvSpPr>
-          <p:cNvPr id="14" name="Text 10"/>
-          <p:cNvSpPr/>
-          <p:nvPr/>
-        </p:nvSpPr>
-        <p:spPr>
-          <a:xfrm>
-            <a:off x="548640" y="4462272"/>
-            <a:ext cx="8046720" cy="274320"/>
-          </a:xfrm>
-          <a:prstGeom prst="rect">
-            <a:avLst/>
-          </a:prstGeom>
-          <a:noFill/>
-          <a:ln/>
-        </p:spPr>
-        <p:txBody>
-          <a:bodyPr wrap="square" lIns="0" tIns="0" rIns="0" bIns="0" rtlCol="0" anchor="ctr"/>
-          <a:lstStyle/>
-          <a:p>
-            <a:pPr indent="0" marL="0">
-              <a:buNone/>
-            </a:pPr>
-            <a:r>
-              <a:rPr lang="en-US" sz="1000" i="1" dirty="0">
-                <a:solidFill>
-                  <a:srgbClr val="615C52"/>
-                </a:solidFill>
-                <a:latin typeface="Inter" pitchFamily="34" charset="0"/>
-                <a:ea typeface="Inter" pitchFamily="34" charset="-122"/>
-                <a:cs typeface="Inter" pitchFamily="34" charset="-120"/>
-              </a:rPr>
-              <a:t>▸ The single most common .NET HttpClient bug — Singleton avoids socket exhaustion.</a:t>
-            </a:r>
-            <a:endParaRPr lang="en-US" sz="1000" dirty="0"/>
           </a:p>
         </p:txBody>
       </p:sp>
@@ -7758,6 +7147,7 @@
         <a:solidFill>
           <a:srgbClr val="F0EEE6"/>
         </a:solidFill>
+        <a:effectLst/>
       </p:bgPr>
     </p:bg>
     <p:spTree>
@@ -7795,11 +7185,11 @@
           <a:bodyPr wrap="square" lIns="0" tIns="0" rIns="0" bIns="0" rtlCol="0" anchor="ctr"/>
           <a:lstStyle/>
           <a:p>
-            <a:pPr indent="0" marL="0">
-              <a:buNone/>
-            </a:pPr>
-            <a:r>
-              <a:rPr lang="en-US" sz="1100" b="1" spc="200" kern="0" dirty="0">
+            <a:pPr marL="0" indent="0">
+              <a:buNone/>
+            </a:pPr>
+            <a:r>
+              <a:rPr lang="en-US" sz="1100" b="1" kern="0" spc="200" dirty="0">
                 <a:solidFill>
                   <a:srgbClr val="C25E40"/>
                 </a:solidFill>
@@ -7834,7 +7224,7 @@
           <a:bodyPr wrap="square" lIns="0" tIns="0" rIns="0" bIns="0" rtlCol="0" anchor="ctr"/>
           <a:lstStyle/>
           <a:p>
-            <a:pPr indent="0" marL="0">
+            <a:pPr marL="0" indent="0">
               <a:buNone/>
             </a:pPr>
             <a:r>
@@ -7854,375 +7244,7 @@
       </p:sp>
       <p:pic>
         <p:nvPicPr>
-          <p:cNvPr id="4" name="Image 0" descr="preencoded.png">    </p:cNvPr>
-          <p:cNvPicPr>
-            <a:picLocks noChangeAspect="1"/>
-          </p:cNvPicPr>
-          <p:nvPr/>
-        </p:nvPicPr>
-        <p:blipFill>
-          <a:blip r:embed="rId1"/>
-          <a:stretch>
-            <a:fillRect/>
-          </a:stretch>
-        </p:blipFill>
-        <p:spPr>
-          <a:xfrm>
-            <a:off x="8302752" y="402336"/>
-            <a:ext cx="365760" cy="310896"/>
-          </a:xfrm>
-          <a:prstGeom prst="rect">
-            <a:avLst/>
-          </a:prstGeom>
-        </p:spPr>
-      </p:pic>
-      <p:sp>
-        <p:nvSpPr>
-          <p:cNvPr id="5" name="Shape 2"/>
-          <p:cNvSpPr/>
-          <p:nvPr/>
-        </p:nvSpPr>
-        <p:spPr>
-          <a:xfrm>
-            <a:off x="548640" y="1371600"/>
-            <a:ext cx="5120640" cy="2788920"/>
-          </a:xfrm>
-          <a:prstGeom prst="roundRect">
-            <a:avLst>
-              <a:gd name="adj" fmla="val 2623"/>
-            </a:avLst>
-          </a:prstGeom>
-          <a:solidFill>
-            <a:srgbClr val="1F1E1D"/>
-          </a:solidFill>
-          <a:ln/>
-          <a:effectLst>
-            <a:outerShdw sx="100000" sy="100000" kx="0" ky="0" algn="bl" rotWithShape="0" blurRad="88900" dist="38100" dir="5400000">
-              <a:srgbClr val="000000">
-                <a:alpha val="10000"/>
-              </a:srgbClr>
-            </a:outerShdw>
-          </a:effectLst>
-        </p:spPr>
-      </p:sp>
-      <p:sp>
-        <p:nvSpPr>
-          <p:cNvPr id="6" name="Text 3"/>
-          <p:cNvSpPr/>
-          <p:nvPr/>
-        </p:nvSpPr>
-        <p:spPr>
-          <a:xfrm>
-            <a:off x="822960" y="1517904"/>
-            <a:ext cx="4572000" cy="256032"/>
-          </a:xfrm>
-          <a:prstGeom prst="rect">
-            <a:avLst/>
-          </a:prstGeom>
-          <a:noFill/>
-          <a:ln/>
-        </p:spPr>
-        <p:txBody>
-          <a:bodyPr wrap="square" lIns="0" tIns="0" rIns="0" bIns="0" rtlCol="0" anchor="ctr"/>
-          <a:lstStyle/>
-          <a:p>
-            <a:pPr indent="0" marL="0">
-              <a:buNone/>
-            </a:pPr>
-            <a:r>
-              <a:rPr lang="en-US" sz="1050" b="1" spc="50" kern="0" dirty="0">
-                <a:solidFill>
-                  <a:srgbClr val="D97757"/>
-                </a:solidFill>
-                <a:latin typeface="Courier New" pitchFamily="34" charset="0"/>
-                <a:ea typeface="Courier New" pitchFamily="34" charset="-122"/>
-                <a:cs typeface="Courier New" pitchFamily="34" charset="-120"/>
-              </a:rPr>
-              <a:t>// MessagesService</a:t>
-            </a:r>
-            <a:endParaRPr lang="en-US" sz="1050" dirty="0"/>
-          </a:p>
-        </p:txBody>
-      </p:sp>
-      <p:sp>
-        <p:nvSpPr>
-          <p:cNvPr id="7" name="Text 4"/>
-          <p:cNvSpPr/>
-          <p:nvPr/>
-        </p:nvSpPr>
-        <p:spPr>
-          <a:xfrm>
-            <a:off x="841248" y="1828800"/>
-            <a:ext cx="4572000" cy="2148840"/>
-          </a:xfrm>
-          <a:prstGeom prst="rect">
-            <a:avLst/>
-          </a:prstGeom>
-          <a:noFill/>
-          <a:ln/>
-        </p:spPr>
-        <p:txBody>
-          <a:bodyPr wrap="square" lIns="0" tIns="0" rIns="0" bIns="0" rtlCol="0" anchor="t"/>
-          <a:lstStyle/>
-          <a:p>
-            <a:pPr indent="0" marL="0">
-              <a:lnSpc>
-                <a:spcPct val="128000"/>
-              </a:lnSpc>
-              <a:buNone/>
-            </a:pPr>
-            <a:r>
-              <a:rPr lang="en-US" sz="1250" dirty="0">
-                <a:solidFill>
-                  <a:srgbClr val="C58FE0"/>
-                </a:solidFill>
-                <a:latin typeface="Courier New" pitchFamily="34" charset="0"/>
-                <a:ea typeface="Courier New" pitchFamily="34" charset="-122"/>
-                <a:cs typeface="Courier New" pitchFamily="34" charset="-120"/>
-              </a:rPr>
-              <a:t>var </a:t>
-            </a:r>
-            <a:pPr indent="0" marL="0">
-              <a:lnSpc>
-                <a:spcPct val="128000"/>
-              </a:lnSpc>
-              <a:buNone/>
-            </a:pPr>
-            <a:r>
-              <a:rPr lang="en-US" sz="1250" dirty="0">
-                <a:solidFill>
-                  <a:srgbClr val="E9E5DD"/>
-                </a:solidFill>
-                <a:latin typeface="Courier New" pitchFamily="34" charset="0"/>
-                <a:ea typeface="Courier New" pitchFamily="34" charset="-122"/>
-                <a:cs typeface="Courier New" pitchFamily="34" charset="-120"/>
-              </a:rPr>
-              <a:t>res = await client.Messages</a:t>
-            </a:r>
-            <a:endParaRPr lang="en-US" sz="1250" dirty="0"/>
-          </a:p>
-          <a:p>
-            <a:pPr indent="0" marL="0">
-              <a:lnSpc>
-                <a:spcPct val="128000"/>
-              </a:lnSpc>
-              <a:buNone/>
-            </a:pPr>
-            <a:r>
-              <a:rPr lang="en-US" sz="1250" dirty="0">
-                <a:solidFill>
-                  <a:srgbClr val="E9E5DD"/>
-                </a:solidFill>
-                <a:latin typeface="Courier New" pitchFamily="34" charset="0"/>
-                <a:ea typeface="Courier New" pitchFamily="34" charset="-122"/>
-                <a:cs typeface="Courier New" pitchFamily="34" charset="-120"/>
-              </a:rPr>
-              <a:t>  .CreateAsync(new </a:t>
-            </a:r>
-            <a:pPr indent="0" marL="0">
-              <a:lnSpc>
-                <a:spcPct val="128000"/>
-              </a:lnSpc>
-              <a:buNone/>
-            </a:pPr>
-            <a:r>
-              <a:rPr lang="en-US" sz="1250" dirty="0">
-                <a:solidFill>
-                  <a:srgbClr val="9FC3E0"/>
-                </a:solidFill>
-                <a:latin typeface="Courier New" pitchFamily="34" charset="0"/>
-                <a:ea typeface="Courier New" pitchFamily="34" charset="-122"/>
-                <a:cs typeface="Courier New" pitchFamily="34" charset="-120"/>
-              </a:rPr>
-              <a:t>MessageRequest</a:t>
-            </a:r>
-            <a:pPr indent="0" marL="0">
-              <a:lnSpc>
-                <a:spcPct val="128000"/>
-              </a:lnSpc>
-              <a:buNone/>
-            </a:pPr>
-            <a:r>
-              <a:rPr lang="en-US" sz="1250" dirty="0">
-                <a:solidFill>
-                  <a:srgbClr val="E9E5DD"/>
-                </a:solidFill>
-                <a:latin typeface="Courier New" pitchFamily="34" charset="0"/>
-                <a:ea typeface="Courier New" pitchFamily="34" charset="-122"/>
-                <a:cs typeface="Courier New" pitchFamily="34" charset="-120"/>
-              </a:rPr>
-              <a:t> {</a:t>
-            </a:r>
-            <a:endParaRPr lang="en-US" sz="1250" dirty="0"/>
-          </a:p>
-          <a:p>
-            <a:pPr indent="0" marL="0">
-              <a:lnSpc>
-                <a:spcPct val="128000"/>
-              </a:lnSpc>
-              <a:buNone/>
-            </a:pPr>
-            <a:r>
-              <a:rPr lang="en-US" sz="1250" dirty="0">
-                <a:solidFill>
-                  <a:srgbClr val="E9E5DD"/>
-                </a:solidFill>
-                <a:latin typeface="Courier New" pitchFamily="34" charset="0"/>
-                <a:ea typeface="Courier New" pitchFamily="34" charset="-122"/>
-                <a:cs typeface="Courier New" pitchFamily="34" charset="-120"/>
-              </a:rPr>
-              <a:t>    Model = </a:t>
-            </a:r>
-            <a:pPr indent="0" marL="0">
-              <a:lnSpc>
-                <a:spcPct val="128000"/>
-              </a:lnSpc>
-              <a:buNone/>
-            </a:pPr>
-            <a:r>
-              <a:rPr lang="en-US" sz="1250" dirty="0">
-                <a:solidFill>
-                  <a:srgbClr val="E0A04A"/>
-                </a:solidFill>
-                <a:latin typeface="Courier New" pitchFamily="34" charset="0"/>
-                <a:ea typeface="Courier New" pitchFamily="34" charset="-122"/>
-                <a:cs typeface="Courier New" pitchFamily="34" charset="-120"/>
-              </a:rPr>
-              <a:t>"claude-sonnet-4-6"</a:t>
-            </a:r>
-            <a:endParaRPr lang="en-US" sz="1250" dirty="0"/>
-          </a:p>
-          <a:p>
-            <a:pPr indent="0" marL="0">
-              <a:lnSpc>
-                <a:spcPct val="128000"/>
-              </a:lnSpc>
-              <a:buNone/>
-            </a:pPr>
-            <a:r>
-              <a:rPr lang="en-US" sz="1250" dirty="0">
-                <a:solidFill>
-                  <a:srgbClr val="E9E5DD"/>
-                </a:solidFill>
-                <a:latin typeface="Courier New" pitchFamily="34" charset="0"/>
-                <a:ea typeface="Courier New" pitchFamily="34" charset="-122"/>
-                <a:cs typeface="Courier New" pitchFamily="34" charset="-120"/>
-              </a:rPr>
-              <a:t>    MaxTokens = </a:t>
-            </a:r>
-            <a:pPr indent="0" marL="0">
-              <a:lnSpc>
-                <a:spcPct val="128000"/>
-              </a:lnSpc>
-              <a:buNone/>
-            </a:pPr>
-            <a:r>
-              <a:rPr lang="en-US" sz="1250" dirty="0">
-                <a:solidFill>
-                  <a:srgbClr val="E0A04A"/>
-                </a:solidFill>
-                <a:latin typeface="Courier New" pitchFamily="34" charset="0"/>
-                <a:ea typeface="Courier New" pitchFamily="34" charset="-122"/>
-                <a:cs typeface="Courier New" pitchFamily="34" charset="-120"/>
-              </a:rPr>
-              <a:t>1024</a:t>
-            </a:r>
-            <a:endParaRPr lang="en-US" sz="1250" dirty="0"/>
-          </a:p>
-          <a:p>
-            <a:pPr indent="0" marL="0">
-              <a:lnSpc>
-                <a:spcPct val="128000"/>
-              </a:lnSpc>
-              <a:buNone/>
-            </a:pPr>
-            <a:r>
-              <a:rPr lang="en-US" sz="1250" dirty="0">
-                <a:solidFill>
-                  <a:srgbClr val="E9E5DD"/>
-                </a:solidFill>
-                <a:latin typeface="Courier New" pitchFamily="34" charset="0"/>
-                <a:ea typeface="Courier New" pitchFamily="34" charset="-122"/>
-                <a:cs typeface="Courier New" pitchFamily="34" charset="-120"/>
-              </a:rPr>
-              <a:t>    Messages = [ userMessage ]</a:t>
-            </a:r>
-            <a:endParaRPr lang="en-US" sz="1250" dirty="0"/>
-          </a:p>
-          <a:p>
-            <a:pPr indent="0" marL="0">
-              <a:lnSpc>
-                <a:spcPct val="128000"/>
-              </a:lnSpc>
-              <a:buNone/>
-            </a:pPr>
-            <a:r>
-              <a:rPr lang="en-US" sz="1250" dirty="0">
-                <a:solidFill>
-                  <a:srgbClr val="E9E5DD"/>
-                </a:solidFill>
-                <a:latin typeface="Courier New" pitchFamily="34" charset="0"/>
-                <a:ea typeface="Courier New" pitchFamily="34" charset="-122"/>
-                <a:cs typeface="Courier New" pitchFamily="34" charset="-120"/>
-              </a:rPr>
-              <a:t>  });</a:t>
-            </a:r>
-            <a:endParaRPr lang="en-US" sz="1250" dirty="0"/>
-          </a:p>
-          <a:p>
-            <a:pPr indent="0" marL="0">
-              <a:lnSpc>
-                <a:spcPct val="128000"/>
-              </a:lnSpc>
-              <a:buNone/>
-            </a:pPr>
-            <a:endParaRPr lang="en-US" sz="1250" dirty="0"/>
-          </a:p>
-          <a:p>
-            <a:pPr indent="0" marL="0">
-              <a:lnSpc>
-                <a:spcPct val="128000"/>
-              </a:lnSpc>
-              <a:buNone/>
-            </a:pPr>
-            <a:r>
-              <a:rPr lang="en-US" sz="1250" dirty="0">
-                <a:solidFill>
-                  <a:srgbClr val="9A958B"/>
-                </a:solidFill>
-                <a:latin typeface="Courier New" pitchFamily="34" charset="0"/>
-                <a:ea typeface="Courier New" pitchFamily="34" charset="-122"/>
-                <a:cs typeface="Courier New" pitchFamily="34" charset="-120"/>
-              </a:rPr>
-              <a:t>// res.Usage.InputTokens / OutputTokens</a:t>
-            </a:r>
-            <a:endParaRPr lang="en-US" sz="1250" dirty="0"/>
-          </a:p>
-        </p:txBody>
-      </p:sp>
-      <p:sp>
-        <p:nvSpPr>
-          <p:cNvPr id="8" name="Shape 5"/>
-          <p:cNvSpPr/>
-          <p:nvPr/>
-        </p:nvSpPr>
-        <p:spPr>
-          <a:xfrm>
-            <a:off x="5943600" y="1417320"/>
-            <a:ext cx="384048" cy="384048"/>
-          </a:xfrm>
-          <a:prstGeom prst="ellipse">
-            <a:avLst/>
-          </a:prstGeom>
-          <a:solidFill>
-            <a:srgbClr val="D97757"/>
-          </a:solidFill>
-          <a:ln/>
-        </p:spPr>
-      </p:sp>
-      <p:pic>
-        <p:nvPicPr>
-          <p:cNvPr id="9" name="Image 1" descr="preencoded.png">    </p:cNvPr>
+          <p:cNvPr id="4" name="Image 0" descr="preencoded.png"/>
           <p:cNvPicPr>
             <a:picLocks noChangeAspect="1"/>
           </p:cNvPicPr>
@@ -8236,8 +7258,8 @@
         </p:blipFill>
         <p:spPr>
           <a:xfrm>
-            <a:off x="6043452" y="1517172"/>
-            <a:ext cx="184343" cy="184343"/>
+            <a:off x="8302752" y="402336"/>
+            <a:ext cx="365760" cy="310896"/>
           </a:xfrm>
           <a:prstGeom prst="rect">
             <a:avLst/>
@@ -8246,14 +7268,50 @@
       </p:pic>
       <p:sp>
         <p:nvSpPr>
-          <p:cNvPr id="10" name="Text 6"/>
-          <p:cNvSpPr/>
-          <p:nvPr/>
-        </p:nvSpPr>
-        <p:spPr>
-          <a:xfrm>
-            <a:off x="6473952" y="1371600"/>
-            <a:ext cx="2651760" cy="274320"/>
+          <p:cNvPr id="5" name="Shape 2"/>
+          <p:cNvSpPr/>
+          <p:nvPr/>
+        </p:nvSpPr>
+        <p:spPr>
+          <a:xfrm>
+            <a:off x="548640" y="1371600"/>
+            <a:ext cx="5120640" cy="2788920"/>
+          </a:xfrm>
+          <a:prstGeom prst="roundRect">
+            <a:avLst>
+              <a:gd name="adj" fmla="val 2623"/>
+            </a:avLst>
+          </a:prstGeom>
+          <a:solidFill>
+            <a:srgbClr val="1F1E1D"/>
+          </a:solidFill>
+          <a:ln/>
+          <a:effectLst>
+            <a:outerShdw blurRad="88900" dist="38100" dir="5400000" algn="bl" rotWithShape="0">
+              <a:srgbClr val="000000">
+                <a:alpha val="10000"/>
+              </a:srgbClr>
+            </a:outerShdw>
+          </a:effectLst>
+        </p:spPr>
+        <p:txBody>
+          <a:bodyPr/>
+          <a:lstStyle/>
+          <a:p>
+            <a:endParaRPr lang="en-US"/>
+          </a:p>
+        </p:txBody>
+      </p:sp>
+      <p:sp>
+        <p:nvSpPr>
+          <p:cNvPr id="6" name="Text 3"/>
+          <p:cNvSpPr/>
+          <p:nvPr/>
+        </p:nvSpPr>
+        <p:spPr>
+          <a:xfrm>
+            <a:off x="822960" y="1517904"/>
+            <a:ext cx="4572000" cy="256032"/>
           </a:xfrm>
           <a:prstGeom prst="rect">
             <a:avLst/>
@@ -8265,72 +7323,259 @@
           <a:bodyPr wrap="square" lIns="0" tIns="0" rIns="0" bIns="0" rtlCol="0" anchor="ctr"/>
           <a:lstStyle/>
           <a:p>
-            <a:pPr indent="0" marL="0">
-              <a:buNone/>
-            </a:pPr>
-            <a:r>
-              <a:rPr lang="en-US" sz="1350" b="1" dirty="0">
-                <a:solidFill>
-                  <a:srgbClr val="141413"/>
-                </a:solidFill>
-                <a:latin typeface="Inter" pitchFamily="34" charset="0"/>
-                <a:ea typeface="Inter" pitchFamily="34" charset="-122"/>
-                <a:cs typeface="Inter" pitchFamily="34" charset="-120"/>
-              </a:rPr>
-              <a:t>Model</a:t>
-            </a:r>
-            <a:endParaRPr lang="en-US" sz="1350" dirty="0"/>
-          </a:p>
-        </p:txBody>
-      </p:sp>
-      <p:sp>
-        <p:nvSpPr>
-          <p:cNvPr id="11" name="Text 7"/>
-          <p:cNvSpPr/>
-          <p:nvPr/>
-        </p:nvSpPr>
-        <p:spPr>
-          <a:xfrm>
-            <a:off x="6473952" y="1636776"/>
-            <a:ext cx="2697480" cy="274320"/>
-          </a:xfrm>
-          <a:prstGeom prst="rect">
-            <a:avLst/>
-          </a:prstGeom>
-          <a:noFill/>
-          <a:ln/>
-        </p:spPr>
-        <p:txBody>
-          <a:bodyPr wrap="square" lIns="0" tIns="0" rIns="0" bIns="0" rtlCol="0" anchor="ctr"/>
-          <a:lstStyle/>
-          <a:p>
-            <a:pPr indent="0" marL="0">
-              <a:buNone/>
-            </a:pPr>
-            <a:r>
-              <a:rPr lang="en-US" sz="1100" dirty="0">
-                <a:solidFill>
-                  <a:srgbClr val="615C52"/>
-                </a:solidFill>
-                <a:latin typeface="Inter" pitchFamily="34" charset="0"/>
-                <a:ea typeface="Inter" pitchFamily="34" charset="-122"/>
-                <a:cs typeface="Inter" pitchFamily="34" charset="-120"/>
-              </a:rPr>
-              <a:t>Pick the model id</a:t>
-            </a:r>
-            <a:endParaRPr lang="en-US" sz="1100" dirty="0"/>
-          </a:p>
-        </p:txBody>
-      </p:sp>
-      <p:sp>
-        <p:nvSpPr>
-          <p:cNvPr id="12" name="Shape 8"/>
-          <p:cNvSpPr/>
-          <p:nvPr/>
-        </p:nvSpPr>
-        <p:spPr>
-          <a:xfrm>
-            <a:off x="5943600" y="2093976"/>
+            <a:pPr marL="0" indent="0">
+              <a:buNone/>
+            </a:pPr>
+            <a:r>
+              <a:rPr lang="en-US" sz="1050" b="1" kern="0" spc="50" dirty="0">
+                <a:solidFill>
+                  <a:srgbClr val="D97757"/>
+                </a:solidFill>
+                <a:latin typeface="Courier New" pitchFamily="34" charset="0"/>
+                <a:ea typeface="Courier New" pitchFamily="34" charset="-122"/>
+                <a:cs typeface="Courier New" pitchFamily="34" charset="-120"/>
+              </a:rPr>
+              <a:t>// MessagesService</a:t>
+            </a:r>
+            <a:endParaRPr lang="en-US" sz="1050" dirty="0"/>
+          </a:p>
+        </p:txBody>
+      </p:sp>
+      <p:sp>
+        <p:nvSpPr>
+          <p:cNvPr id="7" name="Text 4"/>
+          <p:cNvSpPr/>
+          <p:nvPr/>
+        </p:nvSpPr>
+        <p:spPr>
+          <a:xfrm>
+            <a:off x="841248" y="1828800"/>
+            <a:ext cx="4572000" cy="2148840"/>
+          </a:xfrm>
+          <a:prstGeom prst="rect">
+            <a:avLst/>
+          </a:prstGeom>
+          <a:noFill/>
+          <a:ln/>
+        </p:spPr>
+        <p:txBody>
+          <a:bodyPr wrap="square" lIns="0" tIns="0" rIns="0" bIns="0" rtlCol="0" anchor="t"/>
+          <a:lstStyle/>
+          <a:p>
+            <a:pPr marL="0" indent="0">
+              <a:lnSpc>
+                <a:spcPct val="128000"/>
+              </a:lnSpc>
+              <a:buNone/>
+            </a:pPr>
+            <a:r>
+              <a:rPr lang="en-US" sz="1250" dirty="0">
+                <a:solidFill>
+                  <a:srgbClr val="C58FE0"/>
+                </a:solidFill>
+                <a:latin typeface="Courier New" pitchFamily="34" charset="0"/>
+                <a:ea typeface="Courier New" pitchFamily="34" charset="-122"/>
+                <a:cs typeface="Courier New" pitchFamily="34" charset="-120"/>
+              </a:rPr>
+              <a:t>var </a:t>
+            </a:r>
+            <a:r>
+              <a:rPr lang="en-US" sz="1250" dirty="0">
+                <a:solidFill>
+                  <a:srgbClr val="E9E5DD"/>
+                </a:solidFill>
+                <a:latin typeface="Courier New" pitchFamily="34" charset="0"/>
+                <a:ea typeface="Courier New" pitchFamily="34" charset="-122"/>
+                <a:cs typeface="Courier New" pitchFamily="34" charset="-120"/>
+              </a:rPr>
+              <a:t>res = await client.Messages</a:t>
+            </a:r>
+            <a:endParaRPr lang="en-US" sz="1250" dirty="0"/>
+          </a:p>
+          <a:p>
+            <a:pPr marL="0" indent="0">
+              <a:lnSpc>
+                <a:spcPct val="128000"/>
+              </a:lnSpc>
+              <a:buNone/>
+            </a:pPr>
+            <a:r>
+              <a:rPr lang="en-US" sz="1250" dirty="0">
+                <a:solidFill>
+                  <a:srgbClr val="E9E5DD"/>
+                </a:solidFill>
+                <a:latin typeface="Courier New" pitchFamily="34" charset="0"/>
+                <a:ea typeface="Courier New" pitchFamily="34" charset="-122"/>
+                <a:cs typeface="Courier New" pitchFamily="34" charset="-120"/>
+              </a:rPr>
+              <a:t>  .CreateAsync(new </a:t>
+            </a:r>
+            <a:r>
+              <a:rPr lang="en-US" sz="1250" dirty="0">
+                <a:solidFill>
+                  <a:srgbClr val="9FC3E0"/>
+                </a:solidFill>
+                <a:latin typeface="Courier New" pitchFamily="34" charset="0"/>
+                <a:ea typeface="Courier New" pitchFamily="34" charset="-122"/>
+                <a:cs typeface="Courier New" pitchFamily="34" charset="-120"/>
+              </a:rPr>
+              <a:t>MessageRequest</a:t>
+            </a:r>
+            <a:r>
+              <a:rPr lang="en-US" sz="1250" dirty="0">
+                <a:solidFill>
+                  <a:srgbClr val="E9E5DD"/>
+                </a:solidFill>
+                <a:latin typeface="Courier New" pitchFamily="34" charset="0"/>
+                <a:ea typeface="Courier New" pitchFamily="34" charset="-122"/>
+                <a:cs typeface="Courier New" pitchFamily="34" charset="-120"/>
+              </a:rPr>
+              <a:t> {</a:t>
+            </a:r>
+            <a:endParaRPr lang="en-US" sz="1250" dirty="0"/>
+          </a:p>
+          <a:p>
+            <a:pPr marL="0" indent="0">
+              <a:lnSpc>
+                <a:spcPct val="128000"/>
+              </a:lnSpc>
+              <a:buNone/>
+            </a:pPr>
+            <a:r>
+              <a:rPr lang="en-US" sz="1250" dirty="0">
+                <a:solidFill>
+                  <a:srgbClr val="E9E5DD"/>
+                </a:solidFill>
+                <a:latin typeface="Courier New" pitchFamily="34" charset="0"/>
+                <a:ea typeface="Courier New" pitchFamily="34" charset="-122"/>
+                <a:cs typeface="Courier New" pitchFamily="34" charset="-120"/>
+              </a:rPr>
+              <a:t>    Model = </a:t>
+            </a:r>
+            <a:r>
+              <a:rPr lang="en-US" sz="1250" dirty="0">
+                <a:solidFill>
+                  <a:srgbClr val="E0A04A"/>
+                </a:solidFill>
+                <a:latin typeface="Courier New" pitchFamily="34" charset="0"/>
+                <a:ea typeface="Courier New" pitchFamily="34" charset="-122"/>
+                <a:cs typeface="Courier New" pitchFamily="34" charset="-120"/>
+              </a:rPr>
+              <a:t>"claude-sonnet-4-6"</a:t>
+            </a:r>
+            <a:endParaRPr lang="en-US" sz="1250" dirty="0"/>
+          </a:p>
+          <a:p>
+            <a:pPr marL="0" indent="0">
+              <a:lnSpc>
+                <a:spcPct val="128000"/>
+              </a:lnSpc>
+              <a:buNone/>
+            </a:pPr>
+            <a:r>
+              <a:rPr lang="en-US" sz="1250" dirty="0">
+                <a:solidFill>
+                  <a:srgbClr val="E9E5DD"/>
+                </a:solidFill>
+                <a:latin typeface="Courier New" pitchFamily="34" charset="0"/>
+                <a:ea typeface="Courier New" pitchFamily="34" charset="-122"/>
+                <a:cs typeface="Courier New" pitchFamily="34" charset="-120"/>
+              </a:rPr>
+              <a:t>    MaxTokens = </a:t>
+            </a:r>
+            <a:r>
+              <a:rPr lang="en-US" sz="1250" dirty="0">
+                <a:solidFill>
+                  <a:srgbClr val="E0A04A"/>
+                </a:solidFill>
+                <a:latin typeface="Courier New" pitchFamily="34" charset="0"/>
+                <a:ea typeface="Courier New" pitchFamily="34" charset="-122"/>
+                <a:cs typeface="Courier New" pitchFamily="34" charset="-120"/>
+              </a:rPr>
+              <a:t>1024</a:t>
+            </a:r>
+            <a:endParaRPr lang="en-US" sz="1250" dirty="0"/>
+          </a:p>
+          <a:p>
+            <a:pPr marL="0" indent="0">
+              <a:lnSpc>
+                <a:spcPct val="128000"/>
+              </a:lnSpc>
+              <a:buNone/>
+            </a:pPr>
+            <a:r>
+              <a:rPr lang="en-US" sz="1250" dirty="0">
+                <a:solidFill>
+                  <a:srgbClr val="E9E5DD"/>
+                </a:solidFill>
+                <a:latin typeface="Courier New" pitchFamily="34" charset="0"/>
+                <a:ea typeface="Courier New" pitchFamily="34" charset="-122"/>
+                <a:cs typeface="Courier New" pitchFamily="34" charset="-120"/>
+              </a:rPr>
+              <a:t>    Messages = [ userMessage ]</a:t>
+            </a:r>
+            <a:endParaRPr lang="en-US" sz="1250" dirty="0"/>
+          </a:p>
+          <a:p>
+            <a:pPr marL="0" indent="0">
+              <a:lnSpc>
+                <a:spcPct val="128000"/>
+              </a:lnSpc>
+              <a:buNone/>
+            </a:pPr>
+            <a:r>
+              <a:rPr lang="en-US" sz="1250" dirty="0">
+                <a:solidFill>
+                  <a:srgbClr val="E9E5DD"/>
+                </a:solidFill>
+                <a:latin typeface="Courier New" pitchFamily="34" charset="0"/>
+                <a:ea typeface="Courier New" pitchFamily="34" charset="-122"/>
+                <a:cs typeface="Courier New" pitchFamily="34" charset="-120"/>
+              </a:rPr>
+              <a:t>  });</a:t>
+            </a:r>
+            <a:endParaRPr lang="en-US" sz="1250" dirty="0"/>
+          </a:p>
+          <a:p>
+            <a:pPr marL="0" indent="0">
+              <a:lnSpc>
+                <a:spcPct val="128000"/>
+              </a:lnSpc>
+              <a:buNone/>
+            </a:pPr>
+            <a:endParaRPr lang="en-US" sz="1250" dirty="0"/>
+          </a:p>
+          <a:p>
+            <a:pPr marL="0" indent="0">
+              <a:lnSpc>
+                <a:spcPct val="128000"/>
+              </a:lnSpc>
+              <a:buNone/>
+            </a:pPr>
+            <a:r>
+              <a:rPr lang="en-US" sz="1250" dirty="0">
+                <a:solidFill>
+                  <a:srgbClr val="9A958B"/>
+                </a:solidFill>
+                <a:latin typeface="Courier New" pitchFamily="34" charset="0"/>
+                <a:ea typeface="Courier New" pitchFamily="34" charset="-122"/>
+                <a:cs typeface="Courier New" pitchFamily="34" charset="-120"/>
+              </a:rPr>
+              <a:t>// res.Usage.InputTokens / OutputTokens</a:t>
+            </a:r>
+            <a:endParaRPr lang="en-US" sz="1250" dirty="0"/>
+          </a:p>
+        </p:txBody>
+      </p:sp>
+      <p:sp>
+        <p:nvSpPr>
+          <p:cNvPr id="8" name="Shape 5"/>
+          <p:cNvSpPr/>
+          <p:nvPr/>
+        </p:nvSpPr>
+        <p:spPr>
+          <a:xfrm>
+            <a:off x="5943600" y="1417320"/>
             <a:ext cx="384048" cy="384048"/>
           </a:xfrm>
           <a:prstGeom prst="ellipse">
@@ -8341,10 +7586,17 @@
           </a:solidFill>
           <a:ln/>
         </p:spPr>
+        <p:txBody>
+          <a:bodyPr/>
+          <a:lstStyle/>
+          <a:p>
+            <a:endParaRPr lang="en-US"/>
+          </a:p>
+        </p:txBody>
       </p:sp>
       <p:pic>
         <p:nvPicPr>
-          <p:cNvPr id="13" name="Image 2" descr="preencoded.png">    </p:cNvPr>
+          <p:cNvPr id="9" name="Image 1" descr="preencoded.png"/>
           <p:cNvPicPr>
             <a:picLocks noChangeAspect="1"/>
           </p:cNvPicPr>
@@ -8358,7 +7610,7 @@
         </p:blipFill>
         <p:spPr>
           <a:xfrm>
-            <a:off x="6043452" y="2193828"/>
+            <a:off x="6043452" y="1517172"/>
             <a:ext cx="184343" cy="184343"/>
           </a:xfrm>
           <a:prstGeom prst="rect">
@@ -8368,13 +7620,13 @@
       </p:pic>
       <p:sp>
         <p:nvSpPr>
-          <p:cNvPr id="14" name="Text 9"/>
-          <p:cNvSpPr/>
-          <p:nvPr/>
-        </p:nvSpPr>
-        <p:spPr>
-          <a:xfrm>
-            <a:off x="6473952" y="2048256"/>
+          <p:cNvPr id="10" name="Text 6"/>
+          <p:cNvSpPr/>
+          <p:nvPr/>
+        </p:nvSpPr>
+        <p:spPr>
+          <a:xfrm>
+            <a:off x="6473952" y="1371600"/>
             <a:ext cx="2651760" cy="274320"/>
           </a:xfrm>
           <a:prstGeom prst="rect">
@@ -8387,7 +7639,7 @@
           <a:bodyPr wrap="square" lIns="0" tIns="0" rIns="0" bIns="0" rtlCol="0" anchor="ctr"/>
           <a:lstStyle/>
           <a:p>
-            <a:pPr indent="0" marL="0">
+            <a:pPr marL="0" indent="0">
               <a:buNone/>
             </a:pPr>
             <a:r>
@@ -8399,7 +7651,7 @@
                 <a:ea typeface="Inter" pitchFamily="34" charset="-122"/>
                 <a:cs typeface="Inter" pitchFamily="34" charset="-120"/>
               </a:rPr>
-              <a:t>Max tokens</a:t>
+              <a:t>Model</a:t>
             </a:r>
             <a:endParaRPr lang="en-US" sz="1350" dirty="0"/>
           </a:p>
@@ -8407,13 +7659,13 @@
       </p:sp>
       <p:sp>
         <p:nvSpPr>
-          <p:cNvPr id="15" name="Text 10"/>
-          <p:cNvSpPr/>
-          <p:nvPr/>
-        </p:nvSpPr>
-        <p:spPr>
-          <a:xfrm>
-            <a:off x="6473952" y="2313432"/>
+          <p:cNvPr id="11" name="Text 7"/>
+          <p:cNvSpPr/>
+          <p:nvPr/>
+        </p:nvSpPr>
+        <p:spPr>
+          <a:xfrm>
+            <a:off x="6473952" y="1636776"/>
             <a:ext cx="2697480" cy="274320"/>
           </a:xfrm>
           <a:prstGeom prst="rect">
@@ -8426,7 +7678,7 @@
           <a:bodyPr wrap="square" lIns="0" tIns="0" rIns="0" bIns="0" rtlCol="0" anchor="ctr"/>
           <a:lstStyle/>
           <a:p>
-            <a:pPr indent="0" marL="0">
+            <a:pPr marL="0" indent="0">
               <a:buNone/>
             </a:pPr>
             <a:r>
@@ -8438,7 +7690,7 @@
                 <a:ea typeface="Inter" pitchFamily="34" charset="-122"/>
                 <a:cs typeface="Inter" pitchFamily="34" charset="-120"/>
               </a:rPr>
-              <a:t>Cap the response length</a:t>
+              <a:t>Pick the model id</a:t>
             </a:r>
             <a:endParaRPr lang="en-US" sz="1100" dirty="0"/>
           </a:p>
@@ -8446,13 +7698,13 @@
       </p:sp>
       <p:sp>
         <p:nvSpPr>
-          <p:cNvPr id="16" name="Shape 11"/>
-          <p:cNvSpPr/>
-          <p:nvPr/>
-        </p:nvSpPr>
-        <p:spPr>
-          <a:xfrm>
-            <a:off x="5943600" y="2770632"/>
+          <p:cNvPr id="12" name="Shape 8"/>
+          <p:cNvSpPr/>
+          <p:nvPr/>
+        </p:nvSpPr>
+        <p:spPr>
+          <a:xfrm>
+            <a:off x="5943600" y="2093976"/>
             <a:ext cx="384048" cy="384048"/>
           </a:xfrm>
           <a:prstGeom prst="ellipse">
@@ -8463,10 +7715,17 @@
           </a:solidFill>
           <a:ln/>
         </p:spPr>
+        <p:txBody>
+          <a:bodyPr/>
+          <a:lstStyle/>
+          <a:p>
+            <a:endParaRPr lang="en-US"/>
+          </a:p>
+        </p:txBody>
       </p:sp>
       <p:pic>
         <p:nvPicPr>
-          <p:cNvPr id="17" name="Image 3" descr="preencoded.png">    </p:cNvPr>
+          <p:cNvPr id="13" name="Image 2" descr="preencoded.png"/>
           <p:cNvPicPr>
             <a:picLocks noChangeAspect="1"/>
           </p:cNvPicPr>
@@ -8480,7 +7739,7 @@
         </p:blipFill>
         <p:spPr>
           <a:xfrm>
-            <a:off x="6043452" y="2870484"/>
+            <a:off x="6043452" y="2193828"/>
             <a:ext cx="184343" cy="184343"/>
           </a:xfrm>
           <a:prstGeom prst="rect">
@@ -8490,13 +7749,13 @@
       </p:pic>
       <p:sp>
         <p:nvSpPr>
-          <p:cNvPr id="18" name="Text 12"/>
-          <p:cNvSpPr/>
-          <p:nvPr/>
-        </p:nvSpPr>
-        <p:spPr>
-          <a:xfrm>
-            <a:off x="6473952" y="2724912"/>
+          <p:cNvPr id="14" name="Text 9"/>
+          <p:cNvSpPr/>
+          <p:nvPr/>
+        </p:nvSpPr>
+        <p:spPr>
+          <a:xfrm>
+            <a:off x="6473952" y="2048256"/>
             <a:ext cx="2651760" cy="274320"/>
           </a:xfrm>
           <a:prstGeom prst="rect">
@@ -8509,7 +7768,7 @@
           <a:bodyPr wrap="square" lIns="0" tIns="0" rIns="0" bIns="0" rtlCol="0" anchor="ctr"/>
           <a:lstStyle/>
           <a:p>
-            <a:pPr indent="0" marL="0">
+            <a:pPr marL="0" indent="0">
               <a:buNone/>
             </a:pPr>
             <a:r>
@@ -8521,7 +7780,7 @@
                 <a:ea typeface="Inter" pitchFamily="34" charset="-122"/>
                 <a:cs typeface="Inter" pitchFamily="34" charset="-120"/>
               </a:rPr>
-              <a:t>Messages</a:t>
+              <a:t>Max tokens</a:t>
             </a:r>
             <a:endParaRPr lang="en-US" sz="1350" dirty="0"/>
           </a:p>
@@ -8529,13 +7788,13 @@
       </p:sp>
       <p:sp>
         <p:nvSpPr>
-          <p:cNvPr id="19" name="Text 13"/>
-          <p:cNvSpPr/>
-          <p:nvPr/>
-        </p:nvSpPr>
-        <p:spPr>
-          <a:xfrm>
-            <a:off x="6473952" y="2990088"/>
+          <p:cNvPr id="15" name="Text 10"/>
+          <p:cNvSpPr/>
+          <p:nvPr/>
+        </p:nvSpPr>
+        <p:spPr>
+          <a:xfrm>
+            <a:off x="6473952" y="2313432"/>
             <a:ext cx="2697480" cy="274320"/>
           </a:xfrm>
           <a:prstGeom prst="rect">
@@ -8548,7 +7807,7 @@
           <a:bodyPr wrap="square" lIns="0" tIns="0" rIns="0" bIns="0" rtlCol="0" anchor="ctr"/>
           <a:lstStyle/>
           <a:p>
-            <a:pPr indent="0" marL="0">
+            <a:pPr marL="0" indent="0">
               <a:buNone/>
             </a:pPr>
             <a:r>
@@ -8560,7 +7819,7 @@
                 <a:ea typeface="Inter" pitchFamily="34" charset="-122"/>
                 <a:cs typeface="Inter" pitchFamily="34" charset="-120"/>
               </a:rPr>
-              <a:t>The conversation so far</a:t>
+              <a:t>Cap the response length</a:t>
             </a:r>
             <a:endParaRPr lang="en-US" sz="1100" dirty="0"/>
           </a:p>
@@ -8568,13 +7827,13 @@
       </p:sp>
       <p:sp>
         <p:nvSpPr>
-          <p:cNvPr id="20" name="Shape 14"/>
-          <p:cNvSpPr/>
-          <p:nvPr/>
-        </p:nvSpPr>
-        <p:spPr>
-          <a:xfrm>
-            <a:off x="5943600" y="3447288"/>
+          <p:cNvPr id="16" name="Shape 11"/>
+          <p:cNvSpPr/>
+          <p:nvPr/>
+        </p:nvSpPr>
+        <p:spPr>
+          <a:xfrm>
+            <a:off x="5943600" y="2770632"/>
             <a:ext cx="384048" cy="384048"/>
           </a:xfrm>
           <a:prstGeom prst="ellipse">
@@ -8585,10 +7844,17 @@
           </a:solidFill>
           <a:ln/>
         </p:spPr>
+        <p:txBody>
+          <a:bodyPr/>
+          <a:lstStyle/>
+          <a:p>
+            <a:endParaRPr lang="en-US"/>
+          </a:p>
+        </p:txBody>
       </p:sp>
       <p:pic>
         <p:nvPicPr>
-          <p:cNvPr id="21" name="Image 4" descr="preencoded.png">    </p:cNvPr>
+          <p:cNvPr id="17" name="Image 3" descr="preencoded.png"/>
           <p:cNvPicPr>
             <a:picLocks noChangeAspect="1"/>
           </p:cNvPicPr>
@@ -8602,6 +7868,135 @@
         </p:blipFill>
         <p:spPr>
           <a:xfrm>
+            <a:off x="6043452" y="2870484"/>
+            <a:ext cx="184343" cy="184343"/>
+          </a:xfrm>
+          <a:prstGeom prst="rect">
+            <a:avLst/>
+          </a:prstGeom>
+        </p:spPr>
+      </p:pic>
+      <p:sp>
+        <p:nvSpPr>
+          <p:cNvPr id="18" name="Text 12"/>
+          <p:cNvSpPr/>
+          <p:nvPr/>
+        </p:nvSpPr>
+        <p:spPr>
+          <a:xfrm>
+            <a:off x="6473952" y="2724912"/>
+            <a:ext cx="2651760" cy="274320"/>
+          </a:xfrm>
+          <a:prstGeom prst="rect">
+            <a:avLst/>
+          </a:prstGeom>
+          <a:noFill/>
+          <a:ln/>
+        </p:spPr>
+        <p:txBody>
+          <a:bodyPr wrap="square" lIns="0" tIns="0" rIns="0" bIns="0" rtlCol="0" anchor="ctr"/>
+          <a:lstStyle/>
+          <a:p>
+            <a:pPr marL="0" indent="0">
+              <a:buNone/>
+            </a:pPr>
+            <a:r>
+              <a:rPr lang="en-US" sz="1350" b="1" dirty="0">
+                <a:solidFill>
+                  <a:srgbClr val="141413"/>
+                </a:solidFill>
+                <a:latin typeface="Inter" pitchFamily="34" charset="0"/>
+                <a:ea typeface="Inter" pitchFamily="34" charset="-122"/>
+                <a:cs typeface="Inter" pitchFamily="34" charset="-120"/>
+              </a:rPr>
+              <a:t>Messages</a:t>
+            </a:r>
+            <a:endParaRPr lang="en-US" sz="1350" dirty="0"/>
+          </a:p>
+        </p:txBody>
+      </p:sp>
+      <p:sp>
+        <p:nvSpPr>
+          <p:cNvPr id="19" name="Text 13"/>
+          <p:cNvSpPr/>
+          <p:nvPr/>
+        </p:nvSpPr>
+        <p:spPr>
+          <a:xfrm>
+            <a:off x="6473952" y="2990088"/>
+            <a:ext cx="2697480" cy="274320"/>
+          </a:xfrm>
+          <a:prstGeom prst="rect">
+            <a:avLst/>
+          </a:prstGeom>
+          <a:noFill/>
+          <a:ln/>
+        </p:spPr>
+        <p:txBody>
+          <a:bodyPr wrap="square" lIns="0" tIns="0" rIns="0" bIns="0" rtlCol="0" anchor="ctr"/>
+          <a:lstStyle/>
+          <a:p>
+            <a:pPr marL="0" indent="0">
+              <a:buNone/>
+            </a:pPr>
+            <a:r>
+              <a:rPr lang="en-US" sz="1100" dirty="0">
+                <a:solidFill>
+                  <a:srgbClr val="615C52"/>
+                </a:solidFill>
+                <a:latin typeface="Inter" pitchFamily="34" charset="0"/>
+                <a:ea typeface="Inter" pitchFamily="34" charset="-122"/>
+                <a:cs typeface="Inter" pitchFamily="34" charset="-120"/>
+              </a:rPr>
+              <a:t>The conversation so far</a:t>
+            </a:r>
+            <a:endParaRPr lang="en-US" sz="1100" dirty="0"/>
+          </a:p>
+        </p:txBody>
+      </p:sp>
+      <p:sp>
+        <p:nvSpPr>
+          <p:cNvPr id="20" name="Shape 14"/>
+          <p:cNvSpPr/>
+          <p:nvPr/>
+        </p:nvSpPr>
+        <p:spPr>
+          <a:xfrm>
+            <a:off x="5943600" y="3447288"/>
+            <a:ext cx="384048" cy="384048"/>
+          </a:xfrm>
+          <a:prstGeom prst="ellipse">
+            <a:avLst/>
+          </a:prstGeom>
+          <a:solidFill>
+            <a:srgbClr val="D97757"/>
+          </a:solidFill>
+          <a:ln/>
+        </p:spPr>
+        <p:txBody>
+          <a:bodyPr/>
+          <a:lstStyle/>
+          <a:p>
+            <a:endParaRPr lang="en-US"/>
+          </a:p>
+        </p:txBody>
+      </p:sp>
+      <p:pic>
+        <p:nvPicPr>
+          <p:cNvPr id="21" name="Image 4" descr="preencoded.png"/>
+          <p:cNvPicPr>
+            <a:picLocks noChangeAspect="1"/>
+          </p:cNvPicPr>
+          <p:nvPr/>
+        </p:nvPicPr>
+        <p:blipFill>
+          <a:blip r:embed="rId6"/>
+          <a:stretch>
+            <a:fillRect/>
+          </a:stretch>
+        </p:blipFill>
+        <p:spPr>
+          <a:xfrm>
             <a:off x="6043452" y="3547140"/>
             <a:ext cx="184343" cy="184343"/>
           </a:xfrm>
@@ -8631,7 +8026,7 @@
           <a:bodyPr wrap="square" lIns="0" tIns="0" rIns="0" bIns="0" rtlCol="0" anchor="ctr"/>
           <a:lstStyle/>
           <a:p>
-            <a:pPr indent="0" marL="0">
+            <a:pPr marL="0" indent="0">
               <a:buNone/>
             </a:pPr>
             <a:r>
@@ -8670,7 +8065,7 @@
           <a:bodyPr wrap="square" lIns="0" tIns="0" rIns="0" bIns="0" rtlCol="0" anchor="ctr"/>
           <a:lstStyle/>
           <a:p>
-            <a:pPr indent="0" marL="0">
+            <a:pPr marL="0" indent="0">
               <a:buNone/>
             </a:pPr>
             <a:r>
@@ -8709,7 +8104,7 @@
           <a:bodyPr wrap="square" rtlCol="0" anchor="ctr"/>
           <a:lstStyle/>
           <a:p>
-            <a:pPr indent="0" marL="0">
+            <a:pPr marL="0" indent="0">
               <a:buNone/>
             </a:pPr>
             <a:r>
@@ -8748,7 +8143,7 @@
           <a:bodyPr wrap="square" rtlCol="0" anchor="ctr"/>
           <a:lstStyle/>
           <a:p>
-            <a:pPr algn="r" indent="0" marL="0">
+            <a:pPr marL="0" indent="0" algn="r">
               <a:buNone/>
             </a:pPr>
             <a:r>
@@ -8763,45 +8158,6 @@
               <a:t>Day 2 · Section 1  ·  6/13</a:t>
             </a:r>
             <a:endParaRPr lang="en-US" sz="900" dirty="0"/>
-          </a:p>
-        </p:txBody>
-      </p:sp>
-      <p:sp>
-        <p:nvSpPr>
-          <p:cNvPr id="26" name="Text 19"/>
-          <p:cNvSpPr/>
-          <p:nvPr/>
-        </p:nvSpPr>
-        <p:spPr>
-          <a:xfrm>
-            <a:off x="548640" y="4462272"/>
-            <a:ext cx="8046720" cy="274320"/>
-          </a:xfrm>
-          <a:prstGeom prst="rect">
-            <a:avLst/>
-          </a:prstGeom>
-          <a:noFill/>
-          <a:ln/>
-        </p:spPr>
-        <p:txBody>
-          <a:bodyPr wrap="square" lIns="0" tIns="0" rIns="0" bIns="0" rtlCol="0" anchor="ctr"/>
-          <a:lstStyle/>
-          <a:p>
-            <a:pPr indent="0" marL="0">
-              <a:buNone/>
-            </a:pPr>
-            <a:r>
-              <a:rPr lang="en-US" sz="1000" i="1" dirty="0">
-                <a:solidFill>
-                  <a:srgbClr val="615C52"/>
-                </a:solidFill>
-                <a:latin typeface="Inter" pitchFamily="34" charset="0"/>
-                <a:ea typeface="Inter" pitchFamily="34" charset="-122"/>
-                <a:cs typeface="Inter" pitchFamily="34" charset="-120"/>
-              </a:rPr>
-              <a:t>▸ Four required pieces; always read Usage so cost is visible from call one.</a:t>
-            </a:r>
-            <a:endParaRPr lang="en-US" sz="1000" dirty="0"/>
           </a:p>
         </p:txBody>
       </p:sp>
@@ -8821,6 +8177,7 @@
         <a:solidFill>
           <a:srgbClr val="F0EEE6"/>
         </a:solidFill>
+        <a:effectLst/>
       </p:bgPr>
     </p:bg>
     <p:spTree>
@@ -8858,11 +8215,11 @@
           <a:bodyPr wrap="square" lIns="0" tIns="0" rIns="0" bIns="0" rtlCol="0" anchor="ctr"/>
           <a:lstStyle/>
           <a:p>
-            <a:pPr indent="0" marL="0">
-              <a:buNone/>
-            </a:pPr>
-            <a:r>
-              <a:rPr lang="en-US" sz="1100" b="1" spc="200" kern="0" dirty="0">
+            <a:pPr marL="0" indent="0">
+              <a:buNone/>
+            </a:pPr>
+            <a:r>
+              <a:rPr lang="en-US" sz="1100" b="1" kern="0" spc="200" dirty="0">
                 <a:solidFill>
                   <a:srgbClr val="C25E40"/>
                 </a:solidFill>
@@ -8897,7 +8254,7 @@
           <a:bodyPr wrap="square" lIns="0" tIns="0" rIns="0" bIns="0" rtlCol="0" anchor="ctr"/>
           <a:lstStyle/>
           <a:p>
-            <a:pPr indent="0" marL="0">
+            <a:pPr marL="0" indent="0">
               <a:buNone/>
             </a:pPr>
             <a:r>
@@ -8917,14 +8274,14 @@
       </p:sp>
       <p:pic>
         <p:nvPicPr>
-          <p:cNvPr id="4" name="Image 0" descr="preencoded.png">    </p:cNvPr>
+          <p:cNvPr id="4" name="Image 0" descr="preencoded.png"/>
           <p:cNvPicPr>
             <a:picLocks noChangeAspect="1"/>
           </p:cNvPicPr>
           <p:nvPr/>
         </p:nvPicPr>
         <p:blipFill>
-          <a:blip r:embed="rId1"/>
+          <a:blip r:embed="rId2"/>
           <a:stretch>
             <a:fillRect/>
           </a:stretch>
@@ -8960,6 +8317,13 @@
           </a:solidFill>
           <a:ln/>
         </p:spPr>
+        <p:txBody>
+          <a:bodyPr/>
+          <a:lstStyle/>
+          <a:p>
+            <a:endParaRPr lang="en-US"/>
+          </a:p>
+        </p:txBody>
       </p:sp>
       <p:sp>
         <p:nvSpPr>
@@ -8982,7 +8346,7 @@
           <a:bodyPr wrap="square" lIns="0" tIns="0" rIns="0" bIns="0" rtlCol="0" anchor="ctr"/>
           <a:lstStyle/>
           <a:p>
-            <a:pPr indent="0" marL="0">
+            <a:pPr marL="0" indent="0">
               <a:buNone/>
             </a:pPr>
             <a:r>
@@ -8996,9 +8360,6 @@
               </a:rPr>
               <a:t>The system prompt is your assistant's </a:t>
             </a:r>
-            <a:pPr indent="0" marL="0">
-              <a:buNone/>
-            </a:pPr>
             <a:r>
               <a:rPr lang="en-US" sz="1900" b="1" dirty="0">
                 <a:solidFill>
@@ -9040,6 +8401,13 @@
             <a:prstDash val="solid"/>
           </a:ln>
         </p:spPr>
+        <p:txBody>
+          <a:bodyPr/>
+          <a:lstStyle/>
+          <a:p>
+            <a:endParaRPr lang="en-US"/>
+          </a:p>
+        </p:txBody>
       </p:sp>
       <p:sp>
         <p:nvSpPr>
@@ -9060,17 +8428,24 @@
           </a:solidFill>
           <a:ln/>
         </p:spPr>
+        <p:txBody>
+          <a:bodyPr/>
+          <a:lstStyle/>
+          <a:p>
+            <a:endParaRPr lang="en-US"/>
+          </a:p>
+        </p:txBody>
       </p:sp>
       <p:pic>
         <p:nvPicPr>
-          <p:cNvPr id="9" name="Image 1" descr="preencoded.png">    </p:cNvPr>
+          <p:cNvPr id="9" name="Image 1" descr="preencoded.png"/>
           <p:cNvPicPr>
             <a:picLocks noChangeAspect="1"/>
           </p:cNvPicPr>
           <p:nvPr/>
         </p:nvPicPr>
         <p:blipFill>
-          <a:blip r:embed="rId2"/>
+          <a:blip r:embed="rId3"/>
           <a:stretch>
             <a:fillRect/>
           </a:stretch>
@@ -9106,7 +8481,7 @@
           <a:bodyPr wrap="square" lIns="0" tIns="0" rIns="0" bIns="0" rtlCol="0" anchor="ctr"/>
           <a:lstStyle/>
           <a:p>
-            <a:pPr indent="0" marL="0">
+            <a:pPr marL="0" indent="0">
               <a:buNone/>
             </a:pPr>
             <a:r>
@@ -9145,7 +8520,7 @@
           <a:bodyPr wrap="square" lIns="0" tIns="0" rIns="0" bIns="0" rtlCol="0" anchor="ctr"/>
           <a:lstStyle/>
           <a:p>
-            <a:pPr indent="0" marL="0">
+            <a:pPr marL="0" indent="0">
               <a:buNone/>
             </a:pPr>
             <a:r>
@@ -9189,6 +8564,13 @@
             <a:prstDash val="solid"/>
           </a:ln>
         </p:spPr>
+        <p:txBody>
+          <a:bodyPr/>
+          <a:lstStyle/>
+          <a:p>
+            <a:endParaRPr lang="en-US"/>
+          </a:p>
+        </p:txBody>
       </p:sp>
       <p:sp>
         <p:nvSpPr>
@@ -9209,17 +8591,24 @@
           </a:solidFill>
           <a:ln/>
         </p:spPr>
+        <p:txBody>
+          <a:bodyPr/>
+          <a:lstStyle/>
+          <a:p>
+            <a:endParaRPr lang="en-US"/>
+          </a:p>
+        </p:txBody>
       </p:sp>
       <p:pic>
         <p:nvPicPr>
-          <p:cNvPr id="14" name="Image 2" descr="preencoded.png">    </p:cNvPr>
+          <p:cNvPr id="14" name="Image 2" descr="preencoded.png"/>
           <p:cNvPicPr>
             <a:picLocks noChangeAspect="1"/>
           </p:cNvPicPr>
           <p:nvPr/>
         </p:nvPicPr>
         <p:blipFill>
-          <a:blip r:embed="rId3"/>
+          <a:blip r:embed="rId4"/>
           <a:stretch>
             <a:fillRect/>
           </a:stretch>
@@ -9255,7 +8644,7 @@
           <a:bodyPr wrap="square" lIns="0" tIns="0" rIns="0" bIns="0" rtlCol="0" anchor="ctr"/>
           <a:lstStyle/>
           <a:p>
-            <a:pPr indent="0" marL="0">
+            <a:pPr marL="0" indent="0">
               <a:buNone/>
             </a:pPr>
             <a:r>
@@ -9294,7 +8683,7 @@
           <a:bodyPr wrap="square" lIns="0" tIns="0" rIns="0" bIns="0" rtlCol="0" anchor="ctr"/>
           <a:lstStyle/>
           <a:p>
-            <a:pPr indent="0" marL="0">
+            <a:pPr marL="0" indent="0">
               <a:buNone/>
             </a:pPr>
             <a:r>
@@ -9338,6 +8727,13 @@
             <a:prstDash val="solid"/>
           </a:ln>
         </p:spPr>
+        <p:txBody>
+          <a:bodyPr/>
+          <a:lstStyle/>
+          <a:p>
+            <a:endParaRPr lang="en-US"/>
+          </a:p>
+        </p:txBody>
       </p:sp>
       <p:sp>
         <p:nvSpPr>
@@ -9358,17 +8754,24 @@
           </a:solidFill>
           <a:ln/>
         </p:spPr>
+        <p:txBody>
+          <a:bodyPr/>
+          <a:lstStyle/>
+          <a:p>
+            <a:endParaRPr lang="en-US"/>
+          </a:p>
+        </p:txBody>
       </p:sp>
       <p:pic>
         <p:nvPicPr>
-          <p:cNvPr id="19" name="Image 3" descr="preencoded.png">    </p:cNvPr>
+          <p:cNvPr id="19" name="Image 3" descr="preencoded.png"/>
           <p:cNvPicPr>
             <a:picLocks noChangeAspect="1"/>
           </p:cNvPicPr>
           <p:nvPr/>
         </p:nvPicPr>
         <p:blipFill>
-          <a:blip r:embed="rId4"/>
+          <a:blip r:embed="rId5"/>
           <a:stretch>
             <a:fillRect/>
           </a:stretch>
@@ -9404,7 +8807,7 @@
           <a:bodyPr wrap="square" lIns="0" tIns="0" rIns="0" bIns="0" rtlCol="0" anchor="ctr"/>
           <a:lstStyle/>
           <a:p>
-            <a:pPr indent="0" marL="0">
+            <a:pPr marL="0" indent="0">
               <a:buNone/>
             </a:pPr>
             <a:r>
@@ -9443,7 +8846,7 @@
           <a:bodyPr wrap="square" lIns="0" tIns="0" rIns="0" bIns="0" rtlCol="0" anchor="ctr"/>
           <a:lstStyle/>
           <a:p>
-            <a:pPr indent="0" marL="0">
+            <a:pPr marL="0" indent="0">
               <a:buNone/>
             </a:pPr>
             <a:r>
@@ -9482,7 +8885,7 @@
           <a:bodyPr wrap="square" rtlCol="0" anchor="ctr"/>
           <a:lstStyle/>
           <a:p>
-            <a:pPr indent="0" marL="0">
+            <a:pPr marL="0" indent="0">
               <a:buNone/>
             </a:pPr>
             <a:r>
@@ -9521,7 +8924,7 @@
           <a:bodyPr wrap="square" rtlCol="0" anchor="ctr"/>
           <a:lstStyle/>
           <a:p>
-            <a:pPr algn="r" indent="0" marL="0">
+            <a:pPr marL="0" indent="0" algn="r">
               <a:buNone/>
             </a:pPr>
             <a:r>
@@ -9536,45 +8939,6 @@
               <a:t>Day 2 · Section 1  ·  7/13</a:t>
             </a:r>
             <a:endParaRPr lang="en-US" sz="900" dirty="0"/>
-          </a:p>
-        </p:txBody>
-      </p:sp>
-      <p:sp>
-        <p:nvSpPr>
-          <p:cNvPr id="24" name="Text 18"/>
-          <p:cNvSpPr/>
-          <p:nvPr/>
-        </p:nvSpPr>
-        <p:spPr>
-          <a:xfrm>
-            <a:off x="548640" y="4462272"/>
-            <a:ext cx="8046720" cy="274320"/>
-          </a:xfrm>
-          <a:prstGeom prst="rect">
-            <a:avLst/>
-          </a:prstGeom>
-          <a:noFill/>
-          <a:ln/>
-        </p:spPr>
-        <p:txBody>
-          <a:bodyPr wrap="square" lIns="0" tIns="0" rIns="0" bIns="0" rtlCol="0" anchor="ctr"/>
-          <a:lstStyle/>
-          <a:p>
-            <a:pPr indent="0" marL="0">
-              <a:buNone/>
-            </a:pPr>
-            <a:r>
-              <a:rPr lang="en-US" sz="1000" i="1" dirty="0">
-                <a:solidFill>
-                  <a:srgbClr val="615C52"/>
-                </a:solidFill>
-                <a:latin typeface="Inter" pitchFamily="34" charset="0"/>
-                <a:ea typeface="Inter" pitchFamily="34" charset="-122"/>
-                <a:cs typeface="Inter" pitchFamily="34" charset="-120"/>
-              </a:rPr>
-              <a:t>▸ The API is stateless — your service is what makes the conversation feel continuous.</a:t>
-            </a:r>
-            <a:endParaRPr lang="en-US" sz="1000" dirty="0"/>
           </a:p>
         </p:txBody>
       </p:sp>
@@ -9594,6 +8958,7 @@
         <a:solidFill>
           <a:srgbClr val="F0EEE6"/>
         </a:solidFill>
+        <a:effectLst/>
       </p:bgPr>
     </p:bg>
     <p:spTree>
@@ -9631,11 +8996,11 @@
           <a:bodyPr wrap="square" lIns="0" tIns="0" rIns="0" bIns="0" rtlCol="0" anchor="ctr"/>
           <a:lstStyle/>
           <a:p>
-            <a:pPr indent="0" marL="0">
-              <a:buNone/>
-            </a:pPr>
-            <a:r>
-              <a:rPr lang="en-US" sz="1100" b="1" spc="200" kern="0" dirty="0">
+            <a:pPr marL="0" indent="0">
+              <a:buNone/>
+            </a:pPr>
+            <a:r>
+              <a:rPr lang="en-US" sz="1100" b="1" kern="0" spc="200" dirty="0">
                 <a:solidFill>
                   <a:srgbClr val="C25E40"/>
                 </a:solidFill>
@@ -9670,7 +9035,7 @@
           <a:bodyPr wrap="square" lIns="0" tIns="0" rIns="0" bIns="0" rtlCol="0" anchor="ctr"/>
           <a:lstStyle/>
           <a:p>
-            <a:pPr indent="0" marL="0">
+            <a:pPr marL="0" indent="0">
               <a:buNone/>
             </a:pPr>
             <a:r>
@@ -9690,80 +9055,7 @@
       </p:sp>
       <p:pic>
         <p:nvPicPr>
-          <p:cNvPr id="4" name="Image 0" descr="preencoded.png">    </p:cNvPr>
-          <p:cNvPicPr>
-            <a:picLocks noChangeAspect="1"/>
-          </p:cNvPicPr>
-          <p:nvPr/>
-        </p:nvPicPr>
-        <p:blipFill>
-          <a:blip r:embed="rId1"/>
-          <a:stretch>
-            <a:fillRect/>
-          </a:stretch>
-        </p:blipFill>
-        <p:spPr>
-          <a:xfrm>
-            <a:off x="8302752" y="402336"/>
-            <a:ext cx="365760" cy="310896"/>
-          </a:xfrm>
-          <a:prstGeom prst="rect">
-            <a:avLst/>
-          </a:prstGeom>
-        </p:spPr>
-      </p:pic>
-      <p:sp>
-        <p:nvSpPr>
-          <p:cNvPr id="5" name="Shape 2"/>
-          <p:cNvSpPr/>
-          <p:nvPr/>
-        </p:nvSpPr>
-        <p:spPr>
-          <a:xfrm>
-            <a:off x="548640" y="1417320"/>
-            <a:ext cx="8046720" cy="914400"/>
-          </a:xfrm>
-          <a:prstGeom prst="roundRect">
-            <a:avLst>
-              <a:gd name="adj" fmla="val 10000"/>
-            </a:avLst>
-          </a:prstGeom>
-          <a:solidFill>
-            <a:srgbClr val="F4E4DC"/>
-          </a:solidFill>
-          <a:ln/>
-          <a:effectLst>
-            <a:outerShdw sx="100000" sy="100000" kx="0" ky="0" algn="bl" rotWithShape="0" blurRad="88900" dist="38100" dir="5400000">
-              <a:srgbClr val="000000">
-                <a:alpha val="10000"/>
-              </a:srgbClr>
-            </a:outerShdw>
-          </a:effectLst>
-        </p:spPr>
-      </p:sp>
-      <p:sp>
-        <p:nvSpPr>
-          <p:cNvPr id="6" name="Shape 3"/>
-          <p:cNvSpPr/>
-          <p:nvPr/>
-        </p:nvSpPr>
-        <p:spPr>
-          <a:xfrm>
-            <a:off x="822960" y="1627632"/>
-            <a:ext cx="502920" cy="502920"/>
-          </a:xfrm>
-          <a:prstGeom prst="ellipse">
-            <a:avLst/>
-          </a:prstGeom>
-          <a:solidFill>
-            <a:srgbClr val="D97757"/>
-          </a:solidFill>
-          <a:ln/>
-        </p:spPr>
-      </p:sp>
-      <p:pic>
-        <p:nvPicPr>
-          <p:cNvPr id="7" name="Image 1" descr="preencoded.png">    </p:cNvPr>
+          <p:cNvPr id="4" name="Image 0" descr="preencoded.png"/>
           <p:cNvPicPr>
             <a:picLocks noChangeAspect="1"/>
           </p:cNvPicPr>
@@ -9777,6 +9069,93 @@
         </p:blipFill>
         <p:spPr>
           <a:xfrm>
+            <a:off x="8302752" y="402336"/>
+            <a:ext cx="365760" cy="310896"/>
+          </a:xfrm>
+          <a:prstGeom prst="rect">
+            <a:avLst/>
+          </a:prstGeom>
+        </p:spPr>
+      </p:pic>
+      <p:sp>
+        <p:nvSpPr>
+          <p:cNvPr id="5" name="Shape 2"/>
+          <p:cNvSpPr/>
+          <p:nvPr/>
+        </p:nvSpPr>
+        <p:spPr>
+          <a:xfrm>
+            <a:off x="548640" y="1417320"/>
+            <a:ext cx="8046720" cy="914400"/>
+          </a:xfrm>
+          <a:prstGeom prst="roundRect">
+            <a:avLst>
+              <a:gd name="adj" fmla="val 10000"/>
+            </a:avLst>
+          </a:prstGeom>
+          <a:solidFill>
+            <a:srgbClr val="F4E4DC"/>
+          </a:solidFill>
+          <a:ln/>
+          <a:effectLst>
+            <a:outerShdw blurRad="88900" dist="38100" dir="5400000" algn="bl" rotWithShape="0">
+              <a:srgbClr val="000000">
+                <a:alpha val="10000"/>
+              </a:srgbClr>
+            </a:outerShdw>
+          </a:effectLst>
+        </p:spPr>
+        <p:txBody>
+          <a:bodyPr/>
+          <a:lstStyle/>
+          <a:p>
+            <a:endParaRPr lang="en-US"/>
+          </a:p>
+        </p:txBody>
+      </p:sp>
+      <p:sp>
+        <p:nvSpPr>
+          <p:cNvPr id="6" name="Shape 3"/>
+          <p:cNvSpPr/>
+          <p:nvPr/>
+        </p:nvSpPr>
+        <p:spPr>
+          <a:xfrm>
+            <a:off x="822960" y="1627632"/>
+            <a:ext cx="502920" cy="502920"/>
+          </a:xfrm>
+          <a:prstGeom prst="ellipse">
+            <a:avLst/>
+          </a:prstGeom>
+          <a:solidFill>
+            <a:srgbClr val="D97757"/>
+          </a:solidFill>
+          <a:ln/>
+        </p:spPr>
+        <p:txBody>
+          <a:bodyPr/>
+          <a:lstStyle/>
+          <a:p>
+            <a:endParaRPr lang="en-US"/>
+          </a:p>
+        </p:txBody>
+      </p:sp>
+      <p:pic>
+        <p:nvPicPr>
+          <p:cNvPr id="7" name="Image 1" descr="preencoded.png"/>
+          <p:cNvPicPr>
+            <a:picLocks noChangeAspect="1"/>
+          </p:cNvPicPr>
+          <p:nvPr/>
+        </p:nvPicPr>
+        <p:blipFill>
+          <a:blip r:embed="rId3"/>
+          <a:stretch>
+            <a:fillRect/>
+          </a:stretch>
+        </p:blipFill>
+        <p:spPr>
+          <a:xfrm>
             <a:off x="953719" y="1758391"/>
             <a:ext cx="241402" cy="241402"/>
           </a:xfrm>
@@ -9806,7 +9185,7 @@
           <a:bodyPr wrap="square" lIns="0" tIns="0" rIns="0" bIns="0" rtlCol="0" anchor="ctr"/>
           <a:lstStyle/>
           <a:p>
-            <a:pPr indent="0" marL="0">
+            <a:pPr marL="0" indent="0">
               <a:buNone/>
             </a:pPr>
             <a:r>
@@ -9820,9 +9199,6 @@
               </a:rPr>
               <a:t>CacheControlType.Ephemeral</a:t>
             </a:r>
-            <a:pPr indent="0" marL="0">
-              <a:buNone/>
-            </a:pPr>
             <a:r>
               <a:rPr lang="en-US" sz="1500" dirty="0">
                 <a:solidFill>
@@ -9859,11 +9235,11 @@
           <a:bodyPr wrap="square" lIns="0" tIns="0" rIns="0" bIns="0" rtlCol="0" anchor="ctr"/>
           <a:lstStyle/>
           <a:p>
-            <a:pPr indent="0" marL="0">
-              <a:buNone/>
-            </a:pPr>
-            <a:r>
-              <a:rPr lang="en-US" sz="1100" b="1" spc="100" kern="0" dirty="0">
+            <a:pPr marL="0" indent="0">
+              <a:buNone/>
+            </a:pPr>
+            <a:r>
+              <a:rPr lang="en-US" sz="1100" b="1" kern="0" spc="100" dirty="0">
                 <a:solidFill>
                   <a:srgbClr val="C25E40"/>
                 </a:solidFill>
@@ -9903,6 +9279,13 @@
             <a:prstDash val="solid"/>
           </a:ln>
         </p:spPr>
+        <p:txBody>
+          <a:bodyPr/>
+          <a:lstStyle/>
+          <a:p>
+            <a:endParaRPr lang="en-US"/>
+          </a:p>
+        </p:txBody>
       </p:sp>
       <p:sp>
         <p:nvSpPr>
@@ -9923,17 +9306,24 @@
           </a:solidFill>
           <a:ln/>
         </p:spPr>
+        <p:txBody>
+          <a:bodyPr/>
+          <a:lstStyle/>
+          <a:p>
+            <a:endParaRPr lang="en-US"/>
+          </a:p>
+        </p:txBody>
       </p:sp>
       <p:pic>
         <p:nvPicPr>
-          <p:cNvPr id="12" name="Image 2" descr="preencoded.png">    </p:cNvPr>
+          <p:cNvPr id="12" name="Image 2" descr="preencoded.png"/>
           <p:cNvPicPr>
             <a:picLocks noChangeAspect="1"/>
           </p:cNvPicPr>
           <p:nvPr/>
         </p:nvPicPr>
         <p:blipFill>
-          <a:blip r:embed="rId3"/>
+          <a:blip r:embed="rId4"/>
           <a:stretch>
             <a:fillRect/>
           </a:stretch>
@@ -9969,7 +9359,7 @@
           <a:bodyPr wrap="square" lIns="0" tIns="0" rIns="0" bIns="0" rtlCol="0" anchor="ctr"/>
           <a:lstStyle/>
           <a:p>
-            <a:pPr indent="0" marL="0">
+            <a:pPr marL="0" indent="0">
               <a:buNone/>
             </a:pPr>
             <a:r>
@@ -10013,6 +9403,13 @@
             <a:prstDash val="solid"/>
           </a:ln>
         </p:spPr>
+        <p:txBody>
+          <a:bodyPr/>
+          <a:lstStyle/>
+          <a:p>
+            <a:endParaRPr lang="en-US"/>
+          </a:p>
+        </p:txBody>
       </p:sp>
       <p:sp>
         <p:nvSpPr>
@@ -10033,17 +9430,24 @@
           </a:solidFill>
           <a:ln/>
         </p:spPr>
+        <p:txBody>
+          <a:bodyPr/>
+          <a:lstStyle/>
+          <a:p>
+            <a:endParaRPr lang="en-US"/>
+          </a:p>
+        </p:txBody>
       </p:sp>
       <p:pic>
         <p:nvPicPr>
-          <p:cNvPr id="16" name="Image 3" descr="preencoded.png">    </p:cNvPr>
+          <p:cNvPr id="16" name="Image 3" descr="preencoded.png"/>
           <p:cNvPicPr>
             <a:picLocks noChangeAspect="1"/>
           </p:cNvPicPr>
           <p:nvPr/>
         </p:nvPicPr>
         <p:blipFill>
-          <a:blip r:embed="rId4"/>
+          <a:blip r:embed="rId5"/>
           <a:stretch>
             <a:fillRect/>
           </a:stretch>
@@ -10079,7 +9483,7 @@
           <a:bodyPr wrap="square" lIns="0" tIns="0" rIns="0" bIns="0" rtlCol="0" anchor="ctr"/>
           <a:lstStyle/>
           <a:p>
-            <a:pPr indent="0" marL="0">
+            <a:pPr marL="0" indent="0">
               <a:buNone/>
             </a:pPr>
             <a:r>
@@ -10123,6 +9527,13 @@
             <a:prstDash val="solid"/>
           </a:ln>
         </p:spPr>
+        <p:txBody>
+          <a:bodyPr/>
+          <a:lstStyle/>
+          <a:p>
+            <a:endParaRPr lang="en-US"/>
+          </a:p>
+        </p:txBody>
       </p:sp>
       <p:sp>
         <p:nvSpPr>
@@ -10143,17 +9554,24 @@
           </a:solidFill>
           <a:ln/>
         </p:spPr>
+        <p:txBody>
+          <a:bodyPr/>
+          <a:lstStyle/>
+          <a:p>
+            <a:endParaRPr lang="en-US"/>
+          </a:p>
+        </p:txBody>
       </p:sp>
       <p:pic>
         <p:nvPicPr>
-          <p:cNvPr id="20" name="Image 4" descr="preencoded.png">    </p:cNvPr>
+          <p:cNvPr id="20" name="Image 4" descr="preencoded.png"/>
           <p:cNvPicPr>
             <a:picLocks noChangeAspect="1"/>
           </p:cNvPicPr>
           <p:nvPr/>
         </p:nvPicPr>
         <p:blipFill>
-          <a:blip r:embed="rId5"/>
+          <a:blip r:embed="rId6"/>
           <a:stretch>
             <a:fillRect/>
           </a:stretch>
@@ -10189,7 +9607,7 @@
           <a:bodyPr wrap="square" lIns="0" tIns="0" rIns="0" bIns="0" rtlCol="0" anchor="ctr"/>
           <a:lstStyle/>
           <a:p>
-            <a:pPr indent="0" marL="0">
+            <a:pPr marL="0" indent="0">
               <a:buNone/>
             </a:pPr>
             <a:r>
@@ -10233,6 +9651,13 @@
             <a:prstDash val="solid"/>
           </a:ln>
         </p:spPr>
+        <p:txBody>
+          <a:bodyPr/>
+          <a:lstStyle/>
+          <a:p>
+            <a:endParaRPr lang="en-US"/>
+          </a:p>
+        </p:txBody>
       </p:sp>
       <p:sp>
         <p:nvSpPr>
@@ -10253,17 +9678,24 @@
           </a:solidFill>
           <a:ln/>
         </p:spPr>
+        <p:txBody>
+          <a:bodyPr/>
+          <a:lstStyle/>
+          <a:p>
+            <a:endParaRPr lang="en-US"/>
+          </a:p>
+        </p:txBody>
       </p:sp>
       <p:pic>
         <p:nvPicPr>
-          <p:cNvPr id="24" name="Image 5" descr="preencoded.png">    </p:cNvPr>
+          <p:cNvPr id="24" name="Image 5" descr="preencoded.png"/>
           <p:cNvPicPr>
             <a:picLocks noChangeAspect="1"/>
           </p:cNvPicPr>
           <p:nvPr/>
         </p:nvPicPr>
         <p:blipFill>
-          <a:blip r:embed="rId6"/>
+          <a:blip r:embed="rId7"/>
           <a:stretch>
             <a:fillRect/>
           </a:stretch>
@@ -10299,7 +9731,7 @@
           <a:bodyPr wrap="square" lIns="0" tIns="0" rIns="0" bIns="0" rtlCol="0" anchor="ctr"/>
           <a:lstStyle/>
           <a:p>
-            <a:pPr indent="0" marL="0">
+            <a:pPr marL="0" indent="0">
               <a:buNone/>
             </a:pPr>
             <a:r>
@@ -10338,7 +9770,7 @@
           <a:bodyPr wrap="square" rtlCol="0" anchor="ctr"/>
           <a:lstStyle/>
           <a:p>
-            <a:pPr indent="0" marL="0">
+            <a:pPr marL="0" indent="0">
               <a:buNone/>
             </a:pPr>
             <a:r>
@@ -10377,7 +9809,7 @@
           <a:bodyPr wrap="square" rtlCol="0" anchor="ctr"/>
           <a:lstStyle/>
           <a:p>
-            <a:pPr algn="r" indent="0" marL="0">
+            <a:pPr marL="0" indent="0" algn="r">
               <a:buNone/>
             </a:pPr>
             <a:r>
@@ -10392,45 +9824,6 @@
               <a:t>Day 2 · Section 1  ·  8/13</a:t>
             </a:r>
             <a:endParaRPr lang="en-US" sz="900" dirty="0"/>
-          </a:p>
-        </p:txBody>
-      </p:sp>
-      <p:sp>
-        <p:nvSpPr>
-          <p:cNvPr id="28" name="Text 20"/>
-          <p:cNvSpPr/>
-          <p:nvPr/>
-        </p:nvSpPr>
-        <p:spPr>
-          <a:xfrm>
-            <a:off x="548640" y="4462272"/>
-            <a:ext cx="8046720" cy="274320"/>
-          </a:xfrm>
-          <a:prstGeom prst="rect">
-            <a:avLst/>
-          </a:prstGeom>
-          <a:noFill/>
-          <a:ln/>
-        </p:spPr>
-        <p:txBody>
-          <a:bodyPr wrap="square" lIns="0" tIns="0" rIns="0" bIns="0" rtlCol="0" anchor="ctr"/>
-          <a:lstStyle/>
-          <a:p>
-            <a:pPr indent="0" marL="0">
-              <a:buNone/>
-            </a:pPr>
-            <a:r>
-              <a:rPr lang="en-US" sz="1000" i="1" dirty="0">
-                <a:solidFill>
-                  <a:srgbClr val="615C52"/>
-                </a:solidFill>
-                <a:latin typeface="Inter" pitchFamily="34" charset="0"/>
-                <a:ea typeface="Inter" pitchFamily="34" charset="-122"/>
-                <a:cs typeface="Inter" pitchFamily="34" charset="-120"/>
-              </a:rPr>
-              <a:t>▸ Cache big, stable prefixes — system prompts, RAG context, few-shot blocks.</a:t>
-            </a:r>
-            <a:endParaRPr lang="en-US" sz="1000" dirty="0"/>
           </a:p>
         </p:txBody>
       </p:sp>
@@ -10450,6 +9843,7 @@
         <a:solidFill>
           <a:srgbClr val="F0EEE6"/>
         </a:solidFill>
+        <a:effectLst/>
       </p:bgPr>
     </p:bg>
     <p:spTree>
@@ -10468,210 +9862,7 @@
       </p:grpSpPr>
       <p:pic>
         <p:nvPicPr>
-          <p:cNvPr id="2" name="Image 0" descr="preencoded.png">    </p:cNvPr>
-          <p:cNvPicPr>
-            <a:picLocks noChangeAspect="1"/>
-          </p:cNvPicPr>
-          <p:nvPr/>
-        </p:nvPicPr>
-        <p:blipFill>
-          <a:blip r:embed="rId1"/>
-          <a:stretch>
-            <a:fillRect/>
-          </a:stretch>
-        </p:blipFill>
-        <p:spPr>
-          <a:xfrm>
-            <a:off x="8302752" y="402336"/>
-            <a:ext cx="365760" cy="310896"/>
-          </a:xfrm>
-          <a:prstGeom prst="rect">
-            <a:avLst/>
-          </a:prstGeom>
-        </p:spPr>
-      </p:pic>
-      <p:sp>
-        <p:nvSpPr>
-          <p:cNvPr id="3" name="Shape 0"/>
-          <p:cNvSpPr/>
-          <p:nvPr/>
-        </p:nvSpPr>
-        <p:spPr>
-          <a:xfrm>
-            <a:off x="548640" y="822960"/>
-            <a:ext cx="3200400" cy="548640"/>
-          </a:xfrm>
-          <a:prstGeom prst="roundRect">
-            <a:avLst>
-              <a:gd name="adj" fmla="val 50000"/>
-            </a:avLst>
-          </a:prstGeom>
-          <a:solidFill>
-            <a:srgbClr val="C0392B"/>
-          </a:solidFill>
-          <a:ln/>
-        </p:spPr>
-      </p:sp>
-      <p:sp>
-        <p:nvSpPr>
-          <p:cNvPr id="4" name="Shape 1"/>
-          <p:cNvSpPr/>
-          <p:nvPr/>
-        </p:nvSpPr>
-        <p:spPr>
-          <a:xfrm>
-            <a:off x="804672" y="1014984"/>
-            <a:ext cx="164592" cy="164592"/>
-          </a:xfrm>
-          <a:prstGeom prst="ellipse">
-            <a:avLst/>
-          </a:prstGeom>
-          <a:solidFill>
-            <a:srgbClr val="FFFFFF"/>
-          </a:solidFill>
-          <a:ln/>
-        </p:spPr>
-      </p:sp>
-      <p:sp>
-        <p:nvSpPr>
-          <p:cNvPr id="5" name="Text 2"/>
-          <p:cNvSpPr/>
-          <p:nvPr/>
-        </p:nvSpPr>
-        <p:spPr>
-          <a:xfrm>
-            <a:off x="1051560" y="822960"/>
-            <a:ext cx="2560320" cy="548640"/>
-          </a:xfrm>
-          <a:prstGeom prst="rect">
-            <a:avLst/>
-          </a:prstGeom>
-          <a:noFill/>
-          <a:ln/>
-        </p:spPr>
-        <p:txBody>
-          <a:bodyPr wrap="square" lIns="0" tIns="0" rIns="0" bIns="0" rtlCol="0" anchor="ctr"/>
-          <a:lstStyle/>
-          <a:p>
-            <a:pPr indent="0" marL="0">
-              <a:buNone/>
-            </a:pPr>
-            <a:r>
-              <a:rPr lang="en-US" sz="1700" b="1" spc="100" kern="0" dirty="0">
-                <a:solidFill>
-                  <a:srgbClr val="FFFFFF"/>
-                </a:solidFill>
-                <a:latin typeface="Inter" pitchFamily="34" charset="0"/>
-                <a:ea typeface="Inter" pitchFamily="34" charset="-122"/>
-                <a:cs typeface="Inter" pitchFamily="34" charset="-120"/>
-              </a:rPr>
-              <a:t>LIVE DEMO</a:t>
-            </a:r>
-            <a:endParaRPr lang="en-US" sz="1700" dirty="0"/>
-          </a:p>
-        </p:txBody>
-      </p:sp>
-      <p:sp>
-        <p:nvSpPr>
-          <p:cNvPr id="6" name="Text 3"/>
-          <p:cNvSpPr/>
-          <p:nvPr/>
-        </p:nvSpPr>
-        <p:spPr>
-          <a:xfrm>
-            <a:off x="548640" y="1627632"/>
-            <a:ext cx="8046720" cy="502920"/>
-          </a:xfrm>
-          <a:prstGeom prst="rect">
-            <a:avLst/>
-          </a:prstGeom>
-          <a:noFill/>
-          <a:ln/>
-        </p:spPr>
-        <p:txBody>
-          <a:bodyPr wrap="square" lIns="0" tIns="0" rIns="0" bIns="0" rtlCol="0" anchor="ctr"/>
-          <a:lstStyle/>
-          <a:p>
-            <a:pPr indent="0" marL="0">
-              <a:buNone/>
-            </a:pPr>
-            <a:r>
-              <a:rPr lang="en-US" sz="2800" b="1" dirty="0">
-                <a:solidFill>
-                  <a:srgbClr val="141413"/>
-                </a:solidFill>
-                <a:latin typeface="Georgia" pitchFamily="34" charset="0"/>
-                <a:ea typeface="Georgia" pitchFamily="34" charset="-122"/>
-                <a:cs typeface="Georgia" pitchFamily="34" charset="-120"/>
-              </a:rPr>
-              <a:t>First call → multi-turn → caching</a:t>
-            </a:r>
-            <a:endParaRPr lang="en-US" sz="2800" dirty="0"/>
-          </a:p>
-        </p:txBody>
-      </p:sp>
-      <p:sp>
-        <p:nvSpPr>
-          <p:cNvPr id="7" name="Text 4"/>
-          <p:cNvSpPr/>
-          <p:nvPr/>
-        </p:nvSpPr>
-        <p:spPr>
-          <a:xfrm>
-            <a:off x="548640" y="2157984"/>
-            <a:ext cx="8046720" cy="365760"/>
-          </a:xfrm>
-          <a:prstGeom prst="rect">
-            <a:avLst/>
-          </a:prstGeom>
-          <a:noFill/>
-          <a:ln/>
-        </p:spPr>
-        <p:txBody>
-          <a:bodyPr wrap="square" lIns="0" tIns="0" rIns="0" bIns="0" rtlCol="0" anchor="ctr"/>
-          <a:lstStyle/>
-          <a:p>
-            <a:pPr indent="0" marL="0">
-              <a:buNone/>
-            </a:pPr>
-            <a:r>
-              <a:rPr lang="en-US" sz="1600" b="1" dirty="0">
-                <a:solidFill>
-                  <a:srgbClr val="C25E40"/>
-                </a:solidFill>
-                <a:latin typeface="Inter" pitchFamily="34" charset="0"/>
-                <a:ea typeface="Inter" pitchFamily="34" charset="-122"/>
-                <a:cs typeface="Inter" pitchFamily="34" charset="-120"/>
-              </a:rPr>
-              <a:t>Watch the token counts change across calls</a:t>
-            </a:r>
-            <a:endParaRPr lang="en-US" sz="1600" dirty="0"/>
-          </a:p>
-        </p:txBody>
-      </p:sp>
-      <p:sp>
-        <p:nvSpPr>
-          <p:cNvPr id="8" name="Shape 5"/>
-          <p:cNvSpPr/>
-          <p:nvPr/>
-        </p:nvSpPr>
-        <p:spPr>
-          <a:xfrm>
-            <a:off x="566928" y="2743200"/>
-            <a:ext cx="274320" cy="274320"/>
-          </a:xfrm>
-          <a:prstGeom prst="ellipse">
-            <a:avLst/>
-          </a:prstGeom>
-          <a:solidFill>
-            <a:srgbClr val="C0392B"/>
-          </a:solidFill>
-          <a:ln/>
-        </p:spPr>
-      </p:sp>
-      <p:pic>
-        <p:nvPicPr>
-          <p:cNvPr id="9" name="Image 1" descr="preencoded.png">    </p:cNvPr>
+          <p:cNvPr id="2" name="Image 0" descr="preencoded.png"/>
           <p:cNvPicPr>
             <a:picLocks noChangeAspect="1"/>
           </p:cNvPicPr>
@@ -10685,8 +9876,8 @@
         </p:blipFill>
         <p:spPr>
           <a:xfrm>
-            <a:off x="638251" y="2814523"/>
-            <a:ext cx="131674" cy="131674"/>
+            <a:off x="8302752" y="402336"/>
+            <a:ext cx="365760" cy="310896"/>
           </a:xfrm>
           <a:prstGeom prst="rect">
             <a:avLst/>
@@ -10695,66 +9886,207 @@
       </p:pic>
       <p:sp>
         <p:nvSpPr>
-          <p:cNvPr id="10" name="Text 6"/>
-          <p:cNvSpPr/>
-          <p:nvPr/>
-        </p:nvSpPr>
-        <p:spPr>
-          <a:xfrm>
-            <a:off x="960120" y="2724912"/>
-            <a:ext cx="7406640" cy="310896"/>
-          </a:xfrm>
-          <a:prstGeom prst="rect">
-            <a:avLst/>
-          </a:prstGeom>
-          <a:noFill/>
-          <a:ln/>
-        </p:spPr>
-        <p:txBody>
-          <a:bodyPr wrap="square" lIns="0" tIns="0" rIns="0" bIns="0" rtlCol="0" anchor="ctr"/>
-          <a:lstStyle/>
-          <a:p>
-            <a:pPr indent="0" marL="0">
-              <a:buNone/>
-            </a:pPr>
-            <a:r>
-              <a:rPr lang="en-US" sz="1450" dirty="0">
-                <a:solidFill>
-                  <a:srgbClr val="141413"/>
-                </a:solidFill>
-                <a:latin typeface="Inter" pitchFamily="34" charset="0"/>
-                <a:ea typeface="Inter" pitchFamily="34" charset="-122"/>
-                <a:cs typeface="Inter" pitchFamily="34" charset="-120"/>
-              </a:rPr>
-              <a:t>Make the first working single-turn call</a:t>
-            </a:r>
-            <a:endParaRPr lang="en-US" sz="1450" dirty="0"/>
-          </a:p>
-        </p:txBody>
-      </p:sp>
-      <p:sp>
-        <p:nvSpPr>
-          <p:cNvPr id="11" name="Shape 7"/>
-          <p:cNvSpPr/>
-          <p:nvPr/>
-        </p:nvSpPr>
-        <p:spPr>
-          <a:xfrm>
-            <a:off x="566928" y="3127248"/>
-            <a:ext cx="274320" cy="274320"/>
-          </a:xfrm>
-          <a:prstGeom prst="ellipse">
-            <a:avLst/>
+          <p:cNvPr id="3" name="Shape 0"/>
+          <p:cNvSpPr/>
+          <p:nvPr/>
+        </p:nvSpPr>
+        <p:spPr>
+          <a:xfrm>
+            <a:off x="548640" y="822960"/>
+            <a:ext cx="3200400" cy="548640"/>
+          </a:xfrm>
+          <a:prstGeom prst="roundRect">
+            <a:avLst>
+              <a:gd name="adj" fmla="val 50000"/>
+            </a:avLst>
           </a:prstGeom>
           <a:solidFill>
             <a:srgbClr val="C0392B"/>
           </a:solidFill>
           <a:ln/>
         </p:spPr>
+        <p:txBody>
+          <a:bodyPr/>
+          <a:lstStyle/>
+          <a:p>
+            <a:endParaRPr lang="en-US"/>
+          </a:p>
+        </p:txBody>
+      </p:sp>
+      <p:sp>
+        <p:nvSpPr>
+          <p:cNvPr id="4" name="Shape 1"/>
+          <p:cNvSpPr/>
+          <p:nvPr/>
+        </p:nvSpPr>
+        <p:spPr>
+          <a:xfrm>
+            <a:off x="804672" y="1014984"/>
+            <a:ext cx="164592" cy="164592"/>
+          </a:xfrm>
+          <a:prstGeom prst="ellipse">
+            <a:avLst/>
+          </a:prstGeom>
+          <a:solidFill>
+            <a:srgbClr val="FFFFFF"/>
+          </a:solidFill>
+          <a:ln/>
+        </p:spPr>
+        <p:txBody>
+          <a:bodyPr/>
+          <a:lstStyle/>
+          <a:p>
+            <a:endParaRPr lang="en-US"/>
+          </a:p>
+        </p:txBody>
+      </p:sp>
+      <p:sp>
+        <p:nvSpPr>
+          <p:cNvPr id="5" name="Text 2"/>
+          <p:cNvSpPr/>
+          <p:nvPr/>
+        </p:nvSpPr>
+        <p:spPr>
+          <a:xfrm>
+            <a:off x="1051560" y="822960"/>
+            <a:ext cx="2560320" cy="548640"/>
+          </a:xfrm>
+          <a:prstGeom prst="rect">
+            <a:avLst/>
+          </a:prstGeom>
+          <a:noFill/>
+          <a:ln/>
+        </p:spPr>
+        <p:txBody>
+          <a:bodyPr wrap="square" lIns="0" tIns="0" rIns="0" bIns="0" rtlCol="0" anchor="ctr"/>
+          <a:lstStyle/>
+          <a:p>
+            <a:pPr marL="0" indent="0">
+              <a:buNone/>
+            </a:pPr>
+            <a:r>
+              <a:rPr lang="en-US" sz="1700" b="1" kern="0" spc="100" dirty="0">
+                <a:solidFill>
+                  <a:srgbClr val="FFFFFF"/>
+                </a:solidFill>
+                <a:latin typeface="Inter" pitchFamily="34" charset="0"/>
+                <a:ea typeface="Inter" pitchFamily="34" charset="-122"/>
+                <a:cs typeface="Inter" pitchFamily="34" charset="-120"/>
+              </a:rPr>
+              <a:t>LIVE DEMO</a:t>
+            </a:r>
+            <a:endParaRPr lang="en-US" sz="1700" dirty="0"/>
+          </a:p>
+        </p:txBody>
+      </p:sp>
+      <p:sp>
+        <p:nvSpPr>
+          <p:cNvPr id="6" name="Text 3"/>
+          <p:cNvSpPr/>
+          <p:nvPr/>
+        </p:nvSpPr>
+        <p:spPr>
+          <a:xfrm>
+            <a:off x="548640" y="1627632"/>
+            <a:ext cx="8046720" cy="502920"/>
+          </a:xfrm>
+          <a:prstGeom prst="rect">
+            <a:avLst/>
+          </a:prstGeom>
+          <a:noFill/>
+          <a:ln/>
+        </p:spPr>
+        <p:txBody>
+          <a:bodyPr wrap="square" lIns="0" tIns="0" rIns="0" bIns="0" rtlCol="0" anchor="ctr"/>
+          <a:lstStyle/>
+          <a:p>
+            <a:pPr marL="0" indent="0">
+              <a:buNone/>
+            </a:pPr>
+            <a:r>
+              <a:rPr lang="en-US" sz="2800" b="1" dirty="0">
+                <a:solidFill>
+                  <a:srgbClr val="141413"/>
+                </a:solidFill>
+                <a:latin typeface="Georgia" pitchFamily="34" charset="0"/>
+                <a:ea typeface="Georgia" pitchFamily="34" charset="-122"/>
+                <a:cs typeface="Georgia" pitchFamily="34" charset="-120"/>
+              </a:rPr>
+              <a:t>First call → multi-turn → caching</a:t>
+            </a:r>
+            <a:endParaRPr lang="en-US" sz="2800" dirty="0"/>
+          </a:p>
+        </p:txBody>
+      </p:sp>
+      <p:sp>
+        <p:nvSpPr>
+          <p:cNvPr id="7" name="Text 4"/>
+          <p:cNvSpPr/>
+          <p:nvPr/>
+        </p:nvSpPr>
+        <p:spPr>
+          <a:xfrm>
+            <a:off x="548640" y="2157984"/>
+            <a:ext cx="8046720" cy="365760"/>
+          </a:xfrm>
+          <a:prstGeom prst="rect">
+            <a:avLst/>
+          </a:prstGeom>
+          <a:noFill/>
+          <a:ln/>
+        </p:spPr>
+        <p:txBody>
+          <a:bodyPr wrap="square" lIns="0" tIns="0" rIns="0" bIns="0" rtlCol="0" anchor="ctr"/>
+          <a:lstStyle/>
+          <a:p>
+            <a:pPr marL="0" indent="0">
+              <a:buNone/>
+            </a:pPr>
+            <a:r>
+              <a:rPr lang="en-US" sz="1600" b="1" dirty="0">
+                <a:solidFill>
+                  <a:srgbClr val="C25E40"/>
+                </a:solidFill>
+                <a:latin typeface="Inter" pitchFamily="34" charset="0"/>
+                <a:ea typeface="Inter" pitchFamily="34" charset="-122"/>
+                <a:cs typeface="Inter" pitchFamily="34" charset="-120"/>
+              </a:rPr>
+              <a:t>Watch the token counts change across calls</a:t>
+            </a:r>
+            <a:endParaRPr lang="en-US" sz="1600" dirty="0"/>
+          </a:p>
+        </p:txBody>
+      </p:sp>
+      <p:sp>
+        <p:nvSpPr>
+          <p:cNvPr id="8" name="Shape 5"/>
+          <p:cNvSpPr/>
+          <p:nvPr/>
+        </p:nvSpPr>
+        <p:spPr>
+          <a:xfrm>
+            <a:off x="566928" y="2743200"/>
+            <a:ext cx="274320" cy="274320"/>
+          </a:xfrm>
+          <a:prstGeom prst="ellipse">
+            <a:avLst/>
+          </a:prstGeom>
+          <a:solidFill>
+            <a:srgbClr val="C0392B"/>
+          </a:solidFill>
+          <a:ln/>
+        </p:spPr>
+        <p:txBody>
+          <a:bodyPr/>
+          <a:lstStyle/>
+          <a:p>
+            <a:endParaRPr lang="en-US"/>
+          </a:p>
+        </p:txBody>
       </p:sp>
       <p:pic>
         <p:nvPicPr>
-          <p:cNvPr id="12" name="Image 2" descr="preencoded.png">    </p:cNvPr>
+          <p:cNvPr id="9" name="Image 1" descr="preencoded.png"/>
           <p:cNvPicPr>
             <a:picLocks noChangeAspect="1"/>
           </p:cNvPicPr>
@@ -10768,7 +10100,7 @@
         </p:blipFill>
         <p:spPr>
           <a:xfrm>
-            <a:off x="638251" y="3198571"/>
+            <a:off x="638251" y="2814523"/>
             <a:ext cx="131674" cy="131674"/>
           </a:xfrm>
           <a:prstGeom prst="rect">
@@ -10778,13 +10110,13 @@
       </p:pic>
       <p:sp>
         <p:nvSpPr>
-          <p:cNvPr id="13" name="Text 8"/>
-          <p:cNvSpPr/>
-          <p:nvPr/>
-        </p:nvSpPr>
-        <p:spPr>
-          <a:xfrm>
-            <a:off x="960120" y="3108960"/>
+          <p:cNvPr id="10" name="Text 6"/>
+          <p:cNvSpPr/>
+          <p:nvPr/>
+        </p:nvSpPr>
+        <p:spPr>
+          <a:xfrm>
+            <a:off x="960120" y="2724912"/>
             <a:ext cx="7406640" cy="310896"/>
           </a:xfrm>
           <a:prstGeom prst="rect">
@@ -10797,7 +10129,7 @@
           <a:bodyPr wrap="square" lIns="0" tIns="0" rIns="0" bIns="0" rtlCol="0" anchor="ctr"/>
           <a:lstStyle/>
           <a:p>
-            <a:pPr indent="0" marL="0">
+            <a:pPr marL="0" indent="0">
               <a:buNone/>
             </a:pPr>
             <a:r>
@@ -10809,7 +10141,7 @@
                 <a:ea typeface="Inter" pitchFamily="34" charset="-122"/>
                 <a:cs typeface="Inter" pitchFamily="34" charset="-120"/>
               </a:rPr>
-              <a:t>Extend it into a multi-turn conversation</a:t>
+              <a:t>Make the first working single-turn call</a:t>
             </a:r>
             <a:endParaRPr lang="en-US" sz="1450" dirty="0"/>
           </a:p>
@@ -10817,13 +10149,13 @@
       </p:sp>
       <p:sp>
         <p:nvSpPr>
-          <p:cNvPr id="14" name="Shape 9"/>
-          <p:cNvSpPr/>
-          <p:nvPr/>
-        </p:nvSpPr>
-        <p:spPr>
-          <a:xfrm>
-            <a:off x="566928" y="3511296"/>
+          <p:cNvPr id="11" name="Shape 7"/>
+          <p:cNvSpPr/>
+          <p:nvPr/>
+        </p:nvSpPr>
+        <p:spPr>
+          <a:xfrm>
+            <a:off x="566928" y="3127248"/>
             <a:ext cx="274320" cy="274320"/>
           </a:xfrm>
           <a:prstGeom prst="ellipse">
@@ -10834,23 +10166,120 @@
           </a:solidFill>
           <a:ln/>
         </p:spPr>
+        <p:txBody>
+          <a:bodyPr/>
+          <a:lstStyle/>
+          <a:p>
+            <a:endParaRPr lang="en-US"/>
+          </a:p>
+        </p:txBody>
       </p:sp>
       <p:pic>
         <p:nvPicPr>
-          <p:cNvPr id="15" name="Image 3" descr="preencoded.png">    </p:cNvPr>
+          <p:cNvPr id="12" name="Image 2" descr="preencoded.png"/>
           <p:cNvPicPr>
             <a:picLocks noChangeAspect="1"/>
           </p:cNvPicPr>
           <p:nvPr/>
         </p:nvPicPr>
         <p:blipFill>
-          <a:blip r:embed="rId4"/>
+          <a:blip r:embed="rId3"/>
           <a:stretch>
             <a:fillRect/>
           </a:stretch>
         </p:blipFill>
         <p:spPr>
           <a:xfrm>
+            <a:off x="638251" y="3198571"/>
+            <a:ext cx="131674" cy="131674"/>
+          </a:xfrm>
+          <a:prstGeom prst="rect">
+            <a:avLst/>
+          </a:prstGeom>
+        </p:spPr>
+      </p:pic>
+      <p:sp>
+        <p:nvSpPr>
+          <p:cNvPr id="13" name="Text 8"/>
+          <p:cNvSpPr/>
+          <p:nvPr/>
+        </p:nvSpPr>
+        <p:spPr>
+          <a:xfrm>
+            <a:off x="960120" y="3108960"/>
+            <a:ext cx="7406640" cy="310896"/>
+          </a:xfrm>
+          <a:prstGeom prst="rect">
+            <a:avLst/>
+          </a:prstGeom>
+          <a:noFill/>
+          <a:ln/>
+        </p:spPr>
+        <p:txBody>
+          <a:bodyPr wrap="square" lIns="0" tIns="0" rIns="0" bIns="0" rtlCol="0" anchor="ctr"/>
+          <a:lstStyle/>
+          <a:p>
+            <a:pPr marL="0" indent="0">
+              <a:buNone/>
+            </a:pPr>
+            <a:r>
+              <a:rPr lang="en-US" sz="1450" dirty="0">
+                <a:solidFill>
+                  <a:srgbClr val="141413"/>
+                </a:solidFill>
+                <a:latin typeface="Inter" pitchFamily="34" charset="0"/>
+                <a:ea typeface="Inter" pitchFamily="34" charset="-122"/>
+                <a:cs typeface="Inter" pitchFamily="34" charset="-120"/>
+              </a:rPr>
+              <a:t>Extend it into a multi-turn conversation</a:t>
+            </a:r>
+            <a:endParaRPr lang="en-US" sz="1450" dirty="0"/>
+          </a:p>
+        </p:txBody>
+      </p:sp>
+      <p:sp>
+        <p:nvSpPr>
+          <p:cNvPr id="14" name="Shape 9"/>
+          <p:cNvSpPr/>
+          <p:nvPr/>
+        </p:nvSpPr>
+        <p:spPr>
+          <a:xfrm>
+            <a:off x="566928" y="3511296"/>
+            <a:ext cx="274320" cy="274320"/>
+          </a:xfrm>
+          <a:prstGeom prst="ellipse">
+            <a:avLst/>
+          </a:prstGeom>
+          <a:solidFill>
+            <a:srgbClr val="C0392B"/>
+          </a:solidFill>
+          <a:ln/>
+        </p:spPr>
+        <p:txBody>
+          <a:bodyPr/>
+          <a:lstStyle/>
+          <a:p>
+            <a:endParaRPr lang="en-US"/>
+          </a:p>
+        </p:txBody>
+      </p:sp>
+      <p:pic>
+        <p:nvPicPr>
+          <p:cNvPr id="15" name="Image 3" descr="preencoded.png"/>
+          <p:cNvPicPr>
+            <a:picLocks noChangeAspect="1"/>
+          </p:cNvPicPr>
+          <p:nvPr/>
+        </p:nvPicPr>
+        <p:blipFill>
+          <a:blip r:embed="rId3"/>
+          <a:stretch>
+            <a:fillRect/>
+          </a:stretch>
+        </p:blipFill>
+        <p:spPr>
+          <a:xfrm>
             <a:off x="638251" y="3582619"/>
             <a:ext cx="131674" cy="131674"/>
           </a:xfrm>
@@ -10880,7 +10309,7 @@
           <a:bodyPr wrap="square" lIns="0" tIns="0" rIns="0" bIns="0" rtlCol="0" anchor="ctr"/>
           <a:lstStyle/>
           <a:p>
-            <a:pPr indent="0" marL="0">
+            <a:pPr marL="0" indent="0">
               <a:buNone/>
             </a:pPr>
             <a:r>
@@ -10919,6 +10348,13 @@
           </a:solidFill>
           <a:ln/>
         </p:spPr>
+        <p:txBody>
+          <a:bodyPr/>
+          <a:lstStyle/>
+          <a:p>
+            <a:endParaRPr lang="en-US"/>
+          </a:p>
+        </p:txBody>
       </p:sp>
       <p:sp>
         <p:nvSpPr>
@@ -10941,7 +10377,7 @@
           <a:bodyPr wrap="square" lIns="0" tIns="0" rIns="0" bIns="0" rtlCol="0" anchor="ctr"/>
           <a:lstStyle/>
           <a:p>
-            <a:pPr indent="0" marL="0">
+            <a:pPr marL="0" indent="0">
               <a:buNone/>
             </a:pPr>
             <a:r>
@@ -10955,9 +10391,6 @@
               </a:rPr>
               <a:t>Watch for it:  </a:t>
             </a:r>
-            <a:pPr indent="0" marL="0">
-              <a:buNone/>
-            </a:pPr>
             <a:r>
               <a:rPr lang="en-US" sz="1250" dirty="0">
                 <a:solidFill>
@@ -10994,7 +10427,7 @@
           <a:bodyPr wrap="square" rtlCol="0" anchor="ctr"/>
           <a:lstStyle/>
           <a:p>
-            <a:pPr indent="0" marL="0">
+            <a:pPr marL="0" indent="0">
               <a:buNone/>
             </a:pPr>
             <a:r>
@@ -11033,7 +10466,7 @@
           <a:bodyPr wrap="square" rtlCol="0" anchor="ctr"/>
           <a:lstStyle/>
           <a:p>
-            <a:pPr algn="r" indent="0" marL="0">
+            <a:pPr marL="0" indent="0" algn="r">
               <a:buNone/>
             </a:pPr>
             <a:r>
@@ -11048,45 +10481,6 @@
               <a:t>Day 2 · Section 1  ·  9/13</a:t>
             </a:r>
             <a:endParaRPr lang="en-US" sz="900" dirty="0"/>
-          </a:p>
-        </p:txBody>
-      </p:sp>
-      <p:sp>
-        <p:nvSpPr>
-          <p:cNvPr id="21" name="Text 15"/>
-          <p:cNvSpPr/>
-          <p:nvPr/>
-        </p:nvSpPr>
-        <p:spPr>
-          <a:xfrm>
-            <a:off x="548640" y="4462272"/>
-            <a:ext cx="8046720" cy="274320"/>
-          </a:xfrm>
-          <a:prstGeom prst="rect">
-            <a:avLst/>
-          </a:prstGeom>
-          <a:noFill/>
-          <a:ln/>
-        </p:spPr>
-        <p:txBody>
-          <a:bodyPr wrap="square" lIns="0" tIns="0" rIns="0" bIns="0" rtlCol="0" anchor="ctr"/>
-          <a:lstStyle/>
-          <a:p>
-            <a:pPr indent="0" marL="0">
-              <a:buNone/>
-            </a:pPr>
-            <a:r>
-              <a:rPr lang="en-US" sz="1000" i="1" dirty="0">
-                <a:solidFill>
-                  <a:srgbClr val="615C52"/>
-                </a:solidFill>
-                <a:latin typeface="Inter" pitchFamily="34" charset="0"/>
-                <a:ea typeface="Inter" pitchFamily="34" charset="-122"/>
-                <a:cs typeface="Inter" pitchFamily="34" charset="-120"/>
-              </a:rPr>
-              <a:t>▸ Show the actual Usage numbers — CacheCreation on call one, CacheRead on call two.</a:t>
-            </a:r>
-            <a:endParaRPr lang="en-US" sz="1000" dirty="0"/>
           </a:p>
         </p:txBody>
       </p:sp>

--- a/decks/Day 2/Day2-Section1-CSharp-SDK-Fundamentals.pptx
+++ b/decks/Day 2/Day2-Section1-CSharp-SDK-Fundamentals.pptx
@@ -667,45 +667,6 @@
           </a:p>
         </p:txBody>
       </p:sp>
-      <p:sp>
-        <p:nvSpPr>
-          <p:cNvPr id="8" name="Text 5"/>
-          <p:cNvSpPr/>
-          <p:nvPr/>
-        </p:nvSpPr>
-        <p:spPr>
-          <a:xfrm>
-            <a:off x="640080" y="3639312"/>
-            <a:ext cx="7315200" cy="365760"/>
-          </a:xfrm>
-          <a:prstGeom prst="rect">
-            <a:avLst/>
-          </a:prstGeom>
-          <a:noFill/>
-          <a:ln/>
-        </p:spPr>
-        <p:txBody>
-          <a:bodyPr wrap="square" lIns="0" tIns="0" rIns="0" bIns="0" rtlCol="0" anchor="ctr"/>
-          <a:lstStyle/>
-          <a:p>
-            <a:pPr marL="0" indent="0">
-              <a:buNone/>
-            </a:pPr>
-            <a:r>
-              <a:rPr lang="en-US" sz="1600" dirty="0">
-                <a:solidFill>
-                  <a:srgbClr val="615C52"/>
-                </a:solidFill>
-                <a:latin typeface="Inter" pitchFamily="34" charset="0"/>
-                <a:ea typeface="Inter" pitchFamily="34" charset="-122"/>
-                <a:cs typeface="Inter" pitchFamily="34" charset="-120"/>
-              </a:rPr>
-              <a:t>90 min  ·  45 lecture / demo  +  45 lab</a:t>
-            </a:r>
-            <a:endParaRPr lang="en-US" sz="1600" dirty="0"/>
-          </a:p>
-        </p:txBody>
-      </p:sp>
     </p:spTree>
   </p:cSld>
   <p:clrMapOvr>
